--- a/docs/20min_面试汇报_詹绍基_20页图表版.pptx
+++ b/docs/20min_面试汇报_詹绍基_20页图表版.pptx
@@ -26,6 +26,7 @@
     <p:sldId id="274" r:id="rId25"/>
     <p:sldId id="275" r:id="rId26"/>
     <p:sldId id="276" r:id="rId27"/>
+    <p:sldId id="277" r:id="rId28"/>
   </p:sldIdLst>
   <p:sldSz cx="12191695" cy="6858000" type="screen4x3"/>
   <p:notesSz cx="6858000" cy="9144000"/>
@@ -3310,7 +3311,7 @@
               </a:defRPr>
             </a:pPr>
             <a:r>
-              <a:t>我的研究实践与下一步计划</a:t>
+              <a:t>面向可信物理AI的研究路径</a:t>
             </a:r>
           </a:p>
         </p:txBody>
@@ -3360,7 +3361,7 @@
         <p:spPr>
           <a:xfrm>
             <a:off x="1115568" y="2816352"/>
-            <a:ext cx="5486400" cy="365760"/>
+            <a:ext cx="5760720" cy="365760"/>
           </a:xfrm>
           <a:prstGeom prst="rect">
             <a:avLst/>
@@ -3374,7 +3375,7 @@
           <a:lstStyle/>
           <a:p>
             <a:pPr algn="l">
-              <a:defRPr sz="1400" b="0">
+              <a:defRPr sz="1300" b="0">
                 <a:solidFill>
                   <a:srgbClr val="237486"/>
                 </a:solidFill>
@@ -3382,7 +3383,7 @@
               </a:defRPr>
             </a:pPr>
             <a:r>
-              <a:t>关键词：SNN / 具身智能 / 可信AI / 隐私-能效-性能协同优化</a:t>
+              <a:t>关键词：SNN / 世界模型 / 可解释机器人学习 / 隐私-能效-性能协同</a:t>
             </a:r>
           </a:p>
         </p:txBody>
@@ -3396,7 +3397,7 @@
         <p:spPr>
           <a:xfrm>
             <a:off x="1078992" y="3703320"/>
-            <a:ext cx="2971800" cy="1572768"/>
+            <a:ext cx="3154680" cy="1572768"/>
           </a:xfrm>
           <a:prstGeom prst="roundRect">
             <a:avLst/>
@@ -3441,7 +3442,7 @@
         <p:spPr>
           <a:xfrm>
             <a:off x="1078992" y="3703320"/>
-            <a:ext cx="2971800" cy="146304"/>
+            <a:ext cx="3154680" cy="146304"/>
           </a:xfrm>
           <a:prstGeom prst="roundRect">
             <a:avLst/>
@@ -3486,7 +3487,7 @@
         <p:spPr>
           <a:xfrm>
             <a:off x="1280160" y="3922776"/>
-            <a:ext cx="2569464" cy="384048"/>
+            <a:ext cx="2752344" cy="384048"/>
           </a:xfrm>
           <a:prstGeom prst="rect">
             <a:avLst/>
@@ -3508,7 +3509,7 @@
               </a:defRPr>
             </a:pPr>
             <a:r>
-              <a:t>汇报结构</a:t>
+              <a:t>汇报主线</a:t>
             </a:r>
           </a:p>
         </p:txBody>
@@ -3522,7 +3523,7 @@
         <p:spPr>
           <a:xfrm>
             <a:off x="1280160" y="4343400"/>
-            <a:ext cx="2569464" cy="731519"/>
+            <a:ext cx="2752344" cy="731519"/>
           </a:xfrm>
           <a:prstGeom prst="rect">
             <a:avLst/>
@@ -3544,15 +3545,15 @@
               </a:defRPr>
             </a:pPr>
             <a:r>
-              <a:t>个人背景</a:t>
+              <a:t>研究动机与问题定义</a:t>
             </a:r>
             <a:br/>
             <a:r>
-              <a:t>项目实证</a:t>
+              <a:t>实证结果与可复现实验</a:t>
             </a:r>
             <a:br/>
             <a:r>
-              <a:t>研究方法论与下一步计划</a:t>
+              <a:t>方法论与下一步计划</a:t>
             </a:r>
           </a:p>
         </p:txBody>
@@ -3565,8 +3566,8 @@
         </p:nvSpPr>
         <p:spPr>
           <a:xfrm>
-            <a:off x="4315968" y="3703320"/>
-            <a:ext cx="2926080" cy="1572768"/>
+            <a:off x="4498848" y="3703320"/>
+            <a:ext cx="3246120" cy="1572768"/>
           </a:xfrm>
           <a:prstGeom prst="roundRect">
             <a:avLst/>
@@ -3610,8 +3611,8 @@
         </p:nvSpPr>
         <p:spPr>
           <a:xfrm>
-            <a:off x="4315968" y="3703320"/>
-            <a:ext cx="2926080" cy="146304"/>
+            <a:off x="4498848" y="3703320"/>
+            <a:ext cx="3246120" cy="146304"/>
           </a:xfrm>
           <a:prstGeom prst="roundRect">
             <a:avLst/>
@@ -3655,8 +3656,8 @@
         </p:nvSpPr>
         <p:spPr>
           <a:xfrm>
-            <a:off x="4517136" y="3922776"/>
-            <a:ext cx="2523744" cy="384048"/>
+            <a:off x="4700016" y="3922776"/>
+            <a:ext cx="2843784" cy="384048"/>
           </a:xfrm>
           <a:prstGeom prst="rect">
             <a:avLst/>
@@ -3678,7 +3679,7 @@
               </a:defRPr>
             </a:pPr>
             <a:r>
-              <a:t>核心问题</a:t>
+              <a:t>研究问题</a:t>
             </a:r>
           </a:p>
         </p:txBody>
@@ -3691,8 +3692,8 @@
         </p:nvSpPr>
         <p:spPr>
           <a:xfrm>
-            <a:off x="4517136" y="4343400"/>
-            <a:ext cx="2523744" cy="731519"/>
+            <a:off x="4700016" y="4343400"/>
+            <a:ext cx="2843784" cy="731519"/>
           </a:xfrm>
           <a:prstGeom prst="rect">
             <a:avLst/>
@@ -3714,7 +3715,7 @@
               </a:defRPr>
             </a:pPr>
             <a:r>
-              <a:t>在真实约束下，如何让类脑系统兼顾性能、隐私与能效？</a:t>
+              <a:t>如何在真实约束下，让智能系统同时具备可解释性、隐私安全与能效可用性？</a:t>
             </a:r>
           </a:p>
         </p:txBody>
@@ -3855,7 +3856,7 @@
               </a:defRPr>
             </a:pPr>
             <a:r>
-              <a:t>西湖大学金耀初实验室面试汇报</a:t>
+              <a:t>Research Interview Deck</a:t>
             </a:r>
           </a:p>
         </p:txBody>
@@ -4654,7 +4655,7 @@
       </p:sp>
       <p:pic>
         <p:nvPicPr>
-          <p:cNvPr id="21" name="Picture 20" descr="pareto_baselines.png"/>
+          <p:cNvPr id="21" name="Picture 20" descr="neuro_baseline_pareto_redraw.png"/>
           <p:cNvPicPr>
             <a:picLocks noChangeAspect="1"/>
           </p:cNvPicPr>
@@ -4668,8 +4669,8 @@
         </p:blipFill>
         <p:spPr>
           <a:xfrm>
-            <a:off x="1874519" y="1207007"/>
-            <a:ext cx="6400800" cy="4572000"/>
+            <a:off x="1156062" y="1207007"/>
+            <a:ext cx="7837714" cy="4572000"/>
           </a:xfrm>
           <a:prstGeom prst="rect">
             <a:avLst/>
@@ -5036,7 +5037,43 @@
               </a:defRPr>
             </a:pPr>
             <a:r>
-              <a:t>Pareto 视角比单一精度排名更接近真实部署逻辑。</a:t>
+              <a:t>quick baseline_summary.csv 中，hybrid: val_acc=0.9612, mia_auc=0.4650, 呈现更均衡折中。</a:t>
+            </a:r>
+          </a:p>
+        </p:txBody>
+      </p:sp>
+      <p:sp>
+        <p:nvSpPr>
+          <p:cNvPr id="30" name="TextBox 29"/>
+          <p:cNvSpPr txBox="1"/>
+          <p:nvPr/>
+        </p:nvSpPr>
+        <p:spPr>
+          <a:xfrm>
+            <a:off x="731520" y="6217920"/>
+            <a:ext cx="9875520" cy="137160"/>
+          </a:xfrm>
+          <a:prstGeom prst="rect">
+            <a:avLst/>
+          </a:prstGeom>
+          <a:noFill/>
+        </p:spPr>
+        <p:txBody>
+          <a:bodyPr wrap="square" anchor="t">
+            <a:spAutoFit/>
+          </a:bodyPr>
+          <a:lstStyle/>
+          <a:p>
+            <a:pPr algn="l">
+              <a:defRPr sz="800" b="0">
+                <a:solidFill>
+                  <a:srgbClr val="606C7D"/>
+                </a:solidFill>
+                <a:latin typeface="Noto Sans CJK SC"/>
+              </a:defRPr>
+            </a:pPr>
+            <a:r>
+              <a:t>Source [N1]: Neuro-Symbiosis/outputs/quick/benchmark/baseline_summary.csv</a:t>
             </a:r>
           </a:p>
         </p:txBody>
@@ -5835,7 +5872,7 @@
       </p:sp>
       <p:pic>
         <p:nvPicPr>
-          <p:cNvPr id="21" name="Picture 20" descr="coupling_3d.png"/>
+          <p:cNvPr id="21" name="Picture 20" descr="neuro_coupling_energy_landscape_redraw.png"/>
           <p:cNvPicPr>
             <a:picLocks noChangeAspect="1"/>
           </p:cNvPicPr>
@@ -5849,8 +5886,8 @@
         </p:blipFill>
         <p:spPr>
           <a:xfrm>
-            <a:off x="1024128" y="1802739"/>
-            <a:ext cx="4764024" cy="3334816"/>
+            <a:off x="1024128" y="2080640"/>
+            <a:ext cx="4764024" cy="2779014"/>
           </a:xfrm>
           <a:prstGeom prst="rect">
             <a:avLst/>
@@ -5940,7 +5977,7 @@
       </p:sp>
       <p:pic>
         <p:nvPicPr>
-          <p:cNvPr id="24" name="Picture 23" descr="coupling_2d_marginals.png"/>
+          <p:cNvPr id="24" name="Picture 23" descr="neuro_coupling_threshold_energy_lines_redraw.png"/>
           <p:cNvPicPr>
             <a:picLocks noChangeAspect="1"/>
           </p:cNvPicPr>
@@ -5954,8 +5991,8 @@
         </p:blipFill>
         <p:spPr>
           <a:xfrm>
-            <a:off x="6373368" y="2603961"/>
-            <a:ext cx="4764024" cy="1732372"/>
+            <a:off x="6373368" y="2080640"/>
+            <a:ext cx="4764024" cy="2779014"/>
           </a:xfrm>
           <a:prstGeom prst="rect">
             <a:avLst/>
@@ -6954,7 +6991,7 @@
       </p:sp>
       <p:pic>
         <p:nvPicPr>
-          <p:cNvPr id="21" name="Picture 20" descr="model_performance.png"/>
+          <p:cNvPr id="21" name="Picture 20" descr="med_performance_redraw.png"/>
           <p:cNvPicPr>
             <a:picLocks noChangeAspect="1"/>
           </p:cNvPicPr>
@@ -6968,8 +7005,8 @@
         </p:blipFill>
         <p:spPr>
           <a:xfrm>
-            <a:off x="1024128" y="2022258"/>
-            <a:ext cx="4764024" cy="2895779"/>
+            <a:off x="1024128" y="2080640"/>
+            <a:ext cx="4764024" cy="2779014"/>
           </a:xfrm>
           <a:prstGeom prst="rect">
             <a:avLst/>
@@ -7059,7 +7096,7 @@
       </p:sp>
       <p:pic>
         <p:nvPicPr>
-          <p:cNvPr id="24" name="Picture 23" descr="cross_dataset_tradeoff.png"/>
+          <p:cNvPr id="24" name="Picture 23" descr="med_cross_tradeoff_redraw.png"/>
           <p:cNvPicPr>
             <a:picLocks noChangeAspect="1"/>
           </p:cNvPicPr>
@@ -7073,8 +7110,8 @@
         </p:blipFill>
         <p:spPr>
           <a:xfrm>
-            <a:off x="6373368" y="2549773"/>
-            <a:ext cx="4764024" cy="1840749"/>
+            <a:off x="6373368" y="2080640"/>
+            <a:ext cx="4764024" cy="2779014"/>
           </a:xfrm>
           <a:prstGeom prst="rect">
             <a:avLst/>
@@ -7274,7 +7311,43 @@
               </a:defRPr>
             </a:pPr>
             <a:r>
-              <a:t>在医学影像任务中，稀疏 SNN 能维持竞争性能，同时给稳健性和低功耗部署留下空间。</a:t>
+              <a:t>DermaMNIST final_compare 中，SNN test_acc=69.93±0.20，ANN=75.06±0.20；SNN latency=0.12ms/sample。</a:t>
+            </a:r>
+          </a:p>
+        </p:txBody>
+      </p:sp>
+      <p:sp>
+        <p:nvSpPr>
+          <p:cNvPr id="30" name="TextBox 29"/>
+          <p:cNvSpPr txBox="1"/>
+          <p:nvPr/>
+        </p:nvSpPr>
+        <p:spPr>
+          <a:xfrm>
+            <a:off x="731520" y="6217920"/>
+            <a:ext cx="9875520" cy="137160"/>
+          </a:xfrm>
+          <a:prstGeom prst="rect">
+            <a:avLst/>
+          </a:prstGeom>
+          <a:noFill/>
+        </p:spPr>
+        <p:txBody>
+          <a:bodyPr wrap="square" anchor="t">
+            <a:spAutoFit/>
+          </a:bodyPr>
+          <a:lstStyle/>
+          <a:p>
+            <a:pPr algn="l">
+              <a:defRPr sz="800" b="0">
+                <a:solidFill>
+                  <a:srgbClr val="606C7D"/>
+                </a:solidFill>
+                <a:latin typeface="Noto Sans CJK SC"/>
+              </a:defRPr>
+            </a:pPr>
+            <a:r>
+              <a:t>Source [M1]: MedSparseSNN/outputs/csv/training_summary_dermamnist_final_compare.csv</a:t>
             </a:r>
           </a:p>
         </p:txBody>
@@ -8073,7 +8146,7 @@
       </p:sp>
       <p:pic>
         <p:nvPicPr>
-          <p:cNvPr id="21" name="Picture 20" descr="sparsity_vs_mia.png"/>
+          <p:cNvPr id="21" name="Picture 20" descr="med_mia_auc_redraw.png"/>
           <p:cNvPicPr>
             <a:picLocks noChangeAspect="1"/>
           </p:cNvPicPr>
@@ -8087,8 +8160,8 @@
         </p:blipFill>
         <p:spPr>
           <a:xfrm>
-            <a:off x="1024128" y="1985609"/>
-            <a:ext cx="4764024" cy="2905068"/>
+            <a:off x="1024128" y="2048636"/>
+            <a:ext cx="4764024" cy="2779014"/>
           </a:xfrm>
           <a:prstGeom prst="rect">
             <a:avLst/>
@@ -8178,7 +8251,7 @@
       </p:sp>
       <p:pic>
         <p:nvPicPr>
-          <p:cNvPr id="24" name="Picture 23" descr="transformer_sparsity_vs_mia.png"/>
+          <p:cNvPr id="24" name="Picture 23" descr="med_mia_auc_accuracy_redraw.png"/>
           <p:cNvPicPr>
             <a:picLocks noChangeAspect="1"/>
           </p:cNvPicPr>
@@ -8192,8 +8265,8 @@
         </p:blipFill>
         <p:spPr>
           <a:xfrm>
-            <a:off x="6373368" y="1984407"/>
-            <a:ext cx="4764024" cy="2907473"/>
+            <a:off x="6373368" y="2048636"/>
+            <a:ext cx="4764024" cy="2779014"/>
           </a:xfrm>
           <a:prstGeom prst="rect">
             <a:avLst/>
@@ -8393,7 +8466,43 @@
               </a:defRPr>
             </a:pPr>
             <a:r>
-              <a:t>从隐私攻击面看，稀疏策略不是只省能耗，也在改变系统暴露出来的风险形态。</a:t>
+              <a:t>DermaMNIST MIA 结果中，SNN auc=0.4954±0.0005，ANN auc=0.4857±0.0016（需继续扩大样本验证显著性）。</a:t>
+            </a:r>
+          </a:p>
+        </p:txBody>
+      </p:sp>
+      <p:sp>
+        <p:nvSpPr>
+          <p:cNvPr id="30" name="TextBox 29"/>
+          <p:cNvSpPr txBox="1"/>
+          <p:nvPr/>
+        </p:nvSpPr>
+        <p:spPr>
+          <a:xfrm>
+            <a:off x="731520" y="6217920"/>
+            <a:ext cx="9875520" cy="137160"/>
+          </a:xfrm>
+          <a:prstGeom prst="rect">
+            <a:avLst/>
+          </a:prstGeom>
+          <a:noFill/>
+        </p:spPr>
+        <p:txBody>
+          <a:bodyPr wrap="square" anchor="t">
+            <a:spAutoFit/>
+          </a:bodyPr>
+          <a:lstStyle/>
+          <a:p>
+            <a:pPr algn="l">
+              <a:defRPr sz="800" b="0">
+                <a:solidFill>
+                  <a:srgbClr val="606C7D"/>
+                </a:solidFill>
+                <a:latin typeface="Noto Sans CJK SC"/>
+              </a:defRPr>
+            </a:pPr>
+            <a:r>
+              <a:t>Source [M2]: MedSparseSNN/outputs/csv/mia_results_dermamnist_final_compare.csv</a:t>
             </a:r>
           </a:p>
         </p:txBody>
@@ -9192,7 +9301,7 @@
       </p:sp>
       <p:pic>
         <p:nvPicPr>
-          <p:cNvPr id="21" name="Picture 20" descr="power_latency.png"/>
+          <p:cNvPr id="21" name="Picture 20" descr="med_power_latency_redraw.png"/>
           <p:cNvPicPr>
             <a:picLocks noChangeAspect="1"/>
           </p:cNvPicPr>
@@ -9206,8 +9315,8 @@
         </p:blipFill>
         <p:spPr>
           <a:xfrm>
-            <a:off x="1171611" y="1298448"/>
-            <a:ext cx="6983656" cy="4279392"/>
+            <a:off x="1024128" y="1315212"/>
+            <a:ext cx="7278623" cy="4245863"/>
           </a:xfrm>
           <a:prstGeom prst="rect">
             <a:avLst/>
@@ -9371,7 +9480,7 @@
               </a:defRPr>
             </a:pPr>
             <a:r>
-              <a:t>为什么单独放这一页</a:t>
+              <a:t>备注</a:t>
             </a:r>
           </a:p>
         </p:txBody>
@@ -9407,7 +9516,7 @@
               </a:defRPr>
             </a:pPr>
             <a:r>
-              <a:t>这一页以前和隐私图挤在一起，会让图表太小且被压缩。现在拆开后，坐标、图例和趋势线能清楚看见，也更符合你要求的“清晰舒展”。</a:t>
+              <a:t>这页单独展示 power-latency 图，避免三图并排导致坐标轴和图例不可读。</a:t>
             </a:r>
           </a:p>
         </p:txBody>
@@ -9569,7 +9678,43 @@
               </a:defRPr>
             </a:pPr>
             <a:r>
-              <a:t>低功耗不是附带收益，而是类脑路线在真实应用里必须兑现的核心价值。</a:t>
+              <a:t>能效是硬约束，不是附带收益；图表必须保证可读后才有解释价值。</a:t>
+            </a:r>
+          </a:p>
+        </p:txBody>
+      </p:sp>
+      <p:sp>
+        <p:nvSpPr>
+          <p:cNvPr id="31" name="TextBox 30"/>
+          <p:cNvSpPr txBox="1"/>
+          <p:nvPr/>
+        </p:nvSpPr>
+        <p:spPr>
+          <a:xfrm>
+            <a:off x="731520" y="6217920"/>
+            <a:ext cx="9875520" cy="137160"/>
+          </a:xfrm>
+          <a:prstGeom prst="rect">
+            <a:avLst/>
+          </a:prstGeom>
+          <a:noFill/>
+        </p:spPr>
+        <p:txBody>
+          <a:bodyPr wrap="square" anchor="t">
+            <a:spAutoFit/>
+          </a:bodyPr>
+          <a:lstStyle/>
+          <a:p>
+            <a:pPr algn="l">
+              <a:defRPr sz="800" b="0">
+                <a:solidFill>
+                  <a:srgbClr val="606C7D"/>
+                </a:solidFill>
+                <a:latin typeface="Noto Sans CJK SC"/>
+              </a:defRPr>
+            </a:pPr>
+            <a:r>
+              <a:t>Source [M3]: MedSparseSNN/outputs/csv/training_summary_dermamnist_final_compare.csv</a:t>
             </a:r>
           </a:p>
         </p:txBody>
@@ -10368,7 +10513,7 @@
       </p:sp>
       <p:pic>
         <p:nvPicPr>
-          <p:cNvPr id="21" name="Picture 20" descr="pareto.png"/>
+          <p:cNvPr id="21" name="Picture 20" descr="privenergy_pareto_redraw.png"/>
           <p:cNvPicPr>
             <a:picLocks noChangeAspect="1"/>
           </p:cNvPicPr>
@@ -10382,8 +10527,8 @@
         </p:blipFill>
         <p:spPr>
           <a:xfrm>
-            <a:off x="1864461" y="1207007"/>
-            <a:ext cx="6375196" cy="4553712"/>
+            <a:off x="1148878" y="1207007"/>
+            <a:ext cx="7806363" cy="4553712"/>
           </a:xfrm>
           <a:prstGeom prst="rect">
             <a:avLst/>
@@ -10750,7 +10895,43 @@
               </a:defRPr>
             </a:pPr>
             <a:r>
-              <a:t>benchmark 不是附属品，而是研究质量与后续扩展能力的一部分。</a:t>
+              <a:t>PrivEnergyBench 默认报告显示：mlp val_acc=0.9208，linear energy=0.0164mJ/sample。</a:t>
+            </a:r>
+          </a:p>
+        </p:txBody>
+      </p:sp>
+      <p:sp>
+        <p:nvSpPr>
+          <p:cNvPr id="30" name="TextBox 29"/>
+          <p:cNvSpPr txBox="1"/>
+          <p:nvPr/>
+        </p:nvSpPr>
+        <p:spPr>
+          <a:xfrm>
+            <a:off x="731520" y="6217920"/>
+            <a:ext cx="9875520" cy="137160"/>
+          </a:xfrm>
+          <a:prstGeom prst="rect">
+            <a:avLst/>
+          </a:prstGeom>
+          <a:noFill/>
+        </p:spPr>
+        <p:txBody>
+          <a:bodyPr wrap="square" anchor="t">
+            <a:spAutoFit/>
+          </a:bodyPr>
+          <a:lstStyle/>
+          <a:p>
+            <a:pPr algn="l">
+              <a:defRPr sz="800" b="0">
+                <a:solidFill>
+                  <a:srgbClr val="606C7D"/>
+                </a:solidFill>
+                <a:latin typeface="Noto Sans CJK SC"/>
+              </a:defRPr>
+            </a:pPr>
+            <a:r>
+              <a:t>Source [P1]: PrivEnergyBench/outputs/default/benchmark_report.md</a:t>
             </a:r>
           </a:p>
         </p:txBody>
@@ -13236,7 +13417,7 @@
               </a:defRPr>
             </a:pPr>
             <a:r>
-              <a:t>3.2 与金耀初近年方向的结合点</a:t>
+              <a:t>3.2 与金耀初方向的文献对接</a:t>
             </a:r>
           </a:p>
         </p:txBody>
@@ -13272,7 +13453,7 @@
               </a:defRPr>
             </a:pPr>
             <a:r>
-              <a:t>Fit with the lab</a:t>
+              <a:t>Topic-to-paper mapping</a:t>
             </a:r>
           </a:p>
         </p:txBody>
@@ -13839,7 +14020,7 @@
               </a:defRPr>
             </a:pPr>
             <a:r>
-              <a:t>Trustworthy &amp; General AI</a:t>
+              <a:t>类脑脉冲网络</a:t>
             </a:r>
           </a:p>
         </p:txBody>
@@ -13875,7 +14056,7 @@
               </a:defRPr>
             </a:pPr>
             <a:r>
-              <a:t>我已有隐私-能效-性能统一评测与 Pareto 分析基础。</a:t>
+              <a:t>SpiLiFormer: Enhancing spiking transformers with lateral inhibition, ICCV 2025。</a:t>
             </a:r>
           </a:p>
         </p:txBody>
@@ -14001,7 +14182,7 @@
               </a:defRPr>
             </a:pPr>
             <a:r>
-              <a:t>Brain-like Embodied AI</a:t>
+              <a:t>具身智能</a:t>
             </a:r>
           </a:p>
         </p:txBody>
@@ -14037,7 +14218,7 @@
               </a:defRPr>
             </a:pPr>
             <a:r>
-              <a:t>EmbodiedSNN 已经给了我具身闭环和在线适应的实验入口。</a:t>
+              <a:t>Morphology evolution for embodied robot design with a classifier-guided diffusion model, IEEE TEVC 2025 (accepted)。</a:t>
             </a:r>
           </a:p>
         </p:txBody>
@@ -14163,7 +14344,7 @@
               </a:defRPr>
             </a:pPr>
             <a:r>
-              <a:t>Large-scale SNN / Plasticity</a:t>
+              <a:t>联邦与隐私</a:t>
             </a:r>
           </a:p>
         </p:txBody>
@@ -14199,7 +14380,7 @@
               </a:defRPr>
             </a:pPr>
             <a:r>
-              <a:t>我的 SNN 可塑性、稀疏化与混合架构工作能自然接续。</a:t>
+              <a:t>Federated many-task Bayesian optimization, IEEE TEVC 2024；DP-FSAEA: Differential privacy for federated surrogate-assisted EAs, IEEE TEVC 2024。</a:t>
             </a:r>
           </a:p>
         </p:txBody>
@@ -14325,7 +14506,7 @@
               </a:defRPr>
             </a:pPr>
             <a:r>
-              <a:t>Evolution / Multi-objective Optimization</a:t>
+              <a:t>可信与可扩展</a:t>
             </a:r>
           </a:p>
         </p:txBody>
@@ -14361,7 +14542,7 @@
               </a:defRPr>
             </a:pPr>
             <a:r>
-              <a:t>我当前的 benchmark 与 Pareto 视角正适合继续往自动搜索扩展。</a:t>
+              <a:t>Knowledge-empowered, collaborative, and co-evolving AI models: The post-LLM roadmap, Engineering 2024。</a:t>
             </a:r>
           </a:p>
         </p:txBody>
@@ -14420,7 +14601,7 @@
         <p:spPr>
           <a:xfrm>
             <a:off x="1170432" y="4791456"/>
-            <a:ext cx="822960" cy="182880"/>
+            <a:ext cx="1188720" cy="182880"/>
           </a:xfrm>
           <a:prstGeom prst="rect">
             <a:avLst/>
@@ -14442,7 +14623,7 @@
               </a:defRPr>
             </a:pPr>
             <a:r>
-              <a:t>判断</a:t>
+              <a:t>对接结论</a:t>
             </a:r>
           </a:p>
         </p:txBody>
@@ -14455,8 +14636,8 @@
         </p:nvSpPr>
         <p:spPr>
           <a:xfrm>
-            <a:off x="1874519" y="4791456"/>
-            <a:ext cx="8138160" cy="201168"/>
+            <a:off x="2377440" y="4791456"/>
+            <a:ext cx="7863840" cy="201168"/>
           </a:xfrm>
           <a:prstGeom prst="rect">
             <a:avLst/>
@@ -14478,7 +14659,43 @@
               </a:defRPr>
             </a:pPr>
             <a:r>
-              <a:t>我不是“想转方向去碰运气”，而是已有工作和实验室主轴存在明确接缝。</a:t>
+              <a:t>我的项目线（SNN/隐私-能效-性能评测/多目标优化）可以和实验室近期文献形成可执行的课题衔接。</a:t>
+            </a:r>
+          </a:p>
+        </p:txBody>
+      </p:sp>
+      <p:sp>
+        <p:nvSpPr>
+          <p:cNvPr id="37" name="TextBox 36"/>
+          <p:cNvSpPr txBox="1"/>
+          <p:nvPr/>
+        </p:nvSpPr>
+        <p:spPr>
+          <a:xfrm>
+            <a:off x="731520" y="6217920"/>
+            <a:ext cx="9875520" cy="137160"/>
+          </a:xfrm>
+          <a:prstGeom prst="rect">
+            <a:avLst/>
+          </a:prstGeom>
+          <a:noFill/>
+        </p:spPr>
+        <p:txBody>
+          <a:bodyPr wrap="square" anchor="t">
+            <a:spAutoFit/>
+          </a:bodyPr>
+          <a:lstStyle/>
+          <a:p>
+            <a:pPr algn="l">
+              <a:defRPr sz="800" b="0">
+                <a:solidFill>
+                  <a:srgbClr val="606C7D"/>
+                </a:solidFill>
+                <a:latin typeface="Noto Sans CJK SC"/>
+              </a:defRPr>
+            </a:pPr>
+            <a:r>
+              <a:t>Source [J1-J5]: en.westlake.edu.cn/about/faculty/engineering/jin-pub_year.html</a:t>
             </a:r>
           </a:p>
         </p:txBody>
@@ -15881,7 +16098,7 @@
               </a:defRPr>
             </a:pPr>
             <a:r>
-              <a:t>Personal background / Project evidence / Research outlook</a:t>
+              <a:t>Problem -&gt; Evidence -&gt; Method -&gt; Plan</a:t>
             </a:r>
           </a:p>
         </p:txBody>
@@ -16448,7 +16665,7 @@
               </a:defRPr>
             </a:pPr>
             <a:r>
-              <a:t>01 个人背景</a:t>
+              <a:t>01 动机与问题定义</a:t>
             </a:r>
           </a:p>
         </p:txBody>
@@ -16484,7 +16701,7 @@
               </a:defRPr>
             </a:pPr>
             <a:r>
-              <a:t>教育结构、课程基础、问题意识</a:t>
+              <a:t>跨医学-法学-计算背景如何形成研究问题</a:t>
             </a:r>
           </a:p>
         </p:txBody>
@@ -16610,7 +16827,7 @@
               </a:defRPr>
             </a:pPr>
             <a:r>
-              <a:t>02 项目实证</a:t>
+              <a:t>02 实证结果</a:t>
             </a:r>
           </a:p>
         </p:txBody>
@@ -16646,7 +16863,7 @@
               </a:defRPr>
             </a:pPr>
             <a:r>
-              <a:t>4个项目、真实图表、可复现实验链路</a:t>
+              <a:t>4个项目的真实图表与可复现实验链路</a:t>
             </a:r>
           </a:p>
         </p:txBody>
@@ -16772,7 +16989,7 @@
               </a:defRPr>
             </a:pPr>
             <a:r>
-              <a:t>03 方向展望</a:t>
+              <a:t>03 方法论与计划</a:t>
             </a:r>
           </a:p>
         </p:txBody>
@@ -16808,7 +17025,7 @@
               </a:defRPr>
             </a:pPr>
             <a:r>
-              <a:t>LeCun + Sutton 方法论、与金老师方向结合</a:t>
+              <a:t>LeCun + Sutton 框架与后续研究路线</a:t>
             </a:r>
           </a:p>
         </p:txBody>
@@ -16889,7 +17106,7 @@
               </a:defRPr>
             </a:pPr>
             <a:r>
-              <a:t>这次汇报的重点</a:t>
+              <a:t>本次汇报重点</a:t>
             </a:r>
           </a:p>
         </p:txBody>
@@ -16933,7 +17150,7 @@
                   <a:srgbClr val="222D3E"/>
                 </a:solidFill>
               </a:rPr>
-              <a:t>不用概念堆砌，直接展示已经跑出来的结果和我下一步怎么做。</a:t>
+              <a:t>不做概念堆砌，直接展示可验证的实验结果与下一步可执行计划。</a:t>
             </a:r>
           </a:p>
           <a:p>
@@ -16954,7 +17171,7 @@
                   <a:srgbClr val="222D3E"/>
                 </a:solidFill>
               </a:rPr>
-              <a:t>版式上采用更接近 beamer 的学术风格：主题条、页码导航、卡片式图文区。</a:t>
+              <a:t>每个结论都尽量对应图表证据与可复现实验流程。</a:t>
             </a:r>
           </a:p>
           <a:p>
@@ -16975,7 +17192,7 @@
                   <a:srgbClr val="222D3E"/>
                 </a:solidFill>
               </a:rPr>
-              <a:t>内容上突出“项目证据”与“研究路线”的连续性。</a:t>
+              <a:t>前半段回答“为什么做”，后半段回答“如何做得更可靠”。</a:t>
             </a:r>
           </a:p>
         </p:txBody>
@@ -18342,7 +18559,7 @@
               </a:defRPr>
             </a:pPr>
             <a:r>
-              <a:t>3.5 结束页</a:t>
+              <a:t>3.5 参考文献（节选）</a:t>
             </a:r>
           </a:p>
         </p:txBody>
@@ -18378,7 +18595,7 @@
               </a:defRPr>
             </a:pPr>
             <a:r>
-              <a:t>Why me</a:t>
+              <a:t>Key references used in this deck</a:t>
             </a:r>
           </a:p>
         </p:txBody>
@@ -18877,6 +19094,908 @@
         </p:nvSpPr>
         <p:spPr>
           <a:xfrm>
+            <a:off x="1143000" y="1554480"/>
+            <a:ext cx="9784080" cy="3931920"/>
+          </a:xfrm>
+          <a:prstGeom prst="rect">
+            <a:avLst/>
+          </a:prstGeom>
+          <a:noFill/>
+        </p:spPr>
+        <p:txBody>
+          <a:bodyPr wrap="square">
+            <a:spAutoFit/>
+          </a:bodyPr>
+          <a:lstStyle/>
+          <a:p>
+            <a:pPr>
+              <a:spcAft>
+                <a:spcPts val="700"/>
+              </a:spcAft>
+              <a:defRPr sz="1400">
+                <a:solidFill>
+                  <a:srgbClr val="222D3E"/>
+                </a:solidFill>
+                <a:latin typeface="Noto Sans CJK SC"/>
+              </a:defRPr>
+            </a:pPr>
+            <a:r>
+              <a:rPr>
+                <a:solidFill>
+                  <a:srgbClr val="222D3E"/>
+                </a:solidFill>
+              </a:rPr>
+              <a:t>[E1] EmbodiedSNNPrototype benchmark report (retuned_v3), objective/food/energy statistics.</a:t>
+            </a:r>
+          </a:p>
+          <a:p>
+            <a:pPr>
+              <a:spcAft>
+                <a:spcPts val="700"/>
+              </a:spcAft>
+              <a:defRPr sz="1400">
+                <a:solidFill>
+                  <a:srgbClr val="222D3E"/>
+                </a:solidFill>
+                <a:latin typeface="Noto Sans CJK SC"/>
+              </a:defRPr>
+            </a:pPr>
+            <a:r>
+              <a:rPr>
+                <a:solidFill>
+                  <a:srgbClr val="222D3E"/>
+                </a:solidFill>
+              </a:rPr>
+              <a:t>[N1] Neuro-Symbiosis baseline summary (quick benchmark).</a:t>
+            </a:r>
+          </a:p>
+          <a:p>
+            <a:pPr>
+              <a:spcAft>
+                <a:spcPts val="700"/>
+              </a:spcAft>
+              <a:defRPr sz="1400">
+                <a:solidFill>
+                  <a:srgbClr val="222D3E"/>
+                </a:solidFill>
+                <a:latin typeface="Noto Sans CJK SC"/>
+              </a:defRPr>
+            </a:pPr>
+            <a:r>
+              <a:rPr>
+                <a:solidFill>
+                  <a:srgbClr val="222D3E"/>
+                </a:solidFill>
+              </a:rPr>
+              <a:t>[M1-M3] MedSparseSNN final compare + MIA CSV + power-latency figure.</a:t>
+            </a:r>
+          </a:p>
+          <a:p>
+            <a:pPr>
+              <a:spcAft>
+                <a:spcPts val="700"/>
+              </a:spcAft>
+              <a:defRPr sz="1400">
+                <a:solidFill>
+                  <a:srgbClr val="222D3E"/>
+                </a:solidFill>
+                <a:latin typeface="Noto Sans CJK SC"/>
+              </a:defRPr>
+            </a:pPr>
+            <a:r>
+              <a:rPr>
+                <a:solidFill>
+                  <a:srgbClr val="222D3E"/>
+                </a:solidFill>
+              </a:rPr>
+              <a:t>[P1] PrivEnergyBench default benchmark report (multi-seed aggregate).</a:t>
+            </a:r>
+          </a:p>
+          <a:p>
+            <a:pPr>
+              <a:spcAft>
+                <a:spcPts val="700"/>
+              </a:spcAft>
+              <a:defRPr sz="1400">
+                <a:solidFill>
+                  <a:srgbClr val="222D3E"/>
+                </a:solidFill>
+                <a:latin typeface="Noto Sans CJK SC"/>
+              </a:defRPr>
+            </a:pPr>
+            <a:r>
+              <a:rPr>
+                <a:solidFill>
+                  <a:srgbClr val="222D3E"/>
+                </a:solidFill>
+              </a:rPr>
+              <a:t>[J1-J5] Yaochu Jin publication list (2024-2025, Westlake).</a:t>
+            </a:r>
+          </a:p>
+          <a:p>
+            <a:pPr>
+              <a:spcAft>
+                <a:spcPts val="700"/>
+              </a:spcAft>
+              <a:defRPr sz="1400">
+                <a:solidFill>
+                  <a:srgbClr val="222D3E"/>
+                </a:solidFill>
+                <a:latin typeface="Noto Sans CJK SC"/>
+              </a:defRPr>
+            </a:pPr>
+            <a:r>
+              <a:rPr>
+                <a:solidFill>
+                  <a:srgbClr val="222D3E"/>
+                </a:solidFill>
+              </a:rPr>
+              <a:t>[L1] LeCun, A Path Towards Autonomous Machine Intelligence, 2022.</a:t>
+            </a:r>
+          </a:p>
+          <a:p>
+            <a:pPr>
+              <a:spcAft>
+                <a:spcPts val="700"/>
+              </a:spcAft>
+              <a:defRPr sz="1400">
+                <a:solidFill>
+                  <a:srgbClr val="222D3E"/>
+                </a:solidFill>
+                <a:latin typeface="Noto Sans CJK SC"/>
+              </a:defRPr>
+            </a:pPr>
+            <a:r>
+              <a:rPr>
+                <a:solidFill>
+                  <a:srgbClr val="222D3E"/>
+                </a:solidFill>
+              </a:rPr>
+              <a:t>[S1] Sutton, The Bitter Lesson, 2019.</a:t>
+            </a:r>
+          </a:p>
+          <a:p>
+            <a:pPr>
+              <a:spcAft>
+                <a:spcPts val="700"/>
+              </a:spcAft>
+              <a:defRPr sz="1400">
+                <a:solidFill>
+                  <a:srgbClr val="222D3E"/>
+                </a:solidFill>
+                <a:latin typeface="Noto Sans CJK SC"/>
+              </a:defRPr>
+            </a:pPr>
+            <a:r>
+              <a:rPr>
+                <a:solidFill>
+                  <a:srgbClr val="222D3E"/>
+                </a:solidFill>
+              </a:rPr>
+              <a:t>[V1] RT-2 (Brohan et al., 2023), [V2] RT-X (Open X-Embodiment, 2023), [V3] OpenVLA (Kim et al., 2024).</a:t>
+            </a:r>
+          </a:p>
+        </p:txBody>
+      </p:sp>
+    </p:spTree>
+  </p:cSld>
+  <p:clrMapOvr>
+    <a:masterClrMapping/>
+  </p:clrMapOvr>
+</p:sld>
+</file>
+
+<file path=ppt/slides/slide22.xml><?xml version="1.0" encoding="utf-8"?>
+<p:sld xmlns:a="http://schemas.openxmlformats.org/drawingml/2006/main" xmlns:p="http://schemas.openxmlformats.org/presentationml/2006/main" xmlns:r="http://schemas.openxmlformats.org/officeDocument/2006/relationships">
+  <p:cSld>
+    <p:spTree>
+      <p:nvGrpSpPr>
+        <p:cNvPr id="1" name=""/>
+        <p:cNvGrpSpPr/>
+        <p:nvPr/>
+      </p:nvGrpSpPr>
+      <p:grpSpPr/>
+      <p:sp>
+        <p:nvSpPr>
+          <p:cNvPr id="2" name="Rectangle 1"/>
+          <p:cNvSpPr/>
+          <p:nvPr/>
+        </p:nvSpPr>
+        <p:spPr>
+          <a:xfrm>
+            <a:off x="0" y="0"/>
+            <a:ext cx="12191695" cy="6858000"/>
+          </a:xfrm>
+          <a:prstGeom prst="rect">
+            <a:avLst/>
+          </a:prstGeom>
+          <a:solidFill>
+            <a:srgbClr val="F8F9FB"/>
+          </a:solidFill>
+          <a:ln w="10160">
+            <a:solidFill>
+              <a:srgbClr val="F8F9FB"/>
+            </a:solidFill>
+          </a:ln>
+        </p:spPr>
+        <p:style>
+          <a:lnRef idx="1">
+            <a:schemeClr val="accent1"/>
+          </a:lnRef>
+          <a:fillRef idx="3">
+            <a:schemeClr val="accent1"/>
+          </a:fillRef>
+          <a:effectRef idx="2">
+            <a:schemeClr val="accent1"/>
+          </a:effectRef>
+          <a:fontRef idx="minor">
+            <a:schemeClr val="lt1"/>
+          </a:fontRef>
+        </p:style>
+        <p:txBody>
+          <a:bodyPr rtlCol="0" anchor="ctr"/>
+          <a:lstStyle/>
+          <a:p>
+            <a:pPr algn="ctr"/>
+          </a:p>
+        </p:txBody>
+      </p:sp>
+      <p:sp>
+        <p:nvSpPr>
+          <p:cNvPr id="3" name="Rectangle 2"/>
+          <p:cNvSpPr/>
+          <p:nvPr/>
+        </p:nvSpPr>
+        <p:spPr>
+          <a:xfrm>
+            <a:off x="0" y="0"/>
+            <a:ext cx="12191695" cy="676656"/>
+          </a:xfrm>
+          <a:prstGeom prst="rect">
+            <a:avLst/>
+          </a:prstGeom>
+          <a:solidFill>
+            <a:srgbClr val="15253F"/>
+          </a:solidFill>
+          <a:ln w="10160">
+            <a:solidFill>
+              <a:srgbClr val="15253F"/>
+            </a:solidFill>
+          </a:ln>
+        </p:spPr>
+        <p:style>
+          <a:lnRef idx="1">
+            <a:schemeClr val="accent1"/>
+          </a:lnRef>
+          <a:fillRef idx="3">
+            <a:schemeClr val="accent1"/>
+          </a:fillRef>
+          <a:effectRef idx="2">
+            <a:schemeClr val="accent1"/>
+          </a:effectRef>
+          <a:fontRef idx="minor">
+            <a:schemeClr val="lt1"/>
+          </a:fontRef>
+        </p:style>
+        <p:txBody>
+          <a:bodyPr rtlCol="0" anchor="ctr"/>
+          <a:lstStyle/>
+          <a:p>
+            <a:pPr algn="ctr"/>
+          </a:p>
+        </p:txBody>
+      </p:sp>
+      <p:sp>
+        <p:nvSpPr>
+          <p:cNvPr id="4" name="Rectangle 3"/>
+          <p:cNvSpPr/>
+          <p:nvPr/>
+        </p:nvSpPr>
+        <p:spPr>
+          <a:xfrm>
+            <a:off x="438912" y="676656"/>
+            <a:ext cx="73152" cy="5596128"/>
+          </a:xfrm>
+          <a:prstGeom prst="rect">
+            <a:avLst/>
+          </a:prstGeom>
+          <a:solidFill>
+            <a:srgbClr val="237486"/>
+          </a:solidFill>
+          <a:ln w="10160">
+            <a:solidFill>
+              <a:srgbClr val="237486"/>
+            </a:solidFill>
+          </a:ln>
+        </p:spPr>
+        <p:style>
+          <a:lnRef idx="1">
+            <a:schemeClr val="accent1"/>
+          </a:lnRef>
+          <a:fillRef idx="3">
+            <a:schemeClr val="accent1"/>
+          </a:fillRef>
+          <a:effectRef idx="2">
+            <a:schemeClr val="accent1"/>
+          </a:effectRef>
+          <a:fontRef idx="minor">
+            <a:schemeClr val="lt1"/>
+          </a:fontRef>
+        </p:style>
+        <p:txBody>
+          <a:bodyPr rtlCol="0" anchor="ctr"/>
+          <a:lstStyle/>
+          <a:p>
+            <a:pPr algn="ctr"/>
+          </a:p>
+        </p:txBody>
+      </p:sp>
+      <p:sp>
+        <p:nvSpPr>
+          <p:cNvPr id="5" name="TextBox 4"/>
+          <p:cNvSpPr txBox="1"/>
+          <p:nvPr/>
+        </p:nvSpPr>
+        <p:spPr>
+          <a:xfrm>
+            <a:off x="685800" y="118872"/>
+            <a:ext cx="7498079" cy="274320"/>
+          </a:xfrm>
+          <a:prstGeom prst="rect">
+            <a:avLst/>
+          </a:prstGeom>
+          <a:noFill/>
+        </p:spPr>
+        <p:txBody>
+          <a:bodyPr wrap="square" anchor="t">
+            <a:spAutoFit/>
+          </a:bodyPr>
+          <a:lstStyle/>
+          <a:p>
+            <a:pPr algn="l">
+              <a:defRPr sz="2400" b="1">
+                <a:solidFill>
+                  <a:srgbClr val="FFFFFF"/>
+                </a:solidFill>
+                <a:latin typeface="Noto Serif CJK SC"/>
+              </a:defRPr>
+            </a:pPr>
+            <a:r>
+              <a:t>3.6 结束页</a:t>
+            </a:r>
+          </a:p>
+        </p:txBody>
+      </p:sp>
+      <p:sp>
+        <p:nvSpPr>
+          <p:cNvPr id="6" name="TextBox 5"/>
+          <p:cNvSpPr txBox="1"/>
+          <p:nvPr/>
+        </p:nvSpPr>
+        <p:spPr>
+          <a:xfrm>
+            <a:off x="8412480" y="146304"/>
+            <a:ext cx="2926080" cy="219456"/>
+          </a:xfrm>
+          <a:prstGeom prst="rect">
+            <a:avLst/>
+          </a:prstGeom>
+          <a:noFill/>
+        </p:spPr>
+        <p:txBody>
+          <a:bodyPr wrap="square" anchor="t">
+            <a:spAutoFit/>
+          </a:bodyPr>
+          <a:lstStyle/>
+          <a:p>
+            <a:pPr algn="r">
+              <a:defRPr sz="1100" b="0">
+                <a:solidFill>
+                  <a:srgbClr val="E2E7ED"/>
+                </a:solidFill>
+                <a:latin typeface="Noto Sans CJK SC"/>
+              </a:defRPr>
+            </a:pPr>
+            <a:r>
+              <a:t>Why me</a:t>
+            </a:r>
+          </a:p>
+        </p:txBody>
+      </p:sp>
+      <p:sp>
+        <p:nvSpPr>
+          <p:cNvPr id="7" name="Rectangle 6"/>
+          <p:cNvSpPr/>
+          <p:nvPr/>
+        </p:nvSpPr>
+        <p:spPr>
+          <a:xfrm>
+            <a:off x="502920" y="6373368"/>
+            <a:ext cx="11155680" cy="18288"/>
+          </a:xfrm>
+          <a:prstGeom prst="rect">
+            <a:avLst/>
+          </a:prstGeom>
+          <a:solidFill>
+            <a:srgbClr val="D6DCE4"/>
+          </a:solidFill>
+          <a:ln w="10160">
+            <a:solidFill>
+              <a:srgbClr val="D6DCE4"/>
+            </a:solidFill>
+          </a:ln>
+        </p:spPr>
+        <p:style>
+          <a:lnRef idx="1">
+            <a:schemeClr val="accent1"/>
+          </a:lnRef>
+          <a:fillRef idx="3">
+            <a:schemeClr val="accent1"/>
+          </a:fillRef>
+          <a:effectRef idx="2">
+            <a:schemeClr val="accent1"/>
+          </a:effectRef>
+          <a:fontRef idx="minor">
+            <a:schemeClr val="lt1"/>
+          </a:fontRef>
+        </p:style>
+        <p:txBody>
+          <a:bodyPr rtlCol="0" anchor="ctr"/>
+          <a:lstStyle/>
+          <a:p>
+            <a:pPr algn="ctr"/>
+          </a:p>
+        </p:txBody>
+      </p:sp>
+      <p:sp>
+        <p:nvSpPr>
+          <p:cNvPr id="8" name="TextBox 7"/>
+          <p:cNvSpPr txBox="1"/>
+          <p:nvPr/>
+        </p:nvSpPr>
+        <p:spPr>
+          <a:xfrm>
+            <a:off x="685800" y="6400800"/>
+            <a:ext cx="2560320" cy="182880"/>
+          </a:xfrm>
+          <a:prstGeom prst="rect">
+            <a:avLst/>
+          </a:prstGeom>
+          <a:noFill/>
+        </p:spPr>
+        <p:txBody>
+          <a:bodyPr wrap="square" anchor="t">
+            <a:spAutoFit/>
+          </a:bodyPr>
+          <a:lstStyle/>
+          <a:p>
+            <a:pPr algn="l">
+              <a:defRPr sz="1000" b="0">
+                <a:solidFill>
+                  <a:srgbClr val="606C7D"/>
+                </a:solidFill>
+                <a:latin typeface="Noto Sans CJK SC"/>
+              </a:defRPr>
+            </a:pPr>
+            <a:r>
+              <a:t>詹绍基 | 面试汇报</a:t>
+            </a:r>
+          </a:p>
+        </p:txBody>
+      </p:sp>
+      <p:sp>
+        <p:nvSpPr>
+          <p:cNvPr id="9" name="TextBox 8"/>
+          <p:cNvSpPr txBox="1"/>
+          <p:nvPr/>
+        </p:nvSpPr>
+        <p:spPr>
+          <a:xfrm>
+            <a:off x="10927080" y="6382512"/>
+            <a:ext cx="457200" cy="201168"/>
+          </a:xfrm>
+          <a:prstGeom prst="rect">
+            <a:avLst/>
+          </a:prstGeom>
+          <a:noFill/>
+        </p:spPr>
+        <p:txBody>
+          <a:bodyPr wrap="square" anchor="t">
+            <a:spAutoFit/>
+          </a:bodyPr>
+          <a:lstStyle/>
+          <a:p>
+            <a:pPr algn="r">
+              <a:defRPr sz="1100" b="1">
+                <a:solidFill>
+                  <a:srgbClr val="15253F"/>
+                </a:solidFill>
+                <a:latin typeface="Noto Sans CJK SC"/>
+              </a:defRPr>
+            </a:pPr>
+            <a:r>
+              <a:t>22</a:t>
+            </a:r>
+          </a:p>
+        </p:txBody>
+      </p:sp>
+      <p:sp>
+        <p:nvSpPr>
+          <p:cNvPr id="10" name="Rounded Rectangle 9"/>
+          <p:cNvSpPr/>
+          <p:nvPr/>
+        </p:nvSpPr>
+        <p:spPr>
+          <a:xfrm>
+            <a:off x="3611880" y="6400800"/>
+            <a:ext cx="1691640" cy="164592"/>
+          </a:xfrm>
+          <a:prstGeom prst="roundRect">
+            <a:avLst/>
+          </a:prstGeom>
+          <a:solidFill>
+            <a:srgbClr val="DBE0E7"/>
+          </a:solidFill>
+          <a:ln w="10160">
+            <a:solidFill>
+              <a:srgbClr val="DBE0E7"/>
+            </a:solidFill>
+          </a:ln>
+        </p:spPr>
+        <p:style>
+          <a:lnRef idx="1">
+            <a:schemeClr val="accent1"/>
+          </a:lnRef>
+          <a:fillRef idx="3">
+            <a:schemeClr val="accent1"/>
+          </a:fillRef>
+          <a:effectRef idx="2">
+            <a:schemeClr val="accent1"/>
+          </a:effectRef>
+          <a:fontRef idx="minor">
+            <a:schemeClr val="lt1"/>
+          </a:fontRef>
+        </p:style>
+        <p:txBody>
+          <a:bodyPr rtlCol="0" anchor="ctr"/>
+          <a:lstStyle/>
+          <a:p>
+            <a:pPr algn="ctr"/>
+          </a:p>
+        </p:txBody>
+      </p:sp>
+      <p:sp>
+        <p:nvSpPr>
+          <p:cNvPr id="11" name="TextBox 10"/>
+          <p:cNvSpPr txBox="1"/>
+          <p:nvPr/>
+        </p:nvSpPr>
+        <p:spPr>
+          <a:xfrm>
+            <a:off x="3611880" y="6400800"/>
+            <a:ext cx="1691640" cy="164592"/>
+          </a:xfrm>
+          <a:prstGeom prst="rect">
+            <a:avLst/>
+          </a:prstGeom>
+          <a:noFill/>
+        </p:spPr>
+        <p:txBody>
+          <a:bodyPr wrap="square" anchor="ctr">
+            <a:spAutoFit/>
+          </a:bodyPr>
+          <a:lstStyle/>
+          <a:p>
+            <a:pPr algn="ctr">
+              <a:defRPr sz="900" b="0">
+                <a:solidFill>
+                  <a:srgbClr val="606C7D"/>
+                </a:solidFill>
+                <a:latin typeface="Noto Sans CJK SC"/>
+              </a:defRPr>
+            </a:pPr>
+            <a:r>
+              <a:t>开场</a:t>
+            </a:r>
+          </a:p>
+        </p:txBody>
+      </p:sp>
+      <p:sp>
+        <p:nvSpPr>
+          <p:cNvPr id="12" name="Rounded Rectangle 11"/>
+          <p:cNvSpPr/>
+          <p:nvPr/>
+        </p:nvSpPr>
+        <p:spPr>
+          <a:xfrm>
+            <a:off x="5376672" y="6400800"/>
+            <a:ext cx="1691640" cy="164592"/>
+          </a:xfrm>
+          <a:prstGeom prst="roundRect">
+            <a:avLst/>
+          </a:prstGeom>
+          <a:solidFill>
+            <a:srgbClr val="DBE0E7"/>
+          </a:solidFill>
+          <a:ln w="10160">
+            <a:solidFill>
+              <a:srgbClr val="DBE0E7"/>
+            </a:solidFill>
+          </a:ln>
+        </p:spPr>
+        <p:style>
+          <a:lnRef idx="1">
+            <a:schemeClr val="accent1"/>
+          </a:lnRef>
+          <a:fillRef idx="3">
+            <a:schemeClr val="accent1"/>
+          </a:fillRef>
+          <a:effectRef idx="2">
+            <a:schemeClr val="accent1"/>
+          </a:effectRef>
+          <a:fontRef idx="minor">
+            <a:schemeClr val="lt1"/>
+          </a:fontRef>
+        </p:style>
+        <p:txBody>
+          <a:bodyPr rtlCol="0" anchor="ctr"/>
+          <a:lstStyle/>
+          <a:p>
+            <a:pPr algn="ctr"/>
+          </a:p>
+        </p:txBody>
+      </p:sp>
+      <p:sp>
+        <p:nvSpPr>
+          <p:cNvPr id="13" name="TextBox 12"/>
+          <p:cNvSpPr txBox="1"/>
+          <p:nvPr/>
+        </p:nvSpPr>
+        <p:spPr>
+          <a:xfrm>
+            <a:off x="5376672" y="6400800"/>
+            <a:ext cx="1691640" cy="164592"/>
+          </a:xfrm>
+          <a:prstGeom prst="rect">
+            <a:avLst/>
+          </a:prstGeom>
+          <a:noFill/>
+        </p:spPr>
+        <p:txBody>
+          <a:bodyPr wrap="square" anchor="ctr">
+            <a:spAutoFit/>
+          </a:bodyPr>
+          <a:lstStyle/>
+          <a:p>
+            <a:pPr algn="ctr">
+              <a:defRPr sz="900" b="0">
+                <a:solidFill>
+                  <a:srgbClr val="606C7D"/>
+                </a:solidFill>
+                <a:latin typeface="Noto Sans CJK SC"/>
+              </a:defRPr>
+            </a:pPr>
+            <a:r>
+              <a:t>个人背景</a:t>
+            </a:r>
+          </a:p>
+        </p:txBody>
+      </p:sp>
+      <p:sp>
+        <p:nvSpPr>
+          <p:cNvPr id="14" name="Rounded Rectangle 13"/>
+          <p:cNvSpPr/>
+          <p:nvPr/>
+        </p:nvSpPr>
+        <p:spPr>
+          <a:xfrm>
+            <a:off x="7141464" y="6400800"/>
+            <a:ext cx="1691640" cy="164592"/>
+          </a:xfrm>
+          <a:prstGeom prst="roundRect">
+            <a:avLst/>
+          </a:prstGeom>
+          <a:solidFill>
+            <a:srgbClr val="DBE0E7"/>
+          </a:solidFill>
+          <a:ln w="10160">
+            <a:solidFill>
+              <a:srgbClr val="DBE0E7"/>
+            </a:solidFill>
+          </a:ln>
+        </p:spPr>
+        <p:style>
+          <a:lnRef idx="1">
+            <a:schemeClr val="accent1"/>
+          </a:lnRef>
+          <a:fillRef idx="3">
+            <a:schemeClr val="accent1"/>
+          </a:fillRef>
+          <a:effectRef idx="2">
+            <a:schemeClr val="accent1"/>
+          </a:effectRef>
+          <a:fontRef idx="minor">
+            <a:schemeClr val="lt1"/>
+          </a:fontRef>
+        </p:style>
+        <p:txBody>
+          <a:bodyPr rtlCol="0" anchor="ctr"/>
+          <a:lstStyle/>
+          <a:p>
+            <a:pPr algn="ctr"/>
+          </a:p>
+        </p:txBody>
+      </p:sp>
+      <p:sp>
+        <p:nvSpPr>
+          <p:cNvPr id="15" name="TextBox 14"/>
+          <p:cNvSpPr txBox="1"/>
+          <p:nvPr/>
+        </p:nvSpPr>
+        <p:spPr>
+          <a:xfrm>
+            <a:off x="7141464" y="6400800"/>
+            <a:ext cx="1691640" cy="164592"/>
+          </a:xfrm>
+          <a:prstGeom prst="rect">
+            <a:avLst/>
+          </a:prstGeom>
+          <a:noFill/>
+        </p:spPr>
+        <p:txBody>
+          <a:bodyPr wrap="square" anchor="ctr">
+            <a:spAutoFit/>
+          </a:bodyPr>
+          <a:lstStyle/>
+          <a:p>
+            <a:pPr algn="ctr">
+              <a:defRPr sz="900" b="0">
+                <a:solidFill>
+                  <a:srgbClr val="606C7D"/>
+                </a:solidFill>
+                <a:latin typeface="Noto Sans CJK SC"/>
+              </a:defRPr>
+            </a:pPr>
+            <a:r>
+              <a:t>项目实证</a:t>
+            </a:r>
+          </a:p>
+        </p:txBody>
+      </p:sp>
+      <p:sp>
+        <p:nvSpPr>
+          <p:cNvPr id="16" name="Rounded Rectangle 15"/>
+          <p:cNvSpPr/>
+          <p:nvPr/>
+        </p:nvSpPr>
+        <p:spPr>
+          <a:xfrm>
+            <a:off x="8906256" y="6400800"/>
+            <a:ext cx="1691640" cy="164592"/>
+          </a:xfrm>
+          <a:prstGeom prst="roundRect">
+            <a:avLst/>
+          </a:prstGeom>
+          <a:solidFill>
+            <a:srgbClr val="237486"/>
+          </a:solidFill>
+          <a:ln w="10160">
+            <a:solidFill>
+              <a:srgbClr val="237486"/>
+            </a:solidFill>
+          </a:ln>
+        </p:spPr>
+        <p:style>
+          <a:lnRef idx="1">
+            <a:schemeClr val="accent1"/>
+          </a:lnRef>
+          <a:fillRef idx="3">
+            <a:schemeClr val="accent1"/>
+          </a:fillRef>
+          <a:effectRef idx="2">
+            <a:schemeClr val="accent1"/>
+          </a:effectRef>
+          <a:fontRef idx="minor">
+            <a:schemeClr val="lt1"/>
+          </a:fontRef>
+        </p:style>
+        <p:txBody>
+          <a:bodyPr rtlCol="0" anchor="ctr"/>
+          <a:lstStyle/>
+          <a:p>
+            <a:pPr algn="ctr"/>
+          </a:p>
+        </p:txBody>
+      </p:sp>
+      <p:sp>
+        <p:nvSpPr>
+          <p:cNvPr id="17" name="TextBox 16"/>
+          <p:cNvSpPr txBox="1"/>
+          <p:nvPr/>
+        </p:nvSpPr>
+        <p:spPr>
+          <a:xfrm>
+            <a:off x="8906256" y="6400800"/>
+            <a:ext cx="1691640" cy="164592"/>
+          </a:xfrm>
+          <a:prstGeom prst="rect">
+            <a:avLst/>
+          </a:prstGeom>
+          <a:noFill/>
+        </p:spPr>
+        <p:txBody>
+          <a:bodyPr wrap="square" anchor="ctr">
+            <a:spAutoFit/>
+          </a:bodyPr>
+          <a:lstStyle/>
+          <a:p>
+            <a:pPr algn="ctr">
+              <a:defRPr sz="900" b="0">
+                <a:solidFill>
+                  <a:srgbClr val="FFFFFF"/>
+                </a:solidFill>
+                <a:latin typeface="Noto Sans CJK SC"/>
+              </a:defRPr>
+            </a:pPr>
+            <a:r>
+              <a:t>方向展望</a:t>
+            </a:r>
+          </a:p>
+        </p:txBody>
+      </p:sp>
+      <p:sp>
+        <p:nvSpPr>
+          <p:cNvPr id="18" name="Rounded Rectangle 17"/>
+          <p:cNvSpPr/>
+          <p:nvPr/>
+        </p:nvSpPr>
+        <p:spPr>
+          <a:xfrm>
+            <a:off x="914400" y="1143000"/>
+            <a:ext cx="10332720" cy="4892040"/>
+          </a:xfrm>
+          <a:prstGeom prst="roundRect">
+            <a:avLst/>
+          </a:prstGeom>
+          <a:solidFill>
+            <a:srgbClr val="FFFFFF"/>
+          </a:solidFill>
+          <a:ln w="10160">
+            <a:solidFill>
+              <a:srgbClr val="D6DCE4"/>
+            </a:solidFill>
+          </a:ln>
+        </p:spPr>
+        <p:style>
+          <a:lnRef idx="1">
+            <a:schemeClr val="accent1"/>
+          </a:lnRef>
+          <a:fillRef idx="3">
+            <a:schemeClr val="accent1"/>
+          </a:fillRef>
+          <a:effectRef idx="2">
+            <a:schemeClr val="accent1"/>
+          </a:effectRef>
+          <a:fontRef idx="minor">
+            <a:schemeClr val="lt1"/>
+          </a:fontRef>
+        </p:style>
+        <p:txBody>
+          <a:bodyPr rtlCol="0" anchor="ctr"/>
+          <a:lstStyle/>
+          <a:p>
+            <a:pPr algn="ctr"/>
+          </a:p>
+        </p:txBody>
+      </p:sp>
+      <p:sp>
+        <p:nvSpPr>
+          <p:cNvPr id="19" name="TextBox 18"/>
+          <p:cNvSpPr txBox="1"/>
+          <p:nvPr/>
+        </p:nvSpPr>
+        <p:spPr>
+          <a:xfrm>
             <a:off x="1170432" y="1536192"/>
             <a:ext cx="4572000" cy="320040"/>
           </a:xfrm>
@@ -18944,7 +20063,7 @@
                   <a:srgbClr val="222D3E"/>
                 </a:solidFill>
               </a:rPr>
-              <a:t>跨医学-计算-法学背景，使我会同时考虑算法、场景与规范。</a:t>
+              <a:t>能独立完成从实验搭建、结果统计到图表复现的研究闭环。</a:t>
             </a:r>
           </a:p>
           <a:p>
@@ -18965,7 +20084,7 @@
                   <a:srgbClr val="222D3E"/>
                 </a:solidFill>
               </a:rPr>
-              <a:t>已经具备从实验搭建、图表分析到汇报表达的独立执行能力。</a:t>
+              <a:t>研究重点稳定在可解释、可信、可部署的类脑与隐私优化方向。</a:t>
             </a:r>
           </a:p>
           <a:p>
@@ -18986,7 +20105,7 @@
                   <a:srgbClr val="222D3E"/>
                 </a:solidFill>
               </a:rPr>
-              <a:t>研究兴趣稳定，愿意长期投入类脑智能与可信AI交叉方向。</a:t>
+              <a:t>已有项目与实验室文献方向存在明确技术接缝，可直接进入执行阶段。</a:t>
             </a:r>
           </a:p>
           <a:p>
@@ -19007,7 +20126,7 @@
                   <a:srgbClr val="222D3E"/>
                 </a:solidFill>
               </a:rPr>
-              <a:t>希望在金老师团队把已有研究链条继续做深做实。</a:t>
+              <a:t>后续将以可复现协议和可验证指标作为工作标准。</a:t>
             </a:r>
           </a:p>
         </p:txBody>
@@ -19394,7 +20513,7 @@
               </a:defRPr>
             </a:pPr>
             <a:r>
-              <a:t>1.1 基本信息与研究动机</a:t>
+              <a:t>1.1 研究问题如何形成</a:t>
             </a:r>
           </a:p>
         </p:txBody>
@@ -19430,7 +20549,7 @@
               </a:defRPr>
             </a:pPr>
             <a:r>
-              <a:t>Why this direction</a:t>
+              <a:t>From background to research question</a:t>
             </a:r>
           </a:p>
         </p:txBody>
@@ -19930,7 +21049,7 @@
         <p:spPr>
           <a:xfrm>
             <a:off x="1143000" y="1353312"/>
-            <a:ext cx="1005840" cy="274320"/>
+            <a:ext cx="1645920" cy="274320"/>
           </a:xfrm>
           <a:prstGeom prst="rect">
             <a:avLst/>
@@ -19952,7 +21071,7 @@
               </a:defRPr>
             </a:pPr>
             <a:r>
-              <a:t>背景</a:t>
+              <a:t>问题形成路径</a:t>
             </a:r>
           </a:p>
         </p:txBody>
@@ -19996,7 +21115,7 @@
                   <a:srgbClr val="222D3E"/>
                 </a:solidFill>
               </a:rPr>
-              <a:t>医学影像学本科，辅修计算机；法学本科在读。</a:t>
+              <a:t>临床场景经验让我意识到：精度不是唯一目标，部署约束同样关键。</a:t>
             </a:r>
           </a:p>
           <a:p>
@@ -20017,7 +21136,7 @@
                   <a:srgbClr val="222D3E"/>
                 </a:solidFill>
               </a:rPr>
-              <a:t>临床实习中直接感受到：模型不是只比精度，还要比时延、能耗、隐私与可部署性。</a:t>
+              <a:t>医学训练提供了对真实任务边界的直觉，计算训练提供了实验实现能力。</a:t>
             </a:r>
           </a:p>
           <a:p>
@@ -20038,7 +21157,7 @@
                   <a:srgbClr val="222D3E"/>
                 </a:solidFill>
               </a:rPr>
-              <a:t>因此我的研究兴趣逐步收敛到类脑计算、稀疏智能与可信AI。</a:t>
+              <a:t>法学训练强化了我对隐私、责任边界与技术可治理性的关注。</a:t>
             </a:r>
           </a:p>
           <a:p>
@@ -20059,7 +21178,7 @@
                   <a:srgbClr val="222D3E"/>
                 </a:solidFill>
               </a:rPr>
-              <a:t>我更关注“能否形成持续研究链条”，而不是只做单次竞赛式结果。</a:t>
+              <a:t>因此我的问题定义收敛为：在真实约束下构建可解释、节能、可信的智能系统。</a:t>
             </a:r>
           </a:p>
         </p:txBody>
@@ -20192,7 +21311,7 @@
           <a:lstStyle/>
           <a:p>
             <a:pPr algn="ctr">
-              <a:defRPr sz="1100" b="0">
+              <a:defRPr sz="1000" b="0">
                 <a:solidFill>
                   <a:srgbClr val="606C7D"/>
                 </a:solidFill>
@@ -20200,7 +21319,7 @@
               </a:defRPr>
             </a:pPr>
             <a:r>
-              <a:t>医学影像 × 计算 × 法学</a:t>
+              <a:t>Medical Imaging × CS × Law</a:t>
             </a:r>
           </a:p>
         </p:txBody>
@@ -20389,7 +21508,7 @@
               </a:defRPr>
             </a:pPr>
             <a:r>
-              <a:t>1.2 课程与能力结构</a:t>
+              <a:t>1.2 跨学科训练如何转化为研究能力</a:t>
             </a:r>
           </a:p>
         </p:txBody>
@@ -20425,7 +21544,7 @@
               </a:defRPr>
             </a:pPr>
             <a:r>
-              <a:t>Coursework and toolkit</a:t>
+              <a:t>Coursework -&gt; capability mapping</a:t>
             </a:r>
           </a:p>
         </p:txBody>
@@ -20992,7 +22111,7 @@
               </a:defRPr>
             </a:pPr>
             <a:r>
-              <a:t>医学基础</a:t>
+              <a:t>医学训练</a:t>
             </a:r>
           </a:p>
         </p:txBody>
@@ -21028,7 +22147,7 @@
               </a:defRPr>
             </a:pPr>
             <a:r>
-              <a:t>人体解剖、分子生物学、内科学、外科学、影像诊断、超声、核医学、介入放射</a:t>
+              <a:t>任务约束意识：关注真实人体场景、风险边界与可部署条件</a:t>
             </a:r>
           </a:p>
         </p:txBody>
@@ -21154,7 +22273,7 @@
               </a:defRPr>
             </a:pPr>
             <a:r>
-              <a:t>计算基础</a:t>
+              <a:t>计算训练</a:t>
             </a:r>
           </a:p>
         </p:txBody>
@@ -21190,7 +22309,7 @@
               </a:defRPr>
             </a:pPr>
             <a:r>
-              <a:t>数据结构、数据库原理、Python、离散数学；具备实验脚本、结果分析与可视化能力</a:t>
+              <a:t>实验执行能力：模型实现、评测脚本、复现实验与可视化分析</a:t>
             </a:r>
           </a:p>
         </p:txBody>
@@ -21352,7 +22471,7 @@
               </a:defRPr>
             </a:pPr>
             <a:r>
-              <a:t>民法、刑法、经济法、国际法、诉讼法；帮助我更重视规范性与可信边界</a:t>
+              <a:t>治理视角：隐私保护、责任边界、规范化评测与可问责性</a:t>
             </a:r>
           </a:p>
         </p:txBody>
@@ -21433,7 +22552,7 @@
               </a:defRPr>
             </a:pPr>
             <a:r>
-              <a:t>能力映射</a:t>
+              <a:t>可执行能力</a:t>
             </a:r>
           </a:p>
         </p:txBody>
@@ -21477,7 +22596,7 @@
                   <a:srgbClr val="222D3E"/>
                 </a:solidFill>
               </a:rPr>
-              <a:t>临床视角让我更容易定义有真实价值的问题。</a:t>
+              <a:t>能独立完成“问题定义 -&gt; 实验设计 -&gt; 结果复现 -&gt; 报告表达”全流程。</a:t>
             </a:r>
           </a:p>
           <a:p>
@@ -21498,7 +22617,7 @@
                   <a:srgbClr val="222D3E"/>
                 </a:solidFill>
               </a:rPr>
-              <a:t>计算训练让我能独立完成从实验设计到结果复现的全过程。</a:t>
+              <a:t>能把性能、隐私、能效放在统一评测框架下分析，而非只看单一指标。</a:t>
             </a:r>
           </a:p>
           <a:p>
@@ -21519,7 +22638,7 @@
                   <a:srgbClr val="222D3E"/>
                 </a:solidFill>
               </a:rPr>
-              <a:t>法学训练让我天然关注可信性、责任边界与应用约束。</a:t>
+              <a:t>能在研究早期同步考虑可解释性与部署边界，减少后期返工成本。</a:t>
             </a:r>
           </a:p>
           <a:p>
@@ -21540,7 +22659,7 @@
                   <a:srgbClr val="222D3E"/>
                 </a:solidFill>
               </a:rPr>
-              <a:t>英语能力：CET-6 595，可阅读英文论文并进行日常学术交流。</a:t>
+              <a:t>英语能力支持持续阅读英文论文并跟进国际研究进展。</a:t>
             </a:r>
           </a:p>
         </p:txBody>
@@ -22971,7 +24090,7 @@
               </a:defRPr>
             </a:pPr>
             <a:r>
-              <a:t>我对纯 end-to-end 黑盒 VLA 保持审慎：真正可扩展的机器人智能，必须回到任务建模、几何/物理约束、规划控制与可解释评测。</a:t>
+              <a:t>我对纯 end-to-end 黑盒 VLA 保持审慎：可扩展机器人学习必须回到任务建模、几何/物理约束、规划控制与可解释评测。</a:t>
             </a:r>
           </a:p>
         </p:txBody>
@@ -23799,7 +24918,7 @@
               </a:defRPr>
             </a:pPr>
             <a:r>
-              <a:t>具身闭环环境中评估奖励调制可塑性</a:t>
+              <a:t>具身闭环 + 奖励调制可塑性：验证在线适应是否真正提升行为质量</a:t>
             </a:r>
           </a:p>
         </p:txBody>
@@ -23961,7 +25080,7 @@
               </a:defRPr>
             </a:pPr>
             <a:r>
-              <a:t>SNN-Transformer 混合架构的 Pareto 与耦合分析</a:t>
+              <a:t>SNN-Transformer 混合架构：观察多目标折中与耦合机制</a:t>
             </a:r>
           </a:p>
         </p:txBody>
@@ -24123,7 +25242,7 @@
               </a:defRPr>
             </a:pPr>
             <a:r>
-              <a:t>医学影像任务下性能、隐私与能耗的系统评估</a:t>
+              <a:t>医学影像任务：把性能、隐私攻击面与能耗同时纳入评估</a:t>
             </a:r>
           </a:p>
         </p:txBody>
@@ -24285,7 +25404,7 @@
               </a:defRPr>
             </a:pPr>
             <a:r>
-              <a:t>统一三目标评测基准与配置筛选视角</a:t>
+              <a:t>统一 benchmark：把不同方案放到同一坐标系可比</a:t>
             </a:r>
           </a:p>
         </p:txBody>
@@ -24337,7 +25456,7 @@
       </p:sp>
       <p:pic>
         <p:nvPicPr>
-          <p:cNvPr id="35" name="Picture 34" descr="pareto.png"/>
+          <p:cNvPr id="35" name="Picture 34" descr="privenergy_pareto_redraw.png"/>
           <p:cNvPicPr>
             <a:picLocks noChangeAspect="1"/>
           </p:cNvPicPr>
@@ -24351,8 +25470,8 @@
         </p:blipFill>
         <p:spPr>
           <a:xfrm>
-            <a:off x="2944368" y="3172968"/>
-            <a:ext cx="2752344" cy="1965960"/>
+            <a:off x="2635431" y="3172968"/>
+            <a:ext cx="3370217" cy="1965960"/>
           </a:xfrm>
           <a:prstGeom prst="rect">
             <a:avLst/>
@@ -24471,7 +25590,7 @@
               </a:defRPr>
             </a:pPr>
             <a:r>
-              <a:t>核心价值</a:t>
+              <a:t>学术价值</a:t>
             </a:r>
           </a:p>
         </p:txBody>
@@ -24515,7 +25634,7 @@
                   <a:srgbClr val="222D3E"/>
                 </a:solidFill>
               </a:rPr>
-              <a:t>不是分散项目，而是共享同一问题框架。</a:t>
+              <a:t>不是分散项目，而是共享统一问题框架。</a:t>
             </a:r>
           </a:p>
           <a:p>
@@ -24536,7 +25655,7 @@
                   <a:srgbClr val="222D3E"/>
                 </a:solidFill>
               </a:rPr>
-              <a:t>从具身实验到医疗应用，再到统一benchmark。</a:t>
+              <a:t>从机制验证到应用评测再到基础设施，形成闭环。</a:t>
             </a:r>
           </a:p>
           <a:p>
@@ -24557,7 +25676,7 @@
                   <a:srgbClr val="222D3E"/>
                 </a:solidFill>
               </a:rPr>
-              <a:t>每一步都能和后续研究自然衔接。</a:t>
+              <a:t>每一步都能自然支撑下一步研究扩展。</a:t>
             </a:r>
           </a:p>
         </p:txBody>
@@ -25356,7 +26475,7 @@
       </p:sp>
       <p:pic>
         <p:nvPicPr>
-          <p:cNvPr id="21" name="Picture 20" descr="objective_by_mode.png"/>
+          <p:cNvPr id="21" name="Picture 20" descr="emb_objective_by_mode_redraw.png"/>
           <p:cNvPicPr>
             <a:picLocks noChangeAspect="1"/>
           </p:cNvPicPr>
@@ -25370,8 +26489,8 @@
         </p:blipFill>
         <p:spPr>
           <a:xfrm>
-            <a:off x="1024128" y="2268785"/>
-            <a:ext cx="4764024" cy="2402725"/>
+            <a:off x="1024128" y="2080640"/>
+            <a:ext cx="4764024" cy="2779014"/>
           </a:xfrm>
           <a:prstGeom prst="rect">
             <a:avLst/>
@@ -25461,7 +26580,7 @@
       </p:sp>
       <p:pic>
         <p:nvPicPr>
-          <p:cNvPr id="24" name="Picture 23" descr="fixed_vs_plastic.png"/>
+          <p:cNvPr id="24" name="Picture 23" descr="emb_fixed_vs_plastic_redraw.png"/>
           <p:cNvPicPr>
             <a:picLocks noChangeAspect="1"/>
           </p:cNvPicPr>
@@ -25475,8 +26594,8 @@
         </p:blipFill>
         <p:spPr>
           <a:xfrm>
-            <a:off x="6373368" y="2068964"/>
-            <a:ext cx="4764024" cy="2802367"/>
+            <a:off x="6373368" y="2080640"/>
+            <a:ext cx="4764024" cy="2779014"/>
           </a:xfrm>
           <a:prstGeom prst="rect">
             <a:avLst/>
@@ -25676,7 +26795,43 @@
               </a:defRPr>
             </a:pPr>
             <a:r>
-              <a:t>可塑性策略整体更稳，在线适应不是装饰，而是行为质量的决定因素。</a:t>
+              <a:t>Retuned-v3 报告中，plastic_readout 的 objective_mean 最优为 -0.4199，而 structured 为 -0.4839。</a:t>
+            </a:r>
+          </a:p>
+        </p:txBody>
+      </p:sp>
+      <p:sp>
+        <p:nvSpPr>
+          <p:cNvPr id="30" name="TextBox 29"/>
+          <p:cNvSpPr txBox="1"/>
+          <p:nvPr/>
+        </p:nvSpPr>
+        <p:spPr>
+          <a:xfrm>
+            <a:off x="731520" y="6217920"/>
+            <a:ext cx="9875520" cy="137160"/>
+          </a:xfrm>
+          <a:prstGeom prst="rect">
+            <a:avLst/>
+          </a:prstGeom>
+          <a:noFill/>
+        </p:spPr>
+        <p:txBody>
+          <a:bodyPr wrap="square" anchor="t">
+            <a:spAutoFit/>
+          </a:bodyPr>
+          <a:lstStyle/>
+          <a:p>
+            <a:pPr algn="l">
+              <a:defRPr sz="800" b="0">
+                <a:solidFill>
+                  <a:srgbClr val="606C7D"/>
+                </a:solidFill>
+                <a:latin typeface="Noto Sans CJK SC"/>
+              </a:defRPr>
+            </a:pPr>
+            <a:r>
+              <a:t>Source [E1]: EmbodiedSNNPrototype/outputs/plasticity_compare_retuned_v3/benchmark_report.md</a:t>
             </a:r>
           </a:p>
         </p:txBody>
@@ -26475,7 +27630,7 @@
       </p:sp>
       <p:pic>
         <p:nvPicPr>
-          <p:cNvPr id="21" name="Picture 20" descr="food_vs_energy.png"/>
+          <p:cNvPr id="21" name="Picture 20" descr="emb_food_vs_energy_redraw.png"/>
           <p:cNvPicPr>
             <a:picLocks noChangeAspect="1"/>
           </p:cNvPicPr>
@@ -26489,8 +27644,8 @@
         </p:blipFill>
         <p:spPr>
           <a:xfrm>
-            <a:off x="1540933" y="1207007"/>
-            <a:ext cx="5239173" cy="4160520"/>
+            <a:off x="1024128" y="1457705"/>
+            <a:ext cx="6272783" cy="3659124"/>
           </a:xfrm>
           <a:prstGeom prst="rect">
             <a:avLst/>
@@ -26580,7 +27735,7 @@
       </p:sp>
       <p:pic>
         <p:nvPicPr>
-          <p:cNvPr id="24" name="Picture 23" descr="food_eaten_heatmap.png"/>
+          <p:cNvPr id="24" name="Picture 23" descr="emb_food_heatmap_redraw.png"/>
           <p:cNvPicPr>
             <a:picLocks noChangeAspect="1"/>
           </p:cNvPicPr>
@@ -26594,8 +27749,8 @@
         </p:blipFill>
         <p:spPr>
           <a:xfrm>
-            <a:off x="7836407" y="2780003"/>
-            <a:ext cx="3300984" cy="1014528"/>
+            <a:off x="7836407" y="2324481"/>
+            <a:ext cx="3300984" cy="1925574"/>
           </a:xfrm>
           <a:prstGeom prst="rect">
             <a:avLst/>

--- a/docs/20min_面试汇报_詹绍基_20页图表版.pptx
+++ b/docs/20min_面试汇报_詹绍基_20页图表版.pptx
@@ -3217,14 +3217,6 @@
           </a:bodyPr>
           <a:lstStyle/>
           <a:p>
-            <a:pPr algn="l">
-              <a:defRPr sz="3000" b="1">
-                <a:solidFill>
-                  <a:srgbClr val="FFFFFF"/>
-                </a:solidFill>
-                <a:latin typeface="Noto Serif CJK SC"/>
-              </a:defRPr>
-            </a:pPr>
             <a:r>
               <a:t>面向大规模类脑脉冲神经网络的可信AI研究</a:t>
             </a:r>
@@ -3253,14 +3245,6 @@
           </a:bodyPr>
           <a:lstStyle/>
           <a:p>
-            <a:pPr algn="l">
-              <a:defRPr sz="2800" b="1">
-                <a:solidFill>
-                  <a:srgbClr val="15253F"/>
-                </a:solidFill>
-                <a:latin typeface="Noto Serif CJK SC"/>
-              </a:defRPr>
-            </a:pPr>
             <a:r>
               <a:t>科研助理岗位应聘汇报</a:t>
             </a:r>
@@ -3289,14 +3273,6 @@
           </a:bodyPr>
           <a:lstStyle/>
           <a:p>
-            <a:pPr algn="l">
-              <a:defRPr sz="2000" b="0">
-                <a:solidFill>
-                  <a:srgbClr val="606C7D"/>
-                </a:solidFill>
-                <a:latin typeface="Noto Sans CJK SC"/>
-              </a:defRPr>
-            </a:pPr>
             <a:r>
               <a:t>面试汇报 | 詹绍基</a:t>
             </a:r>
@@ -3325,14 +3301,6 @@
           </a:bodyPr>
           <a:lstStyle/>
           <a:p>
-            <a:pPr algn="l">
-              <a:defRPr sz="1300" b="0">
-                <a:solidFill>
-                  <a:srgbClr val="606C7D"/>
-                </a:solidFill>
-                <a:latin typeface="Noto Sans CJK SC"/>
-              </a:defRPr>
-            </a:pPr>
             <a:r>
               <a:t>长期目标：深耕类脑SNN方向，攻读本方向博士学位</a:t>
             </a:r>
@@ -3496,14 +3464,6 @@
           </a:bodyPr>
           <a:lstStyle/>
           <a:p>
-            <a:pPr algn="l">
-              <a:defRPr sz="1600" b="1">
-                <a:solidFill>
-                  <a:srgbClr val="222D3E"/>
-                </a:solidFill>
-                <a:latin typeface="Noto Sans CJK SC"/>
-              </a:defRPr>
-            </a:pPr>
             <a:r>
               <a:t>医学×计算机×法学</a:t>
             </a:r>
@@ -3532,14 +3492,6 @@
           </a:bodyPr>
           <a:lstStyle/>
           <a:p>
-            <a:pPr algn="l">
-              <a:defRPr sz="1300" b="0">
-                <a:solidFill>
-                  <a:srgbClr val="606C7D"/>
-                </a:solidFill>
-                <a:latin typeface="Noto Sans CJK SC"/>
-              </a:defRPr>
-            </a:pPr>
             <a:r>
               <a:t>跨学科背景</a:t>
             </a:r>
@@ -3662,14 +3614,6 @@
           </a:bodyPr>
           <a:lstStyle/>
           <a:p>
-            <a:pPr algn="l">
-              <a:defRPr sz="1600" b="1">
-                <a:solidFill>
-                  <a:srgbClr val="222D3E"/>
-                </a:solidFill>
-                <a:latin typeface="Noto Sans CJK SC"/>
-              </a:defRPr>
-            </a:pPr>
             <a:r>
               <a:t>SNN / 可信AI全闭环</a:t>
             </a:r>
@@ -3698,14 +3642,6 @@
           </a:bodyPr>
           <a:lstStyle/>
           <a:p>
-            <a:pPr algn="l">
-              <a:defRPr sz="1300" b="0">
-                <a:solidFill>
-                  <a:srgbClr val="606C7D"/>
-                </a:solidFill>
-                <a:latin typeface="Noto Sans CJK SC"/>
-              </a:defRPr>
-            </a:pPr>
             <a:r>
               <a:t>从机制验证到评测基准</a:t>
             </a:r>
@@ -3828,14 +3764,6 @@
           </a:bodyPr>
           <a:lstStyle/>
           <a:p>
-            <a:pPr algn="l">
-              <a:defRPr sz="1600" b="1">
-                <a:solidFill>
-                  <a:srgbClr val="222D3E"/>
-                </a:solidFill>
-                <a:latin typeface="Noto Sans CJK SC"/>
-              </a:defRPr>
-            </a:pPr>
             <a:r>
               <a:t>与实验室高度适配</a:t>
             </a:r>
@@ -3864,14 +3792,6 @@
           </a:bodyPr>
           <a:lstStyle/>
           <a:p>
-            <a:pPr algn="l">
-              <a:defRPr sz="1300" b="0">
-                <a:solidFill>
-                  <a:srgbClr val="606C7D"/>
-                </a:solidFill>
-                <a:latin typeface="Noto Sans CJK SC"/>
-              </a:defRPr>
-            </a:pPr>
             <a:r>
               <a:t>方向同频</a:t>
             </a:r>
@@ -3949,14 +3869,6 @@
           </a:bodyPr>
           <a:lstStyle/>
           <a:p>
-            <a:pPr algn="ctr">
-              <a:defRPr sz="1600" b="0">
-                <a:solidFill>
-                  <a:srgbClr val="222D3E"/>
-                </a:solidFill>
-                <a:latin typeface="Noto Sans CJK SC"/>
-              </a:defRPr>
-            </a:pPr>
             <a:r>
               <a:t>20分钟汇报 | 电话：18550954831 | 邮箱：z1309457869@163.com</a:t>
             </a:r>
@@ -4075,14 +3987,6 @@
           </a:bodyPr>
           <a:lstStyle/>
           <a:p>
-            <a:pPr algn="ctr">
-              <a:defRPr sz="1000" b="1">
-                <a:solidFill>
-                  <a:srgbClr val="FFFFFF"/>
-                </a:solidFill>
-                <a:latin typeface="Noto Sans CJK SC"/>
-              </a:defRPr>
-            </a:pPr>
             <a:r>
               <a:t>Key Takeaway</a:t>
             </a:r>
@@ -4111,14 +4015,6 @@
           </a:bodyPr>
           <a:lstStyle/>
           <a:p>
-            <a:pPr algn="l">
-              <a:defRPr sz="1400" b="0">
-                <a:solidFill>
-                  <a:srgbClr val="FFFFFF"/>
-                </a:solidFill>
-                <a:latin typeface="Noto Sans CJK SC"/>
-              </a:defRPr>
-            </a:pPr>
             <a:r>
               <a:t>我将读博目标转化为科研助理阶段的高标准执行力：先为团队创造价值，再在同方向深耕成长。</a:t>
             </a:r>
@@ -4300,14 +4196,6 @@
           </a:bodyPr>
           <a:lstStyle/>
           <a:p>
-            <a:pPr algn="l">
-              <a:defRPr sz="2400" b="1">
-                <a:solidFill>
-                  <a:srgbClr val="FFFFFF"/>
-                </a:solidFill>
-                <a:latin typeface="Noto Serif CJK SC"/>
-              </a:defRPr>
-            </a:pPr>
             <a:r>
               <a:t>10. 拟承接子课题1：面向大规模SNN的具身智能×世界模型优化</a:t>
             </a:r>
@@ -4336,16 +4224,8 @@
           </a:bodyPr>
           <a:lstStyle/>
           <a:p>
-            <a:pPr algn="r">
-              <a:defRPr sz="1100" b="0">
-                <a:solidFill>
-                  <a:srgbClr val="E2E7ED"/>
-                </a:solidFill>
-                <a:latin typeface="Noto Sans CJK SC"/>
-              </a:defRPr>
-            </a:pPr>
-            <a:r>
-              <a:t>JEPA-style abstraction for large-scale embodied SNN</a:t>
+            <a:r>
+              <a:t>具身SNN与世界模型结合方案</a:t>
             </a:r>
           </a:p>
         </p:txBody>
@@ -4417,14 +4297,6 @@
           </a:bodyPr>
           <a:lstStyle/>
           <a:p>
-            <a:pPr algn="l">
-              <a:defRPr sz="1000" b="0">
-                <a:solidFill>
-                  <a:srgbClr val="606C7D"/>
-                </a:solidFill>
-                <a:latin typeface="Noto Sans CJK SC"/>
-              </a:defRPr>
-            </a:pPr>
             <a:r>
               <a:t>詹绍基 | 面试汇报</a:t>
             </a:r>
@@ -4453,14 +4325,6 @@
           </a:bodyPr>
           <a:lstStyle/>
           <a:p>
-            <a:pPr algn="r">
-              <a:defRPr sz="1100" b="1">
-                <a:solidFill>
-                  <a:srgbClr val="15253F"/>
-                </a:solidFill>
-                <a:latin typeface="Noto Sans CJK SC"/>
-              </a:defRPr>
-            </a:pPr>
             <a:r>
               <a:t>10</a:t>
             </a:r>
@@ -4534,14 +4398,6 @@
           </a:bodyPr>
           <a:lstStyle/>
           <a:p>
-            <a:pPr algn="ctr">
-              <a:defRPr sz="900" b="0">
-                <a:solidFill>
-                  <a:srgbClr val="606C7D"/>
-                </a:solidFill>
-                <a:latin typeface="Noto Sans CJK SC"/>
-              </a:defRPr>
-            </a:pPr>
             <a:r>
               <a:t>开场定位</a:t>
             </a:r>
@@ -4615,14 +4471,6 @@
           </a:bodyPr>
           <a:lstStyle/>
           <a:p>
-            <a:pPr algn="ctr">
-              <a:defRPr sz="900" b="0">
-                <a:solidFill>
-                  <a:srgbClr val="606C7D"/>
-                </a:solidFill>
-                <a:latin typeface="Noto Sans CJK SC"/>
-              </a:defRPr>
-            </a:pPr>
             <a:r>
               <a:t>能力证明</a:t>
             </a:r>
@@ -4696,14 +4544,6 @@
           </a:bodyPr>
           <a:lstStyle/>
           <a:p>
-            <a:pPr algn="ctr">
-              <a:defRPr sz="900" b="1">
-                <a:solidFill>
-                  <a:srgbClr val="FFFFFF"/>
-                </a:solidFill>
-                <a:latin typeface="Noto Sans CJK SC"/>
-              </a:defRPr>
-            </a:pPr>
             <a:r>
               <a:t>对接规划</a:t>
             </a:r>
@@ -4777,14 +4617,6 @@
           </a:bodyPr>
           <a:lstStyle/>
           <a:p>
-            <a:pPr algn="ctr">
-              <a:defRPr sz="900" b="0">
-                <a:solidFill>
-                  <a:srgbClr val="606C7D"/>
-                </a:solidFill>
-                <a:latin typeface="Noto Sans CJK SC"/>
-              </a:defRPr>
-            </a:pPr>
             <a:r>
               <a:t>总结备用</a:t>
             </a:r>
@@ -4858,14 +4690,6 @@
           </a:bodyPr>
           <a:lstStyle/>
           <a:p>
-            <a:pPr algn="l">
-              <a:defRPr sz="1600" b="1">
-                <a:solidFill>
-                  <a:srgbClr val="222D3E"/>
-                </a:solidFill>
-                <a:latin typeface="Noto Sans CJK SC"/>
-              </a:defRPr>
-            </a:pPr>
             <a:r>
               <a:t>目标</a:t>
             </a:r>
@@ -4894,14 +4718,6 @@
           </a:bodyPr>
           <a:lstStyle/>
           <a:p>
-            <a:pPr algn="l">
-              <a:defRPr sz="1500" b="0">
-                <a:solidFill>
-                  <a:srgbClr val="222D3E"/>
-                </a:solidFill>
-                <a:latin typeface="Noto Sans CJK SC"/>
-              </a:defRPr>
-            </a:pPr>
             <a:r>
               <a:t>引入JEPA式抽象预测，提升长时决策稳定性与跨场景泛化。</a:t>
             </a:r>
@@ -4930,14 +4746,6 @@
           </a:bodyPr>
           <a:lstStyle/>
           <a:p>
-            <a:pPr algn="l">
-              <a:defRPr sz="1600" b="1">
-                <a:solidFill>
-                  <a:srgbClr val="222D3E"/>
-                </a:solidFill>
-                <a:latin typeface="Noto Sans CJK SC"/>
-              </a:defRPr>
-            </a:pPr>
             <a:r>
               <a:t>设计</a:t>
             </a:r>
@@ -4966,14 +4774,6 @@
           </a:bodyPr>
           <a:lstStyle/>
           <a:p>
-            <a:pPr algn="l">
-              <a:defRPr sz="1500" b="0">
-                <a:solidFill>
-                  <a:srgbClr val="222D3E"/>
-                </a:solidFill>
-                <a:latin typeface="Noto Sans CJK SC"/>
-              </a:defRPr>
-            </a:pPr>
             <a:r>
               <a:t>无世界模型 / 像素预测 / 表征预测三组对照；指标：回报、能耗、OOD、迁移。</a:t>
             </a:r>
@@ -5002,14 +4802,6 @@
           </a:bodyPr>
           <a:lstStyle/>
           <a:p>
-            <a:pPr algn="l">
-              <a:defRPr sz="1600" b="1">
-                <a:solidFill>
-                  <a:srgbClr val="222D3E"/>
-                </a:solidFill>
-                <a:latin typeface="Noto Sans CJK SC"/>
-              </a:defRPr>
-            </a:pPr>
             <a:r>
               <a:t>对接</a:t>
             </a:r>
@@ -5038,14 +4830,6 @@
           </a:bodyPr>
           <a:lstStyle/>
           <a:p>
-            <a:pPr algn="l">
-              <a:defRPr sz="1500" b="0">
-                <a:solidFill>
-                  <a:srgbClr val="222D3E"/>
-                </a:solidFill>
-                <a:latin typeface="Noto Sans CJK SC"/>
-              </a:defRPr>
-            </a:pPr>
             <a:r>
               <a:t>复用现有具身SNN平台，对接实验室具身机器人与进化优化方向。</a:t>
             </a:r>
@@ -5074,14 +4858,6 @@
           </a:bodyPr>
           <a:lstStyle/>
           <a:p>
-            <a:pPr algn="l">
-              <a:defRPr sz="1600" b="1">
-                <a:solidFill>
-                  <a:srgbClr val="222D3E"/>
-                </a:solidFill>
-                <a:latin typeface="Noto Sans CJK SC"/>
-              </a:defRPr>
-            </a:pPr>
             <a:r>
               <a:t>产出</a:t>
             </a:r>
@@ -5110,14 +4886,6 @@
           </a:bodyPr>
           <a:lstStyle/>
           <a:p>
-            <a:pPr algn="l">
-              <a:defRPr sz="1500" b="0">
-                <a:solidFill>
-                  <a:srgbClr val="222D3E"/>
-                </a:solidFill>
-                <a:latin typeface="Noto Sans CJK SC"/>
-              </a:defRPr>
-            </a:pPr>
             <a:r>
               <a:t>6个月出初步结果；12个月完成主体实验并冲击顶会/顶刊。</a:t>
             </a:r>
@@ -5281,14 +5049,6 @@
           </a:bodyPr>
           <a:lstStyle/>
           <a:p>
-            <a:pPr algn="l">
-              <a:defRPr sz="1600" b="1">
-                <a:solidFill>
-                  <a:srgbClr val="222D3E"/>
-                </a:solidFill>
-                <a:latin typeface="Noto Sans CJK SC"/>
-              </a:defRPr>
-            </a:pPr>
             <a:r>
               <a:t>6个月</a:t>
             </a:r>
@@ -5317,14 +5077,6 @@
           </a:bodyPr>
           <a:lstStyle/>
           <a:p>
-            <a:pPr algn="l">
-              <a:defRPr sz="1300" b="0">
-                <a:solidFill>
-                  <a:srgbClr val="606C7D"/>
-                </a:solidFill>
-                <a:latin typeface="Noto Sans CJK SC"/>
-              </a:defRPr>
-            </a:pPr>
             <a:r>
               <a:t>小环境验证</a:t>
             </a:r>
@@ -5447,14 +5199,6 @@
           </a:bodyPr>
           <a:lstStyle/>
           <a:p>
-            <a:pPr algn="l">
-              <a:defRPr sz="1600" b="1">
-                <a:solidFill>
-                  <a:srgbClr val="222D3E"/>
-                </a:solidFill>
-                <a:latin typeface="Noto Sans CJK SC"/>
-              </a:defRPr>
-            </a:pPr>
             <a:r>
               <a:t>12个月</a:t>
             </a:r>
@@ -5483,14 +5227,6 @@
           </a:bodyPr>
           <a:lstStyle/>
           <a:p>
-            <a:pPr algn="l">
-              <a:defRPr sz="1300" b="0">
-                <a:solidFill>
-                  <a:srgbClr val="606C7D"/>
-                </a:solidFill>
-                <a:latin typeface="Noto Sans CJK SC"/>
-              </a:defRPr>
-            </a:pPr>
             <a:r>
               <a:t>核心实验完成</a:t>
             </a:r>
@@ -5613,14 +5349,6 @@
           </a:bodyPr>
           <a:lstStyle/>
           <a:p>
-            <a:pPr algn="l">
-              <a:defRPr sz="1600" b="1">
-                <a:solidFill>
-                  <a:srgbClr val="222D3E"/>
-                </a:solidFill>
-                <a:latin typeface="Noto Sans CJK SC"/>
-              </a:defRPr>
-            </a:pPr>
             <a:r>
               <a:t>18个月</a:t>
             </a:r>
@@ -5649,14 +5377,6 @@
           </a:bodyPr>
           <a:lstStyle/>
           <a:p>
-            <a:pPr algn="l">
-              <a:defRPr sz="1300" b="0">
-                <a:solidFill>
-                  <a:srgbClr val="606C7D"/>
-                </a:solidFill>
-                <a:latin typeface="Noto Sans CJK SC"/>
-              </a:defRPr>
-            </a:pPr>
             <a:r>
               <a:t>多机器人扩展</a:t>
             </a:r>
@@ -5779,14 +5499,6 @@
           </a:bodyPr>
           <a:lstStyle/>
           <a:p>
-            <a:pPr algn="ctr">
-              <a:defRPr sz="1000" b="1">
-                <a:solidFill>
-                  <a:srgbClr val="FFFFFF"/>
-                </a:solidFill>
-                <a:latin typeface="Noto Sans CJK SC"/>
-              </a:defRPr>
-            </a:pPr>
             <a:r>
               <a:t>Key Takeaway</a:t>
             </a:r>
@@ -5815,14 +5527,6 @@
           </a:bodyPr>
           <a:lstStyle/>
           <a:p>
-            <a:pPr algn="l">
-              <a:defRPr sz="1400" b="0">
-                <a:solidFill>
-                  <a:srgbClr val="FFFFFF"/>
-                </a:solidFill>
-                <a:latin typeface="Noto Sans CJK SC"/>
-              </a:defRPr>
-            </a:pPr>
             <a:r>
               <a:t>该课题可快速启动并直接服务课题组大规模SNN具身方向，填补长时规划能力关键空白。</a:t>
             </a:r>
@@ -6004,14 +5708,6 @@
           </a:bodyPr>
           <a:lstStyle/>
           <a:p>
-            <a:pPr algn="l">
-              <a:defRPr sz="2400" b="1">
-                <a:solidFill>
-                  <a:srgbClr val="FFFFFF"/>
-                </a:solidFill>
-                <a:latin typeface="Noto Serif CJK SC"/>
-              </a:defRPr>
-            </a:pPr>
             <a:r>
               <a:t>11. 拟承接子课题2：大规模SNN在可信约束下的多目标协同优化</a:t>
             </a:r>
@@ -6040,16 +5736,8 @@
           </a:bodyPr>
           <a:lstStyle/>
           <a:p>
-            <a:pPr algn="r">
-              <a:defRPr sz="1100" b="0">
-                <a:solidFill>
-                  <a:srgbClr val="E2E7ED"/>
-                </a:solidFill>
-                <a:latin typeface="Noto Sans CJK SC"/>
-              </a:defRPr>
-            </a:pPr>
-            <a:r>
-              <a:t>Federated + DP + multi-objective search for large-scale SNN</a:t>
+            <a:r>
+              <a:t>联邦+隐私+多目标协同优化方案</a:t>
             </a:r>
           </a:p>
         </p:txBody>
@@ -6121,14 +5809,6 @@
           </a:bodyPr>
           <a:lstStyle/>
           <a:p>
-            <a:pPr algn="l">
-              <a:defRPr sz="1000" b="0">
-                <a:solidFill>
-                  <a:srgbClr val="606C7D"/>
-                </a:solidFill>
-                <a:latin typeface="Noto Sans CJK SC"/>
-              </a:defRPr>
-            </a:pPr>
             <a:r>
               <a:t>詹绍基 | 面试汇报</a:t>
             </a:r>
@@ -6157,14 +5837,6 @@
           </a:bodyPr>
           <a:lstStyle/>
           <a:p>
-            <a:pPr algn="r">
-              <a:defRPr sz="1100" b="1">
-                <a:solidFill>
-                  <a:srgbClr val="15253F"/>
-                </a:solidFill>
-                <a:latin typeface="Noto Sans CJK SC"/>
-              </a:defRPr>
-            </a:pPr>
             <a:r>
               <a:t>11</a:t>
             </a:r>
@@ -6238,14 +5910,6 @@
           </a:bodyPr>
           <a:lstStyle/>
           <a:p>
-            <a:pPr algn="ctr">
-              <a:defRPr sz="900" b="0">
-                <a:solidFill>
-                  <a:srgbClr val="606C7D"/>
-                </a:solidFill>
-                <a:latin typeface="Noto Sans CJK SC"/>
-              </a:defRPr>
-            </a:pPr>
             <a:r>
               <a:t>开场定位</a:t>
             </a:r>
@@ -6319,14 +5983,6 @@
           </a:bodyPr>
           <a:lstStyle/>
           <a:p>
-            <a:pPr algn="ctr">
-              <a:defRPr sz="900" b="0">
-                <a:solidFill>
-                  <a:srgbClr val="606C7D"/>
-                </a:solidFill>
-                <a:latin typeface="Noto Sans CJK SC"/>
-              </a:defRPr>
-            </a:pPr>
             <a:r>
               <a:t>能力证明</a:t>
             </a:r>
@@ -6400,14 +6056,6 @@
           </a:bodyPr>
           <a:lstStyle/>
           <a:p>
-            <a:pPr algn="ctr">
-              <a:defRPr sz="900" b="1">
-                <a:solidFill>
-                  <a:srgbClr val="FFFFFF"/>
-                </a:solidFill>
-                <a:latin typeface="Noto Sans CJK SC"/>
-              </a:defRPr>
-            </a:pPr>
             <a:r>
               <a:t>对接规划</a:t>
             </a:r>
@@ -6481,14 +6129,6 @@
           </a:bodyPr>
           <a:lstStyle/>
           <a:p>
-            <a:pPr algn="ctr">
-              <a:defRPr sz="900" b="0">
-                <a:solidFill>
-                  <a:srgbClr val="606C7D"/>
-                </a:solidFill>
-                <a:latin typeface="Noto Sans CJK SC"/>
-              </a:defRPr>
-            </a:pPr>
             <a:r>
               <a:t>总结备用</a:t>
             </a:r>
@@ -6562,14 +6202,6 @@
           </a:bodyPr>
           <a:lstStyle/>
           <a:p>
-            <a:pPr algn="l">
-              <a:defRPr sz="1600" b="1">
-                <a:solidFill>
-                  <a:srgbClr val="222D3E"/>
-                </a:solidFill>
-                <a:latin typeface="Noto Sans CJK SC"/>
-              </a:defRPr>
-            </a:pPr>
             <a:r>
               <a:t>目标</a:t>
             </a:r>
@@ -6598,14 +6230,6 @@
           </a:bodyPr>
           <a:lstStyle/>
           <a:p>
-            <a:pPr algn="l">
-              <a:defRPr sz="1500" b="0">
-                <a:solidFill>
-                  <a:srgbClr val="222D3E"/>
-                </a:solidFill>
-                <a:latin typeface="Noto Sans CJK SC"/>
-              </a:defRPr>
-            </a:pPr>
             <a:r>
               <a:t>在联邦/分布式场景下统一优化性能、隐私、能效。</a:t>
             </a:r>
@@ -6634,14 +6258,6 @@
           </a:bodyPr>
           <a:lstStyle/>
           <a:p>
-            <a:pPr algn="l">
-              <a:defRPr sz="1600" b="1">
-                <a:solidFill>
-                  <a:srgbClr val="222D3E"/>
-                </a:solidFill>
-                <a:latin typeface="Noto Sans CJK SC"/>
-              </a:defRPr>
-            </a:pPr>
             <a:r>
               <a:t>创新</a:t>
             </a:r>
@@ -6670,14 +6286,6 @@
           </a:bodyPr>
           <a:lstStyle/>
           <a:p>
-            <a:pPr algn="l">
-              <a:defRPr sz="1500" b="0">
-                <a:solidFill>
-                  <a:srgbClr val="222D3E"/>
-                </a:solidFill>
-                <a:latin typeface="Noto Sans CJK SC"/>
-              </a:defRPr>
-            </a:pPr>
             <a:r>
               <a:t>把DP预算、MIA风险、能耗成本由后置评估前移为优化目标。</a:t>
             </a:r>
@@ -6706,14 +6314,6 @@
           </a:bodyPr>
           <a:lstStyle/>
           <a:p>
-            <a:pPr algn="l">
-              <a:defRPr sz="1600" b="1">
-                <a:solidFill>
-                  <a:srgbClr val="222D3E"/>
-                </a:solidFill>
-                <a:latin typeface="Noto Sans CJK SC"/>
-              </a:defRPr>
-            </a:pPr>
             <a:r>
               <a:t>对接</a:t>
             </a:r>
@@ -6742,14 +6342,6 @@
           </a:bodyPr>
           <a:lstStyle/>
           <a:p>
-            <a:pPr algn="l">
-              <a:defRPr sz="1500" b="0">
-                <a:solidFill>
-                  <a:srgbClr val="222D3E"/>
-                </a:solidFill>
-                <a:latin typeface="Noto Sans CJK SC"/>
-              </a:defRPr>
-            </a:pPr>
             <a:r>
               <a:t>复用PrivEnergyBench，对接实验室联邦学习、差分隐私、多目标进化优化积累。</a:t>
             </a:r>
@@ -6778,14 +6370,6 @@
           </a:bodyPr>
           <a:lstStyle/>
           <a:p>
-            <a:pPr algn="l">
-              <a:defRPr sz="1600" b="1">
-                <a:solidFill>
-                  <a:srgbClr val="222D3E"/>
-                </a:solidFill>
-                <a:latin typeface="Noto Sans CJK SC"/>
-              </a:defRPr>
-            </a:pPr>
             <a:r>
               <a:t>产出</a:t>
             </a:r>
@@ -6814,14 +6398,6 @@
           </a:bodyPr>
           <a:lstStyle/>
           <a:p>
-            <a:pPr algn="l">
-              <a:defRPr sz="1500" b="0">
-                <a:solidFill>
-                  <a:srgbClr val="222D3E"/>
-                </a:solidFill>
-                <a:latin typeface="Noto Sans CJK SC"/>
-              </a:defRPr>
-            </a:pPr>
             <a:r>
               <a:t>3个月工具包；9个月核心结果；15个月1-2篇高水平论文与开源发布。</a:t>
             </a:r>
@@ -6985,14 +6561,6 @@
           </a:bodyPr>
           <a:lstStyle/>
           <a:p>
-            <a:pPr algn="l">
-              <a:defRPr sz="1600" b="1">
-                <a:solidFill>
-                  <a:srgbClr val="222D3E"/>
-                </a:solidFill>
-                <a:latin typeface="Noto Sans CJK SC"/>
-              </a:defRPr>
-            </a:pPr>
             <a:r>
               <a:t>3个月</a:t>
             </a:r>
@@ -7021,14 +6589,6 @@
           </a:bodyPr>
           <a:lstStyle/>
           <a:p>
-            <a:pPr algn="l">
-              <a:defRPr sz="1300" b="0">
-                <a:solidFill>
-                  <a:srgbClr val="606C7D"/>
-                </a:solidFill>
-                <a:latin typeface="Noto Sans CJK SC"/>
-              </a:defRPr>
-            </a:pPr>
             <a:r>
               <a:t>联邦场景适配</a:t>
             </a:r>
@@ -7151,14 +6711,6 @@
           </a:bodyPr>
           <a:lstStyle/>
           <a:p>
-            <a:pPr algn="l">
-              <a:defRPr sz="1600" b="1">
-                <a:solidFill>
-                  <a:srgbClr val="222D3E"/>
-                </a:solidFill>
-                <a:latin typeface="Noto Sans CJK SC"/>
-              </a:defRPr>
-            </a:pPr>
             <a:r>
               <a:t>9个月</a:t>
             </a:r>
@@ -7187,14 +6739,6 @@
           </a:bodyPr>
           <a:lstStyle/>
           <a:p>
-            <a:pPr algn="l">
-              <a:defRPr sz="1300" b="0">
-                <a:solidFill>
-                  <a:srgbClr val="606C7D"/>
-                </a:solidFill>
-                <a:latin typeface="Noto Sans CJK SC"/>
-              </a:defRPr>
-            </a:pPr>
             <a:r>
               <a:t>融合多目标搜索</a:t>
             </a:r>
@@ -7317,14 +6861,6 @@
           </a:bodyPr>
           <a:lstStyle/>
           <a:p>
-            <a:pPr algn="l">
-              <a:defRPr sz="1600" b="1">
-                <a:solidFill>
-                  <a:srgbClr val="222D3E"/>
-                </a:solidFill>
-                <a:latin typeface="Noto Sans CJK SC"/>
-              </a:defRPr>
-            </a:pPr>
             <a:r>
               <a:t>15个月</a:t>
             </a:r>
@@ -7353,14 +6889,6 @@
           </a:bodyPr>
           <a:lstStyle/>
           <a:p>
-            <a:pPr algn="l">
-              <a:defRPr sz="1300" b="0">
-                <a:solidFill>
-                  <a:srgbClr val="606C7D"/>
-                </a:solidFill>
-                <a:latin typeface="Noto Sans CJK SC"/>
-              </a:defRPr>
-            </a:pPr>
             <a:r>
               <a:t>医疗场景验证</a:t>
             </a:r>
@@ -7483,14 +7011,6 @@
           </a:bodyPr>
           <a:lstStyle/>
           <a:p>
-            <a:pPr algn="ctr">
-              <a:defRPr sz="1000" b="1">
-                <a:solidFill>
-                  <a:srgbClr val="FFFFFF"/>
-                </a:solidFill>
-                <a:latin typeface="Noto Sans CJK SC"/>
-              </a:defRPr>
-            </a:pPr>
             <a:r>
               <a:t>Key Takeaway</a:t>
             </a:r>
@@ -7519,16 +7039,8 @@
           </a:bodyPr>
           <a:lstStyle/>
           <a:p>
-            <a:pPr algn="l">
-              <a:defRPr sz="1400" b="0">
-                <a:solidFill>
-                  <a:srgbClr val="FFFFFF"/>
-                </a:solidFill>
-                <a:latin typeface="Noto Sans CJK SC"/>
-              </a:defRPr>
-            </a:pPr>
-            <a:r>
-              <a:t>该课题与实验室可信AI和多目标优化主线高度重合，具备最快落地路径。</a:t>
+            <a:r>
+              <a:t>该课题与可信AI和多目标优化主线一致，具备明确的阶段性落地路径。</a:t>
             </a:r>
           </a:p>
         </p:txBody>
@@ -7708,14 +7220,6 @@
           </a:bodyPr>
           <a:lstStyle/>
           <a:p>
-            <a:pPr algn="l">
-              <a:defRPr sz="2400" b="1">
-                <a:solidFill>
-                  <a:srgbClr val="FFFFFF"/>
-                </a:solidFill>
-                <a:latin typeface="Noto Serif CJK SC"/>
-              </a:defRPr>
-            </a:pPr>
             <a:r>
               <a:t>12. 入职后0-6个月执行规划</a:t>
             </a:r>
@@ -7744,16 +7248,8 @@
           </a:bodyPr>
           <a:lstStyle/>
           <a:p>
-            <a:pPr algn="r">
-              <a:defRPr sz="1100" b="0">
-                <a:solidFill>
-                  <a:srgbClr val="E2E7ED"/>
-                </a:solidFill>
-                <a:latin typeface="Noto Sans CJK SC"/>
-              </a:defRPr>
-            </a:pPr>
-            <a:r>
-              <a:t>Short-term execution roadmap</a:t>
+            <a:r>
+              <a:t>0-6个月执行计划</a:t>
             </a:r>
           </a:p>
         </p:txBody>
@@ -7825,14 +7321,6 @@
           </a:bodyPr>
           <a:lstStyle/>
           <a:p>
-            <a:pPr algn="l">
-              <a:defRPr sz="1000" b="0">
-                <a:solidFill>
-                  <a:srgbClr val="606C7D"/>
-                </a:solidFill>
-                <a:latin typeface="Noto Sans CJK SC"/>
-              </a:defRPr>
-            </a:pPr>
             <a:r>
               <a:t>詹绍基 | 面试汇报</a:t>
             </a:r>
@@ -7861,14 +7349,6 @@
           </a:bodyPr>
           <a:lstStyle/>
           <a:p>
-            <a:pPr algn="r">
-              <a:defRPr sz="1100" b="1">
-                <a:solidFill>
-                  <a:srgbClr val="15253F"/>
-                </a:solidFill>
-                <a:latin typeface="Noto Sans CJK SC"/>
-              </a:defRPr>
-            </a:pPr>
             <a:r>
               <a:t>12</a:t>
             </a:r>
@@ -7942,14 +7422,6 @@
           </a:bodyPr>
           <a:lstStyle/>
           <a:p>
-            <a:pPr algn="ctr">
-              <a:defRPr sz="900" b="0">
-                <a:solidFill>
-                  <a:srgbClr val="606C7D"/>
-                </a:solidFill>
-                <a:latin typeface="Noto Sans CJK SC"/>
-              </a:defRPr>
-            </a:pPr>
             <a:r>
               <a:t>开场定位</a:t>
             </a:r>
@@ -8023,14 +7495,6 @@
           </a:bodyPr>
           <a:lstStyle/>
           <a:p>
-            <a:pPr algn="ctr">
-              <a:defRPr sz="900" b="0">
-                <a:solidFill>
-                  <a:srgbClr val="606C7D"/>
-                </a:solidFill>
-                <a:latin typeface="Noto Sans CJK SC"/>
-              </a:defRPr>
-            </a:pPr>
             <a:r>
               <a:t>能力证明</a:t>
             </a:r>
@@ -8104,14 +7568,6 @@
           </a:bodyPr>
           <a:lstStyle/>
           <a:p>
-            <a:pPr algn="ctr">
-              <a:defRPr sz="900" b="1">
-                <a:solidFill>
-                  <a:srgbClr val="FFFFFF"/>
-                </a:solidFill>
-                <a:latin typeface="Noto Sans CJK SC"/>
-              </a:defRPr>
-            </a:pPr>
             <a:r>
               <a:t>对接规划</a:t>
             </a:r>
@@ -8185,14 +7641,6 @@
           </a:bodyPr>
           <a:lstStyle/>
           <a:p>
-            <a:pPr algn="ctr">
-              <a:defRPr sz="900" b="0">
-                <a:solidFill>
-                  <a:srgbClr val="606C7D"/>
-                </a:solidFill>
-                <a:latin typeface="Noto Sans CJK SC"/>
-              </a:defRPr>
-            </a:pPr>
             <a:r>
               <a:t>总结备用</a:t>
             </a:r>
@@ -8356,14 +7804,6 @@
           </a:bodyPr>
           <a:lstStyle/>
           <a:p>
-            <a:pPr algn="l">
-              <a:defRPr sz="1600" b="1">
-                <a:solidFill>
-                  <a:srgbClr val="222D3E"/>
-                </a:solidFill>
-                <a:latin typeface="Noto Sans CJK SC"/>
-              </a:defRPr>
-            </a:pPr>
             <a:r>
               <a:t>第1个月</a:t>
             </a:r>
@@ -8392,14 +7832,6 @@
           </a:bodyPr>
           <a:lstStyle/>
           <a:p>
-            <a:pPr algn="l">
-              <a:defRPr sz="1300" b="0">
-                <a:solidFill>
-                  <a:srgbClr val="606C7D"/>
-                </a:solidFill>
-                <a:latin typeface="Noto Sans CJK SC"/>
-              </a:defRPr>
-            </a:pPr>
             <a:r>
               <a:t>完成团队对接、熟悉SNN项目框架</a:t>
             </a:r>
@@ -8534,14 +7966,6 @@
           </a:bodyPr>
           <a:lstStyle/>
           <a:p>
-            <a:pPr algn="l">
-              <a:defRPr sz="1600" b="1">
-                <a:solidFill>
-                  <a:srgbClr val="222D3E"/>
-                </a:solidFill>
-                <a:latin typeface="Noto Sans CJK SC"/>
-              </a:defRPr>
-            </a:pPr>
             <a:r>
               <a:t>第2-3个月</a:t>
             </a:r>
@@ -8570,14 +7994,6 @@
           </a:bodyPr>
           <a:lstStyle/>
           <a:p>
-            <a:pPr algn="l">
-              <a:defRPr sz="1300" b="0">
-                <a:solidFill>
-                  <a:srgbClr val="606C7D"/>
-                </a:solidFill>
-                <a:latin typeface="Noto Sans CJK SC"/>
-              </a:defRPr>
-            </a:pPr>
             <a:r>
               <a:t>全力完成联邦场景适配</a:t>
             </a:r>
@@ -8708,14 +8124,6 @@
           </a:bodyPr>
           <a:lstStyle/>
           <a:p>
-            <a:pPr algn="l">
-              <a:defRPr sz="1600" b="1">
-                <a:solidFill>
-                  <a:srgbClr val="222D3E"/>
-                </a:solidFill>
-                <a:latin typeface="Noto Sans CJK SC"/>
-              </a:defRPr>
-            </a:pPr>
             <a:r>
               <a:t>第4-5个月</a:t>
             </a:r>
@@ -8744,14 +8152,6 @@
           </a:bodyPr>
           <a:lstStyle/>
           <a:p>
-            <a:pPr algn="l">
-              <a:defRPr sz="1300" b="0">
-                <a:solidFill>
-                  <a:srgbClr val="606C7D"/>
-                </a:solidFill>
-                <a:latin typeface="Noto Sans CJK SC"/>
-              </a:defRPr>
-            </a:pPr>
             <a:r>
               <a:t>完成课题1核心对照实验</a:t>
             </a:r>
@@ -8882,14 +8282,6 @@
           </a:bodyPr>
           <a:lstStyle/>
           <a:p>
-            <a:pPr algn="l">
-              <a:defRPr sz="1600" b="1">
-                <a:solidFill>
-                  <a:srgbClr val="222D3E"/>
-                </a:solidFill>
-                <a:latin typeface="Noto Sans CJK SC"/>
-              </a:defRPr>
-            </a:pPr>
             <a:r>
               <a:t>第6个月</a:t>
             </a:r>
@@ -8918,14 +8310,6 @@
           </a:bodyPr>
           <a:lstStyle/>
           <a:p>
-            <a:pPr algn="l">
-              <a:defRPr sz="1300" b="0">
-                <a:solidFill>
-                  <a:srgbClr val="606C7D"/>
-                </a:solidFill>
-                <a:latin typeface="Noto Sans CJK SC"/>
-              </a:defRPr>
-            </a:pPr>
             <a:r>
               <a:t>完成两课题阶段总结</a:t>
             </a:r>
@@ -9056,14 +8440,6 @@
           </a:bodyPr>
           <a:lstStyle/>
           <a:p>
-            <a:pPr algn="ctr">
-              <a:defRPr sz="1000" b="1">
-                <a:solidFill>
-                  <a:srgbClr val="FFFFFF"/>
-                </a:solidFill>
-                <a:latin typeface="Noto Sans CJK SC"/>
-              </a:defRPr>
-            </a:pPr>
             <a:r>
               <a:t>Key Takeaway</a:t>
             </a:r>
@@ -9092,14 +8468,6 @@
           </a:bodyPr>
           <a:lstStyle/>
           <a:p>
-            <a:pPr algn="l">
-              <a:defRPr sz="1400" b="0">
-                <a:solidFill>
-                  <a:srgbClr val="FFFFFF"/>
-                </a:solidFill>
-                <a:latin typeface="Noto Sans CJK SC"/>
-              </a:defRPr>
-            </a:pPr>
             <a:r>
               <a:t>6个月内可完成平台对接、工具与论文阶段成果，既为团队形成实质贡献，也完成申博核心基础积累。</a:t>
             </a:r>
@@ -9281,14 +8649,6 @@
           </a:bodyPr>
           <a:lstStyle/>
           <a:p>
-            <a:pPr algn="l">
-              <a:defRPr sz="2400" b="1">
-                <a:solidFill>
-                  <a:srgbClr val="FFFFFF"/>
-                </a:solidFill>
-                <a:latin typeface="Noto Serif CJK SC"/>
-              </a:defRPr>
-            </a:pPr>
             <a:r>
               <a:t>13. 中长期研究规划（1-3年）</a:t>
             </a:r>
@@ -9317,16 +8677,8 @@
           </a:bodyPr>
           <a:lstStyle/>
           <a:p>
-            <a:pPr algn="r">
-              <a:defRPr sz="1100" b="0">
-                <a:solidFill>
-                  <a:srgbClr val="E2E7ED"/>
-                </a:solidFill>
-                <a:latin typeface="Noto Sans CJK SC"/>
-              </a:defRPr>
-            </a:pPr>
-            <a:r>
-              <a:t>Year 1 -&gt; Year 3</a:t>
+            <a:r>
+              <a:t>1-3年研究规划</a:t>
             </a:r>
           </a:p>
         </p:txBody>
@@ -9398,14 +8750,6 @@
           </a:bodyPr>
           <a:lstStyle/>
           <a:p>
-            <a:pPr algn="l">
-              <a:defRPr sz="1000" b="0">
-                <a:solidFill>
-                  <a:srgbClr val="606C7D"/>
-                </a:solidFill>
-                <a:latin typeface="Noto Sans CJK SC"/>
-              </a:defRPr>
-            </a:pPr>
             <a:r>
               <a:t>詹绍基 | 面试汇报</a:t>
             </a:r>
@@ -9434,14 +8778,6 @@
           </a:bodyPr>
           <a:lstStyle/>
           <a:p>
-            <a:pPr algn="r">
-              <a:defRPr sz="1100" b="1">
-                <a:solidFill>
-                  <a:srgbClr val="15253F"/>
-                </a:solidFill>
-                <a:latin typeface="Noto Sans CJK SC"/>
-              </a:defRPr>
-            </a:pPr>
             <a:r>
               <a:t>13</a:t>
             </a:r>
@@ -9515,14 +8851,6 @@
           </a:bodyPr>
           <a:lstStyle/>
           <a:p>
-            <a:pPr algn="ctr">
-              <a:defRPr sz="900" b="0">
-                <a:solidFill>
-                  <a:srgbClr val="606C7D"/>
-                </a:solidFill>
-                <a:latin typeface="Noto Sans CJK SC"/>
-              </a:defRPr>
-            </a:pPr>
             <a:r>
               <a:t>开场定位</a:t>
             </a:r>
@@ -9596,14 +8924,6 @@
           </a:bodyPr>
           <a:lstStyle/>
           <a:p>
-            <a:pPr algn="ctr">
-              <a:defRPr sz="900" b="0">
-                <a:solidFill>
-                  <a:srgbClr val="606C7D"/>
-                </a:solidFill>
-                <a:latin typeface="Noto Sans CJK SC"/>
-              </a:defRPr>
-            </a:pPr>
             <a:r>
               <a:t>能力证明</a:t>
             </a:r>
@@ -9677,14 +8997,6 @@
           </a:bodyPr>
           <a:lstStyle/>
           <a:p>
-            <a:pPr algn="ctr">
-              <a:defRPr sz="900" b="1">
-                <a:solidFill>
-                  <a:srgbClr val="FFFFFF"/>
-                </a:solidFill>
-                <a:latin typeface="Noto Sans CJK SC"/>
-              </a:defRPr>
-            </a:pPr>
             <a:r>
               <a:t>对接规划</a:t>
             </a:r>
@@ -9758,14 +9070,6 @@
           </a:bodyPr>
           <a:lstStyle/>
           <a:p>
-            <a:pPr algn="ctr">
-              <a:defRPr sz="900" b="0">
-                <a:solidFill>
-                  <a:srgbClr val="606C7D"/>
-                </a:solidFill>
-                <a:latin typeface="Noto Sans CJK SC"/>
-              </a:defRPr>
-            </a:pPr>
             <a:r>
               <a:t>总结备用</a:t>
             </a:r>
@@ -9884,14 +9188,6 @@
           </a:bodyPr>
           <a:lstStyle/>
           <a:p>
-            <a:pPr algn="l">
-              <a:defRPr sz="1600" b="1">
-                <a:solidFill>
-                  <a:srgbClr val="222D3E"/>
-                </a:solidFill>
-                <a:latin typeface="Noto Sans CJK SC"/>
-              </a:defRPr>
-            </a:pPr>
             <a:r>
               <a:t>第1年（科研助理核心期）</a:t>
             </a:r>
@@ -9920,14 +9216,6 @@
           </a:bodyPr>
           <a:lstStyle/>
           <a:p>
-            <a:pPr algn="l">
-              <a:defRPr sz="1300" b="0">
-                <a:solidFill>
-                  <a:srgbClr val="606C7D"/>
-                </a:solidFill>
-                <a:latin typeface="Noto Sans CJK SC"/>
-              </a:defRPr>
-            </a:pPr>
             <a:r>
               <a:t>100%完成PI安排科研任务，协助实验/分析/写作</a:t>
             </a:r>
@@ -10058,14 +9346,6 @@
           </a:bodyPr>
           <a:lstStyle/>
           <a:p>
-            <a:pPr algn="l">
-              <a:defRPr sz="1600" b="1">
-                <a:solidFill>
-                  <a:srgbClr val="222D3E"/>
-                </a:solidFill>
-                <a:latin typeface="Noto Sans CJK SC"/>
-              </a:defRPr>
-            </a:pPr>
             <a:r>
               <a:t>第2年（博士衔接期）</a:t>
             </a:r>
@@ -10094,14 +9374,6 @@
           </a:bodyPr>
           <a:lstStyle/>
           <a:p>
-            <a:pPr algn="l">
-              <a:defRPr sz="1300" b="0">
-                <a:solidFill>
-                  <a:srgbClr val="606C7D"/>
-                </a:solidFill>
-                <a:latin typeface="Noto Sans CJK SC"/>
-              </a:defRPr>
-            </a:pPr>
             <a:r>
               <a:t>若成功申请本实验室博士：无缝衔接并持续深耕</a:t>
             </a:r>
@@ -10236,14 +9508,6 @@
           </a:bodyPr>
           <a:lstStyle/>
           <a:p>
-            <a:pPr algn="l">
-              <a:defRPr sz="1600" b="1">
-                <a:solidFill>
-                  <a:srgbClr val="222D3E"/>
-                </a:solidFill>
-                <a:latin typeface="Noto Sans CJK SC"/>
-              </a:defRPr>
-            </a:pPr>
             <a:r>
               <a:t>第3年（长期深耕期）</a:t>
             </a:r>
@@ -10272,14 +9536,6 @@
           </a:bodyPr>
           <a:lstStyle/>
           <a:p>
-            <a:pPr algn="l">
-              <a:defRPr sz="1300" b="0">
-                <a:solidFill>
-                  <a:srgbClr val="606C7D"/>
-                </a:solidFill>
-                <a:latin typeface="Noto Sans CJK SC"/>
-              </a:defRPr>
-            </a:pPr>
             <a:r>
               <a:t>无论博士去向，持续深耕类脑SNN</a:t>
             </a:r>
@@ -10406,14 +9662,6 @@
           </a:bodyPr>
           <a:lstStyle/>
           <a:p>
-            <a:pPr algn="ctr">
-              <a:defRPr sz="1000" b="1">
-                <a:solidFill>
-                  <a:srgbClr val="FFFFFF"/>
-                </a:solidFill>
-                <a:latin typeface="Noto Sans CJK SC"/>
-              </a:defRPr>
-            </a:pPr>
             <a:r>
               <a:t>Key Takeaway</a:t>
             </a:r>
@@ -10442,14 +9690,6 @@
           </a:bodyPr>
           <a:lstStyle/>
           <a:p>
-            <a:pPr algn="l">
-              <a:defRPr sz="1400" b="0">
-                <a:solidFill>
-                  <a:srgbClr val="FFFFFF"/>
-                </a:solidFill>
-                <a:latin typeface="Noto Sans CJK SC"/>
-              </a:defRPr>
-            </a:pPr>
             <a:r>
               <a:t>我的1-3年规划与课题组发展同向：团队产出始终第一优先，并在此基础上稳步推进博士成长。</a:t>
             </a:r>
@@ -10631,16 +9871,8 @@
           </a:bodyPr>
           <a:lstStyle/>
           <a:p>
-            <a:pPr algn="l">
-              <a:defRPr sz="2400" b="1">
-                <a:solidFill>
-                  <a:srgbClr val="FFFFFF"/>
-                </a:solidFill>
-                <a:latin typeface="Noto Serif CJK SC"/>
-              </a:defRPr>
-            </a:pPr>
-            <a:r>
-              <a:t>14. 为什么是我：5个不可替代优势</a:t>
+            <a:r>
+              <a:t>14. 为什么适合这个岗位：5个关键优势</a:t>
             </a:r>
           </a:p>
         </p:txBody>
@@ -10667,16 +9899,8 @@
           </a:bodyPr>
           <a:lstStyle/>
           <a:p>
-            <a:pPr algn="r">
-              <a:defRPr sz="1100" b="0">
-                <a:solidFill>
-                  <a:srgbClr val="E2E7ED"/>
-                </a:solidFill>
-                <a:latin typeface="Noto Sans CJK SC"/>
-              </a:defRPr>
-            </a:pPr>
-            <a:r>
-              <a:t>Final value proposition</a:t>
+            <a:r>
+              <a:t>综合优势总结</a:t>
             </a:r>
           </a:p>
         </p:txBody>
@@ -10748,14 +9972,6 @@
           </a:bodyPr>
           <a:lstStyle/>
           <a:p>
-            <a:pPr algn="l">
-              <a:defRPr sz="1000" b="0">
-                <a:solidFill>
-                  <a:srgbClr val="606C7D"/>
-                </a:solidFill>
-                <a:latin typeface="Noto Sans CJK SC"/>
-              </a:defRPr>
-            </a:pPr>
             <a:r>
               <a:t>詹绍基 | 面试汇报</a:t>
             </a:r>
@@ -10784,14 +10000,6 @@
           </a:bodyPr>
           <a:lstStyle/>
           <a:p>
-            <a:pPr algn="r">
-              <a:defRPr sz="1100" b="1">
-                <a:solidFill>
-                  <a:srgbClr val="15253F"/>
-                </a:solidFill>
-                <a:latin typeface="Noto Sans CJK SC"/>
-              </a:defRPr>
-            </a:pPr>
             <a:r>
               <a:t>14</a:t>
             </a:r>
@@ -10865,14 +10073,6 @@
           </a:bodyPr>
           <a:lstStyle/>
           <a:p>
-            <a:pPr algn="ctr">
-              <a:defRPr sz="900" b="0">
-                <a:solidFill>
-                  <a:srgbClr val="606C7D"/>
-                </a:solidFill>
-                <a:latin typeface="Noto Sans CJK SC"/>
-              </a:defRPr>
-            </a:pPr>
             <a:r>
               <a:t>开场定位</a:t>
             </a:r>
@@ -10946,14 +10146,6 @@
           </a:bodyPr>
           <a:lstStyle/>
           <a:p>
-            <a:pPr algn="ctr">
-              <a:defRPr sz="900" b="0">
-                <a:solidFill>
-                  <a:srgbClr val="606C7D"/>
-                </a:solidFill>
-                <a:latin typeface="Noto Sans CJK SC"/>
-              </a:defRPr>
-            </a:pPr>
             <a:r>
               <a:t>能力证明</a:t>
             </a:r>
@@ -11027,14 +10219,6 @@
           </a:bodyPr>
           <a:lstStyle/>
           <a:p>
-            <a:pPr algn="ctr">
-              <a:defRPr sz="900" b="0">
-                <a:solidFill>
-                  <a:srgbClr val="606C7D"/>
-                </a:solidFill>
-                <a:latin typeface="Noto Sans CJK SC"/>
-              </a:defRPr>
-            </a:pPr>
             <a:r>
               <a:t>对接规划</a:t>
             </a:r>
@@ -11108,14 +10292,6 @@
           </a:bodyPr>
           <a:lstStyle/>
           <a:p>
-            <a:pPr algn="ctr">
-              <a:defRPr sz="900" b="1">
-                <a:solidFill>
-                  <a:srgbClr val="FFFFFF"/>
-                </a:solidFill>
-                <a:latin typeface="Noto Sans CJK SC"/>
-              </a:defRPr>
-            </a:pPr>
             <a:r>
               <a:t>总结备用</a:t>
             </a:r>
@@ -11234,14 +10410,6 @@
           </a:bodyPr>
           <a:lstStyle/>
           <a:p>
-            <a:pPr algn="l">
-              <a:defRPr sz="1600" b="1">
-                <a:solidFill>
-                  <a:srgbClr val="222D3E"/>
-                </a:solidFill>
-                <a:latin typeface="Noto Sans CJK SC"/>
-              </a:defRPr>
-            </a:pPr>
             <a:r>
               <a:t>方向高度匹配</a:t>
             </a:r>
@@ -11270,14 +10438,6 @@
           </a:bodyPr>
           <a:lstStyle/>
           <a:p>
-            <a:pPr algn="l">
-              <a:defRPr sz="1300" b="0">
-                <a:solidFill>
-                  <a:srgbClr val="606C7D"/>
-                </a:solidFill>
-                <a:latin typeface="Noto Sans CJK SC"/>
-              </a:defRPr>
-            </a:pPr>
             <a:r>
               <a:t>研究主线与实验室三大方向同频</a:t>
             </a:r>
@@ -11400,14 +10560,6 @@
           </a:bodyPr>
           <a:lstStyle/>
           <a:p>
-            <a:pPr algn="l">
-              <a:defRPr sz="1600" b="1">
-                <a:solidFill>
-                  <a:srgbClr val="222D3E"/>
-                </a:solidFill>
-                <a:latin typeface="Noto Sans CJK SC"/>
-              </a:defRPr>
-            </a:pPr>
             <a:r>
               <a:t>全闭环科研能力</a:t>
             </a:r>
@@ -11436,14 +10588,6 @@
           </a:bodyPr>
           <a:lstStyle/>
           <a:p>
-            <a:pPr algn="l">
-              <a:defRPr sz="1300" b="0">
-                <a:solidFill>
-                  <a:srgbClr val="606C7D"/>
-                </a:solidFill>
-                <a:latin typeface="Noto Sans CJK SC"/>
-              </a:defRPr>
-            </a:pPr>
             <a:r>
               <a:t>独立完成问题定义到成果输出</a:t>
             </a:r>
@@ -11566,14 +10710,6 @@
           </a:bodyPr>
           <a:lstStyle/>
           <a:p>
-            <a:pPr algn="l">
-              <a:defRPr sz="1600" b="1">
-                <a:solidFill>
-                  <a:srgbClr val="222D3E"/>
-                </a:solidFill>
-                <a:latin typeface="Noto Sans CJK SC"/>
-              </a:defRPr>
-            </a:pPr>
             <a:r>
               <a:t>明确学术规划与强自驱</a:t>
             </a:r>
@@ -11602,14 +10738,6 @@
           </a:bodyPr>
           <a:lstStyle/>
           <a:p>
-            <a:pPr algn="l">
-              <a:defRPr sz="1300" b="0">
-                <a:solidFill>
-                  <a:srgbClr val="606C7D"/>
-                </a:solidFill>
-                <a:latin typeface="Noto Sans CJK SC"/>
-              </a:defRPr>
-            </a:pPr>
             <a:r>
               <a:t>以深耕大规模SNN并攻读博士为长期目标</a:t>
             </a:r>
@@ -11736,14 +10864,6 @@
           </a:bodyPr>
           <a:lstStyle/>
           <a:p>
-            <a:pPr algn="l">
-              <a:defRPr sz="1600" b="1">
-                <a:solidFill>
-                  <a:srgbClr val="222D3E"/>
-                </a:solidFill>
-                <a:latin typeface="Noto Sans CJK SC"/>
-              </a:defRPr>
-            </a:pPr>
             <a:r>
               <a:t>可落地研究理念</a:t>
             </a:r>
@@ -11772,14 +10892,6 @@
           </a:bodyPr>
           <a:lstStyle/>
           <a:p>
-            <a:pPr algn="l">
-              <a:defRPr sz="1300" b="0">
-                <a:solidFill>
-                  <a:srgbClr val="606C7D"/>
-                </a:solidFill>
-                <a:latin typeface="Noto Sans CJK SC"/>
-              </a:defRPr>
-            </a:pPr>
             <a:r>
               <a:t>可复现、可验证、可部署</a:t>
             </a:r>
@@ -11902,14 +11014,6 @@
           </a:bodyPr>
           <a:lstStyle/>
           <a:p>
-            <a:pPr algn="l">
-              <a:defRPr sz="1600" b="1">
-                <a:solidFill>
-                  <a:srgbClr val="222D3E"/>
-                </a:solidFill>
-                <a:latin typeface="Noto Sans CJK SC"/>
-              </a:defRPr>
-            </a:pPr>
             <a:r>
               <a:t>稀缺跨学科背景</a:t>
             </a:r>
@@ -11938,14 +11042,6 @@
           </a:bodyPr>
           <a:lstStyle/>
           <a:p>
-            <a:pPr algn="l">
-              <a:defRPr sz="1300" b="0">
-                <a:solidFill>
-                  <a:srgbClr val="606C7D"/>
-                </a:solidFill>
-                <a:latin typeface="Noto Sans CJK SC"/>
-              </a:defRPr>
-            </a:pPr>
             <a:r>
               <a:t>医学+计算机+法学</a:t>
             </a:r>
@@ -12068,14 +11164,6 @@
           </a:bodyPr>
           <a:lstStyle/>
           <a:p>
-            <a:pPr algn="ctr">
-              <a:defRPr sz="1000" b="1">
-                <a:solidFill>
-                  <a:srgbClr val="FFFFFF"/>
-                </a:solidFill>
-                <a:latin typeface="Noto Sans CJK SC"/>
-              </a:defRPr>
-            </a:pPr>
             <a:r>
               <a:t>Key Takeaway</a:t>
             </a:r>
@@ -12104,14 +11192,6 @@
           </a:bodyPr>
           <a:lstStyle/>
           <a:p>
-            <a:pPr algn="l">
-              <a:defRPr sz="1400" b="0">
-                <a:solidFill>
-                  <a:srgbClr val="FFFFFF"/>
-                </a:solidFill>
-                <a:latin typeface="Noto Sans CJK SC"/>
-              </a:defRPr>
-            </a:pPr>
             <a:r>
               <a:t>我带来的不是零散项目，而是一条可与课题组深度融合、共同成长的学术路线，可胜任科研助理并成长为博士骨干。</a:t>
             </a:r>
@@ -12293,14 +11373,6 @@
           </a:bodyPr>
           <a:lstStyle/>
           <a:p>
-            <a:pPr algn="l">
-              <a:defRPr sz="2400" b="1">
-                <a:solidFill>
-                  <a:srgbClr val="FFFFFF"/>
-                </a:solidFill>
-                <a:latin typeface="Noto Serif CJK SC"/>
-              </a:defRPr>
-            </a:pPr>
             <a:r>
               <a:t>15. 致谢</a:t>
             </a:r>
@@ -12329,14 +11401,6 @@
           </a:bodyPr>
           <a:lstStyle/>
           <a:p>
-            <a:pPr algn="r">
-              <a:defRPr sz="1100" b="0">
-                <a:solidFill>
-                  <a:srgbClr val="E2E7ED"/>
-                </a:solidFill>
-                <a:latin typeface="Noto Sans CJK SC"/>
-              </a:defRPr>
-            </a:pPr>
             <a:r>
               <a:t>Q&amp;A</a:t>
             </a:r>
@@ -12410,14 +11474,6 @@
           </a:bodyPr>
           <a:lstStyle/>
           <a:p>
-            <a:pPr algn="l">
-              <a:defRPr sz="1000" b="0">
-                <a:solidFill>
-                  <a:srgbClr val="606C7D"/>
-                </a:solidFill>
-                <a:latin typeface="Noto Sans CJK SC"/>
-              </a:defRPr>
-            </a:pPr>
             <a:r>
               <a:t>詹绍基 | 面试汇报</a:t>
             </a:r>
@@ -12446,14 +11502,6 @@
           </a:bodyPr>
           <a:lstStyle/>
           <a:p>
-            <a:pPr algn="r">
-              <a:defRPr sz="1100" b="1">
-                <a:solidFill>
-                  <a:srgbClr val="15253F"/>
-                </a:solidFill>
-                <a:latin typeface="Noto Sans CJK SC"/>
-              </a:defRPr>
-            </a:pPr>
             <a:r>
               <a:t>15</a:t>
             </a:r>
@@ -12527,14 +11575,6 @@
           </a:bodyPr>
           <a:lstStyle/>
           <a:p>
-            <a:pPr algn="ctr">
-              <a:defRPr sz="900" b="0">
-                <a:solidFill>
-                  <a:srgbClr val="606C7D"/>
-                </a:solidFill>
-                <a:latin typeface="Noto Sans CJK SC"/>
-              </a:defRPr>
-            </a:pPr>
             <a:r>
               <a:t>开场定位</a:t>
             </a:r>
@@ -12608,14 +11648,6 @@
           </a:bodyPr>
           <a:lstStyle/>
           <a:p>
-            <a:pPr algn="ctr">
-              <a:defRPr sz="900" b="0">
-                <a:solidFill>
-                  <a:srgbClr val="606C7D"/>
-                </a:solidFill>
-                <a:latin typeface="Noto Sans CJK SC"/>
-              </a:defRPr>
-            </a:pPr>
             <a:r>
               <a:t>能力证明</a:t>
             </a:r>
@@ -12689,14 +11721,6 @@
           </a:bodyPr>
           <a:lstStyle/>
           <a:p>
-            <a:pPr algn="ctr">
-              <a:defRPr sz="900" b="0">
-                <a:solidFill>
-                  <a:srgbClr val="606C7D"/>
-                </a:solidFill>
-                <a:latin typeface="Noto Sans CJK SC"/>
-              </a:defRPr>
-            </a:pPr>
             <a:r>
               <a:t>对接规划</a:t>
             </a:r>
@@ -12770,14 +11794,6 @@
           </a:bodyPr>
           <a:lstStyle/>
           <a:p>
-            <a:pPr algn="ctr">
-              <a:defRPr sz="900" b="1">
-                <a:solidFill>
-                  <a:srgbClr val="FFFFFF"/>
-                </a:solidFill>
-                <a:latin typeface="Noto Sans CJK SC"/>
-              </a:defRPr>
-            </a:pPr>
             <a:r>
               <a:t>总结备用</a:t>
             </a:r>
@@ -12851,14 +11867,6 @@
           </a:bodyPr>
           <a:lstStyle/>
           <a:p>
-            <a:pPr algn="ctr">
-              <a:defRPr sz="3600" b="1">
-                <a:solidFill>
-                  <a:srgbClr val="15253F"/>
-                </a:solidFill>
-                <a:latin typeface="Noto Serif CJK SC"/>
-              </a:defRPr>
-            </a:pPr>
             <a:r>
               <a:t>感谢各位老师的聆听！欢迎批评指正</a:t>
             </a:r>
@@ -12887,14 +11895,6 @@
           </a:bodyPr>
           <a:lstStyle/>
           <a:p>
-            <a:pPr algn="ctr">
-              <a:defRPr sz="2000" b="0">
-                <a:solidFill>
-                  <a:srgbClr val="222D3E"/>
-                </a:solidFill>
-                <a:latin typeface="Noto Sans CJK SC"/>
-              </a:defRPr>
-            </a:pPr>
             <a:r>
               <a:t>詹绍基 | 电话：18550954831 | 邮箱：z1309457869@163.com</a:t>
             </a:r>
@@ -12923,16 +11923,8 @@
           </a:bodyPr>
           <a:lstStyle/>
           <a:p>
-            <a:pPr algn="ctr">
-              <a:defRPr sz="1800" b="0">
-                <a:solidFill>
-                  <a:srgbClr val="237486"/>
-                </a:solidFill>
-                <a:latin typeface="Noto Sans CJK SC"/>
-              </a:defRPr>
-            </a:pPr>
-            <a:r>
-              <a:t>可提供全部实验代码、报告与原始数据，确保全流程可复现。</a:t>
+            <a:r>
+              <a:t>可提供实验代码、报告与原始数据，保证主要结果可复现。</a:t>
             </a:r>
           </a:p>
         </p:txBody>
@@ -12959,14 +11951,6 @@
           </a:bodyPr>
           <a:lstStyle/>
           <a:p>
-            <a:pPr algn="ctr">
-              <a:defRPr sz="1400" b="0">
-                <a:solidFill>
-                  <a:srgbClr val="606C7D"/>
-                </a:solidFill>
-                <a:latin typeface="Noto Sans CJK SC"/>
-              </a:defRPr>
-            </a:pPr>
             <a:r>
               <a:t>长期目标是深耕类脑SNN方向并攻读本方向博士，期待在老师指导下成长并为团队创造长期价值。</a:t>
             </a:r>
@@ -13085,14 +12069,6 @@
           </a:bodyPr>
           <a:lstStyle/>
           <a:p>
-            <a:pPr algn="ctr">
-              <a:defRPr sz="1000" b="1">
-                <a:solidFill>
-                  <a:srgbClr val="FFFFFF"/>
-                </a:solidFill>
-                <a:latin typeface="Noto Sans CJK SC"/>
-              </a:defRPr>
-            </a:pPr>
             <a:r>
               <a:t>Key Takeaway</a:t>
             </a:r>
@@ -13121,14 +12097,6 @@
           </a:bodyPr>
           <a:lstStyle/>
           <a:p>
-            <a:pPr algn="l">
-              <a:defRPr sz="1400" b="0">
-                <a:solidFill>
-                  <a:srgbClr val="FFFFFF"/>
-                </a:solidFill>
-                <a:latin typeface="Noto Sans CJK SC"/>
-              </a:defRPr>
-            </a:pPr>
             <a:r>
               <a:t>所有结果均可复现，可即时提供代码与实验明细，也可随时沟通学术规划与岗位安排。</a:t>
             </a:r>
@@ -13310,14 +12278,6 @@
           </a:bodyPr>
           <a:lstStyle/>
           <a:p>
-            <a:pPr algn="l">
-              <a:defRPr sz="2400" b="1">
-                <a:solidFill>
-                  <a:srgbClr val="FFFFFF"/>
-                </a:solidFill>
-                <a:latin typeface="Noto Serif CJK SC"/>
-              </a:defRPr>
-            </a:pPr>
             <a:r>
               <a:t>备用页A：实验详细数据汇总</a:t>
             </a:r>
@@ -13346,16 +12306,8 @@
           </a:bodyPr>
           <a:lstStyle/>
           <a:p>
-            <a:pPr algn="r">
-              <a:defRPr sz="1100" b="0">
-                <a:solidFill>
-                  <a:srgbClr val="E2E7ED"/>
-                </a:solidFill>
-                <a:latin typeface="Noto Sans CJK SC"/>
-              </a:defRPr>
-            </a:pPr>
-            <a:r>
-              <a:t>Backup for technical questions</a:t>
+            <a:r>
+              <a:t>技术追问备用</a:t>
             </a:r>
           </a:p>
         </p:txBody>
@@ -13427,14 +12379,6 @@
           </a:bodyPr>
           <a:lstStyle/>
           <a:p>
-            <a:pPr algn="l">
-              <a:defRPr sz="1000" b="0">
-                <a:solidFill>
-                  <a:srgbClr val="606C7D"/>
-                </a:solidFill>
-                <a:latin typeface="Noto Sans CJK SC"/>
-              </a:defRPr>
-            </a:pPr>
             <a:r>
               <a:t>詹绍基 | 面试汇报</a:t>
             </a:r>
@@ -13463,14 +12407,6 @@
           </a:bodyPr>
           <a:lstStyle/>
           <a:p>
-            <a:pPr algn="r">
-              <a:defRPr sz="1100" b="1">
-                <a:solidFill>
-                  <a:srgbClr val="15253F"/>
-                </a:solidFill>
-                <a:latin typeface="Noto Sans CJK SC"/>
-              </a:defRPr>
-            </a:pPr>
             <a:r>
               <a:t>16</a:t>
             </a:r>
@@ -13544,14 +12480,6 @@
           </a:bodyPr>
           <a:lstStyle/>
           <a:p>
-            <a:pPr algn="ctr">
-              <a:defRPr sz="900" b="0">
-                <a:solidFill>
-                  <a:srgbClr val="606C7D"/>
-                </a:solidFill>
-                <a:latin typeface="Noto Sans CJK SC"/>
-              </a:defRPr>
-            </a:pPr>
             <a:r>
               <a:t>开场定位</a:t>
             </a:r>
@@ -13625,14 +12553,6 @@
           </a:bodyPr>
           <a:lstStyle/>
           <a:p>
-            <a:pPr algn="ctr">
-              <a:defRPr sz="900" b="0">
-                <a:solidFill>
-                  <a:srgbClr val="606C7D"/>
-                </a:solidFill>
-                <a:latin typeface="Noto Sans CJK SC"/>
-              </a:defRPr>
-            </a:pPr>
             <a:r>
               <a:t>能力证明</a:t>
             </a:r>
@@ -13706,14 +12626,6 @@
           </a:bodyPr>
           <a:lstStyle/>
           <a:p>
-            <a:pPr algn="ctr">
-              <a:defRPr sz="900" b="0">
-                <a:solidFill>
-                  <a:srgbClr val="606C7D"/>
-                </a:solidFill>
-                <a:latin typeface="Noto Sans CJK SC"/>
-              </a:defRPr>
-            </a:pPr>
             <a:r>
               <a:t>对接规划</a:t>
             </a:r>
@@ -13787,14 +12699,6 @@
           </a:bodyPr>
           <a:lstStyle/>
           <a:p>
-            <a:pPr algn="ctr">
-              <a:defRPr sz="900" b="1">
-                <a:solidFill>
-                  <a:srgbClr val="FFFFFF"/>
-                </a:solidFill>
-                <a:latin typeface="Noto Sans CJK SC"/>
-              </a:defRPr>
-            </a:pPr>
             <a:r>
               <a:t>总结备用</a:t>
             </a:r>
@@ -13868,14 +12772,6 @@
           </a:bodyPr>
           <a:lstStyle/>
           <a:p>
-            <a:pPr algn="l">
-              <a:defRPr sz="1600" b="0">
-                <a:solidFill>
-                  <a:srgbClr val="606C7D"/>
-                </a:solidFill>
-                <a:latin typeface="Noto Sans CJK SC"/>
-              </a:defRPr>
-            </a:pPr>
             <a:r>
               <a:t>用于评委追问时快速调用</a:t>
             </a:r>
@@ -13904,14 +12800,6 @@
           </a:bodyPr>
           <a:lstStyle/>
           <a:p>
-            <a:pPr algn="l">
-              <a:defRPr sz="1400" b="0">
-                <a:solidFill>
-                  <a:srgbClr val="222D3E"/>
-                </a:solidFill>
-                <a:latin typeface="Noto Sans CJK SC"/>
-              </a:defRPr>
-            </a:pPr>
             <a:r>
               <a:t>核心技术栈：SpikingJelly（主力）/ SNNtorch / PyTorch / NumPy / Matplotlib</a:t>
             </a:r>
@@ -13940,170 +12828,42 @@
           </a:bodyPr>
           <a:lstStyle/>
           <a:p>
-            <a:pPr>
-              <a:spcAft>
-                <a:spcPts val="700"/>
-              </a:spcAft>
-              <a:defRPr sz="1400">
-                <a:solidFill>
-                  <a:srgbClr val="222D3E"/>
-                </a:solidFill>
-                <a:latin typeface="Noto Sans CJK SC"/>
-              </a:defRPr>
-            </a:pPr>
-            <a:r>
-              <a:rPr>
-                <a:solidFill>
-                  <a:srgbClr val="222D3E"/>
-                </a:solidFill>
-              </a:rPr>
+            <a:r>
               <a:t>EmbodiedSNN：objective / food / energy / spike activity 关键统计。</a:t>
             </a:r>
           </a:p>
           <a:p>
-            <a:pPr>
-              <a:spcAft>
-                <a:spcPts val="700"/>
-              </a:spcAft>
-              <a:defRPr sz="1400">
-                <a:solidFill>
-                  <a:srgbClr val="222D3E"/>
-                </a:solidFill>
-                <a:latin typeface="Noto Sans CJK SC"/>
-              </a:defRPr>
-            </a:pPr>
-            <a:r>
-              <a:rPr>
-                <a:solidFill>
-                  <a:srgbClr val="222D3E"/>
-                </a:solidFill>
-              </a:rPr>
+            <a:r>
               <a:t>Neuro-Symbiosis：baseline对照、Pareto前沿与耦合敏感性。</a:t>
             </a:r>
           </a:p>
           <a:p>
-            <a:pPr>
-              <a:spcAft>
-                <a:spcPts val="700"/>
-              </a:spcAft>
-              <a:defRPr sz="1400">
-                <a:solidFill>
-                  <a:srgbClr val="222D3E"/>
-                </a:solidFill>
-                <a:latin typeface="Noto Sans CJK SC"/>
-              </a:defRPr>
-            </a:pPr>
-            <a:r>
-              <a:rPr>
-                <a:solidFill>
-                  <a:srgbClr val="222D3E"/>
-                </a:solidFill>
-              </a:rPr>
+            <a:r>
               <a:t>MedSparseSNN：accuracy、MIA AUC、power-latency 全量表。</a:t>
             </a:r>
           </a:p>
           <a:p>
-            <a:pPr>
-              <a:spcAft>
-                <a:spcPts val="700"/>
-              </a:spcAft>
-              <a:defRPr sz="1400">
-                <a:solidFill>
-                  <a:srgbClr val="222D3E"/>
-                </a:solidFill>
-                <a:latin typeface="Noto Sans CJK SC"/>
-              </a:defRPr>
-            </a:pPr>
-            <a:r>
-              <a:rPr>
-                <a:solidFill>
-                  <a:srgbClr val="222D3E"/>
-                </a:solidFill>
-              </a:rPr>
+            <a:r>
               <a:t>PrivEnergyBench：多seed mean/std/CI 与可复现命令入口。</a:t>
             </a:r>
           </a:p>
           <a:p>
-            <a:pPr>
-              <a:spcAft>
-                <a:spcPts val="700"/>
-              </a:spcAft>
-              <a:defRPr sz="1400">
-                <a:solidFill>
-                  <a:srgbClr val="222D3E"/>
-                </a:solidFill>
-                <a:latin typeface="Noto Sans CJK SC"/>
-              </a:defRPr>
-            </a:pPr>
-            <a:r>
-              <a:rPr>
-                <a:solidFill>
-                  <a:srgbClr val="222D3E"/>
-                </a:solidFill>
-              </a:rPr>
+            <a:r>
               <a:t>大规模SNN技术理解：稀疏训练优化、多GPU并行训推、能效-性能-隐私多目标协同优化。</a:t>
             </a:r>
           </a:p>
           <a:p>
-            <a:pPr>
-              <a:spcAft>
-                <a:spcPts val="700"/>
-              </a:spcAft>
-              <a:defRPr sz="1400">
-                <a:solidFill>
-                  <a:srgbClr val="222D3E"/>
-                </a:solidFill>
-                <a:latin typeface="Noto Sans CJK SC"/>
-              </a:defRPr>
-            </a:pPr>
-            <a:r>
-              <a:rPr>
-                <a:solidFill>
-                  <a:srgbClr val="222D3E"/>
-                </a:solidFill>
-              </a:rPr>
+            <a:r>
               <a:t>已完成SpikingJelly多GPU训练环境搭建与测试，可直接承接大规模SNN训推任务。</a:t>
             </a:r>
           </a:p>
           <a:p>
-            <a:pPr>
-              <a:spcAft>
-                <a:spcPts val="700"/>
-              </a:spcAft>
-              <a:defRPr sz="1400">
-                <a:solidFill>
-                  <a:srgbClr val="222D3E"/>
-                </a:solidFill>
-                <a:latin typeface="Noto Sans CJK SC"/>
-              </a:defRPr>
-            </a:pPr>
-            <a:r>
-              <a:rPr>
-                <a:solidFill>
-                  <a:srgbClr val="222D3E"/>
-                </a:solidFill>
-              </a:rPr>
+            <a:r>
               <a:t>落地方向：用SpikingJelly训练栈承接大规模SNN实验，直接复用到课题组现有项目流程。</a:t>
             </a:r>
           </a:p>
           <a:p>
-            <a:pPr>
-              <a:spcAft>
-                <a:spcPts val="700"/>
-              </a:spcAft>
-              <a:defRPr sz="1400">
-                <a:solidFill>
-                  <a:srgbClr val="222D3E"/>
-                </a:solidFill>
-                <a:latin typeface="Noto Sans CJK SC"/>
-              </a:defRPr>
-            </a:pPr>
-            <a:r>
-              <a:rPr>
-                <a:solidFill>
-                  <a:srgbClr val="222D3E"/>
-                </a:solidFill>
-              </a:rPr>
+            <a:r>
               <a:t>可按“模型-数据-指标-结论-复现路径”五元组现场展开。</a:t>
             </a:r>
           </a:p>
@@ -14200,14 +12960,6 @@
           </a:bodyPr>
           <a:lstStyle/>
           <a:p>
-            <a:pPr algn="ctr">
-              <a:defRPr sz="1000" b="0">
-                <a:solidFill>
-                  <a:srgbClr val="606C7D"/>
-                </a:solidFill>
-                <a:latin typeface="Noto Sans CJK SC"/>
-              </a:defRPr>
-            </a:pPr>
             <a:r>
               <a:t>Aggregated Pareto for quick Q&amp;A</a:t>
             </a:r>
@@ -14326,14 +13078,6 @@
           </a:bodyPr>
           <a:lstStyle/>
           <a:p>
-            <a:pPr algn="ctr">
-              <a:defRPr sz="1000" b="1">
-                <a:solidFill>
-                  <a:srgbClr val="FFFFFF"/>
-                </a:solidFill>
-                <a:latin typeface="Noto Sans CJK SC"/>
-              </a:defRPr>
-            </a:pPr>
             <a:r>
               <a:t>Key Takeaway</a:t>
             </a:r>
@@ -14362,14 +13106,6 @@
           </a:bodyPr>
           <a:lstStyle/>
           <a:p>
-            <a:pPr algn="l">
-              <a:defRPr sz="1400" b="0">
-                <a:solidFill>
-                  <a:srgbClr val="FFFFFF"/>
-                </a:solidFill>
-                <a:latin typeface="Noto Sans CJK SC"/>
-              </a:defRPr>
-            </a:pPr>
             <a:r>
               <a:t>备用页用于回答统计显著性、复现路径与短板解释，不参与正式主讲计时。</a:t>
             </a:r>
@@ -14551,14 +13287,6 @@
           </a:bodyPr>
           <a:lstStyle/>
           <a:p>
-            <a:pPr algn="l">
-              <a:defRPr sz="2400" b="1">
-                <a:solidFill>
-                  <a:srgbClr val="FFFFFF"/>
-                </a:solidFill>
-                <a:latin typeface="Noto Serif CJK SC"/>
-              </a:defRPr>
-            </a:pPr>
             <a:r>
               <a:t>备用页B：核心参考文献</a:t>
             </a:r>
@@ -14587,16 +13315,8 @@
           </a:bodyPr>
           <a:lstStyle/>
           <a:p>
-            <a:pPr algn="r">
-              <a:defRPr sz="1100" b="0">
-                <a:solidFill>
-                  <a:srgbClr val="E2E7ED"/>
-                </a:solidFill>
-                <a:latin typeface="Noto Sans CJK SC"/>
-              </a:defRPr>
-            </a:pPr>
-            <a:r>
-              <a:t>Backup references</a:t>
+            <a:r>
+              <a:t>参考文献备用</a:t>
             </a:r>
           </a:p>
         </p:txBody>
@@ -14668,14 +13388,6 @@
           </a:bodyPr>
           <a:lstStyle/>
           <a:p>
-            <a:pPr algn="l">
-              <a:defRPr sz="1000" b="0">
-                <a:solidFill>
-                  <a:srgbClr val="606C7D"/>
-                </a:solidFill>
-                <a:latin typeface="Noto Sans CJK SC"/>
-              </a:defRPr>
-            </a:pPr>
             <a:r>
               <a:t>詹绍基 | 面试汇报</a:t>
             </a:r>
@@ -14704,14 +13416,6 @@
           </a:bodyPr>
           <a:lstStyle/>
           <a:p>
-            <a:pPr algn="r">
-              <a:defRPr sz="1100" b="1">
-                <a:solidFill>
-                  <a:srgbClr val="15253F"/>
-                </a:solidFill>
-                <a:latin typeface="Noto Sans CJK SC"/>
-              </a:defRPr>
-            </a:pPr>
             <a:r>
               <a:t>17</a:t>
             </a:r>
@@ -14785,14 +13489,6 @@
           </a:bodyPr>
           <a:lstStyle/>
           <a:p>
-            <a:pPr algn="ctr">
-              <a:defRPr sz="900" b="0">
-                <a:solidFill>
-                  <a:srgbClr val="606C7D"/>
-                </a:solidFill>
-                <a:latin typeface="Noto Sans CJK SC"/>
-              </a:defRPr>
-            </a:pPr>
             <a:r>
               <a:t>开场定位</a:t>
             </a:r>
@@ -14866,14 +13562,6 @@
           </a:bodyPr>
           <a:lstStyle/>
           <a:p>
-            <a:pPr algn="ctr">
-              <a:defRPr sz="900" b="0">
-                <a:solidFill>
-                  <a:srgbClr val="606C7D"/>
-                </a:solidFill>
-                <a:latin typeface="Noto Sans CJK SC"/>
-              </a:defRPr>
-            </a:pPr>
             <a:r>
               <a:t>能力证明</a:t>
             </a:r>
@@ -14947,14 +13635,6 @@
           </a:bodyPr>
           <a:lstStyle/>
           <a:p>
-            <a:pPr algn="ctr">
-              <a:defRPr sz="900" b="0">
-                <a:solidFill>
-                  <a:srgbClr val="606C7D"/>
-                </a:solidFill>
-                <a:latin typeface="Noto Sans CJK SC"/>
-              </a:defRPr>
-            </a:pPr>
             <a:r>
               <a:t>对接规划</a:t>
             </a:r>
@@ -15028,14 +13708,6 @@
           </a:bodyPr>
           <a:lstStyle/>
           <a:p>
-            <a:pPr algn="ctr">
-              <a:defRPr sz="900" b="1">
-                <a:solidFill>
-                  <a:srgbClr val="FFFFFF"/>
-                </a:solidFill>
-                <a:latin typeface="Noto Sans CJK SC"/>
-              </a:defRPr>
-            </a:pPr>
             <a:r>
               <a:t>总结备用</a:t>
             </a:r>
@@ -15109,128 +13781,32 @@
           </a:bodyPr>
           <a:lstStyle/>
           <a:p>
-            <a:pPr>
-              <a:spcAft>
-                <a:spcPts val="700"/>
-              </a:spcAft>
-              <a:defRPr sz="1400">
-                <a:solidFill>
-                  <a:srgbClr val="222D3E"/>
-                </a:solidFill>
-                <a:latin typeface="Noto Sans CJK SC"/>
-              </a:defRPr>
-            </a:pPr>
-            <a:r>
-              <a:rPr>
-                <a:solidFill>
-                  <a:srgbClr val="222D3E"/>
-                </a:solidFill>
-              </a:rPr>
+            <a:r>
               <a:t>[Lab] SpiLiFormer, ICCV 2025；Morphology Evolution, IEEE TEVC 2025。</a:t>
             </a:r>
           </a:p>
           <a:p>
-            <a:pPr>
-              <a:spcAft>
-                <a:spcPts val="700"/>
-              </a:spcAft>
-              <a:defRPr sz="1400">
-                <a:solidFill>
-                  <a:srgbClr val="222D3E"/>
-                </a:solidFill>
-                <a:latin typeface="Noto Sans CJK SC"/>
-              </a:defRPr>
-            </a:pPr>
-            <a:r>
-              <a:rPr>
-                <a:solidFill>
-                  <a:srgbClr val="222D3E"/>
-                </a:solidFill>
-              </a:rPr>
+            <a:r>
               <a:t>[Lab] Federated many-task Bayesian optimization, IEEE TEVC 2024。</a:t>
             </a:r>
           </a:p>
           <a:p>
-            <a:pPr>
-              <a:spcAft>
-                <a:spcPts val="700"/>
-              </a:spcAft>
-              <a:defRPr sz="1400">
-                <a:solidFill>
-                  <a:srgbClr val="222D3E"/>
-                </a:solidFill>
-                <a:latin typeface="Noto Sans CJK SC"/>
-              </a:defRPr>
-            </a:pPr>
-            <a:r>
-              <a:rPr>
-                <a:solidFill>
-                  <a:srgbClr val="222D3E"/>
-                </a:solidFill>
-              </a:rPr>
+            <a:r>
               <a:t>[Lab] DP-FSAEA, IEEE TEVC 2024；Post-LLM roadmap, Engineering 2024。</a:t>
             </a:r>
           </a:p>
           <a:p>
-            <a:pPr>
-              <a:spcAft>
-                <a:spcPts val="700"/>
-              </a:spcAft>
-              <a:defRPr sz="1400">
-                <a:solidFill>
-                  <a:srgbClr val="222D3E"/>
-                </a:solidFill>
-                <a:latin typeface="Noto Sans CJK SC"/>
-              </a:defRPr>
-            </a:pPr>
-            <a:r>
-              <a:rPr>
-                <a:solidFill>
-                  <a:srgbClr val="222D3E"/>
-                </a:solidFill>
-              </a:rPr>
+            <a:r>
               <a:t>[Method] LeCun, A Path Towards Autonomous Machine Intelligence, 2022。</a:t>
             </a:r>
           </a:p>
           <a:p>
-            <a:pPr>
-              <a:spcAft>
-                <a:spcPts val="700"/>
-              </a:spcAft>
-              <a:defRPr sz="1400">
-                <a:solidFill>
-                  <a:srgbClr val="222D3E"/>
-                </a:solidFill>
-                <a:latin typeface="Noto Sans CJK SC"/>
-              </a:defRPr>
-            </a:pPr>
-            <a:r>
-              <a:rPr>
-                <a:solidFill>
-                  <a:srgbClr val="222D3E"/>
-                </a:solidFill>
-              </a:rPr>
+            <a:r>
               <a:t>[Method] Sutton, The Bitter Lesson, 2019。</a:t>
             </a:r>
           </a:p>
           <a:p>
-            <a:pPr>
-              <a:spcAft>
-                <a:spcPts val="700"/>
-              </a:spcAft>
-              <a:defRPr sz="1400">
-                <a:solidFill>
-                  <a:srgbClr val="222D3E"/>
-                </a:solidFill>
-                <a:latin typeface="Noto Sans CJK SC"/>
-              </a:defRPr>
-            </a:pPr>
-            <a:r>
-              <a:rPr>
-                <a:solidFill>
-                  <a:srgbClr val="222D3E"/>
-                </a:solidFill>
-              </a:rPr>
+            <a:r>
               <a:t>[Mine] EmbodiedSNNPrototype / Neuro-Symbiosis / MedSparseSNN / PrivEnergyBench 实验报告。</a:t>
             </a:r>
           </a:p>
@@ -15348,14 +13924,6 @@
           </a:bodyPr>
           <a:lstStyle/>
           <a:p>
-            <a:pPr algn="ctr">
-              <a:defRPr sz="1000" b="1">
-                <a:solidFill>
-                  <a:srgbClr val="FFFFFF"/>
-                </a:solidFill>
-                <a:latin typeface="Noto Sans CJK SC"/>
-              </a:defRPr>
-            </a:pPr>
             <a:r>
               <a:t>Key Takeaway</a:t>
             </a:r>
@@ -15384,14 +13952,6 @@
           </a:bodyPr>
           <a:lstStyle/>
           <a:p>
-            <a:pPr algn="l">
-              <a:defRPr sz="1400" b="0">
-                <a:solidFill>
-                  <a:srgbClr val="FFFFFF"/>
-                </a:solidFill>
-                <a:latin typeface="Noto Sans CJK SC"/>
-              </a:defRPr>
-            </a:pPr>
             <a:r>
               <a:t>主讲仅引用3个关键对接点，完整文献放在备用页供评委追问时展开。</a:t>
             </a:r>
@@ -15573,14 +14133,6 @@
           </a:bodyPr>
           <a:lstStyle/>
           <a:p>
-            <a:pPr algn="l">
-              <a:defRPr sz="2400" b="1">
-                <a:solidFill>
-                  <a:srgbClr val="FFFFFF"/>
-                </a:solidFill>
-                <a:latin typeface="Noto Serif CJK SC"/>
-              </a:defRPr>
-            </a:pPr>
             <a:r>
               <a:t>备用页C：博士阶段拟研究方向</a:t>
             </a:r>
@@ -15609,16 +14161,8 @@
           </a:bodyPr>
           <a:lstStyle/>
           <a:p>
-            <a:pPr algn="r">
-              <a:defRPr sz="1100" b="0">
-                <a:solidFill>
-                  <a:srgbClr val="E2E7ED"/>
-                </a:solidFill>
-                <a:latin typeface="Noto Sans CJK SC"/>
-              </a:defRPr>
-            </a:pPr>
-            <a:r>
-              <a:t>Backup for PhD-plan questions</a:t>
+            <a:r>
+              <a:t>博士规划备用</a:t>
             </a:r>
           </a:p>
         </p:txBody>
@@ -15690,14 +14234,6 @@
           </a:bodyPr>
           <a:lstStyle/>
           <a:p>
-            <a:pPr algn="l">
-              <a:defRPr sz="1000" b="0">
-                <a:solidFill>
-                  <a:srgbClr val="606C7D"/>
-                </a:solidFill>
-                <a:latin typeface="Noto Sans CJK SC"/>
-              </a:defRPr>
-            </a:pPr>
             <a:r>
               <a:t>詹绍基 | 面试汇报</a:t>
             </a:r>
@@ -15726,14 +14262,6 @@
           </a:bodyPr>
           <a:lstStyle/>
           <a:p>
-            <a:pPr algn="r">
-              <a:defRPr sz="1100" b="1">
-                <a:solidFill>
-                  <a:srgbClr val="15253F"/>
-                </a:solidFill>
-                <a:latin typeface="Noto Sans CJK SC"/>
-              </a:defRPr>
-            </a:pPr>
             <a:r>
               <a:t>18</a:t>
             </a:r>
@@ -15807,14 +14335,6 @@
           </a:bodyPr>
           <a:lstStyle/>
           <a:p>
-            <a:pPr algn="ctr">
-              <a:defRPr sz="900" b="0">
-                <a:solidFill>
-                  <a:srgbClr val="606C7D"/>
-                </a:solidFill>
-                <a:latin typeface="Noto Sans CJK SC"/>
-              </a:defRPr>
-            </a:pPr>
             <a:r>
               <a:t>开场定位</a:t>
             </a:r>
@@ -15888,14 +14408,6 @@
           </a:bodyPr>
           <a:lstStyle/>
           <a:p>
-            <a:pPr algn="ctr">
-              <a:defRPr sz="900" b="0">
-                <a:solidFill>
-                  <a:srgbClr val="606C7D"/>
-                </a:solidFill>
-                <a:latin typeface="Noto Sans CJK SC"/>
-              </a:defRPr>
-            </a:pPr>
             <a:r>
               <a:t>能力证明</a:t>
             </a:r>
@@ -15969,14 +14481,6 @@
           </a:bodyPr>
           <a:lstStyle/>
           <a:p>
-            <a:pPr algn="ctr">
-              <a:defRPr sz="900" b="0">
-                <a:solidFill>
-                  <a:srgbClr val="606C7D"/>
-                </a:solidFill>
-                <a:latin typeface="Noto Sans CJK SC"/>
-              </a:defRPr>
-            </a:pPr>
             <a:r>
               <a:t>对接规划</a:t>
             </a:r>
@@ -16050,14 +14554,6 @@
           </a:bodyPr>
           <a:lstStyle/>
           <a:p>
-            <a:pPr algn="ctr">
-              <a:defRPr sz="900" b="1">
-                <a:solidFill>
-                  <a:srgbClr val="FFFFFF"/>
-                </a:solidFill>
-                <a:latin typeface="Noto Sans CJK SC"/>
-              </a:defRPr>
-            </a:pPr>
             <a:r>
               <a:t>总结备用</a:t>
             </a:r>
@@ -16221,14 +14717,6 @@
           </a:bodyPr>
           <a:lstStyle/>
           <a:p>
-            <a:pPr algn="l">
-              <a:defRPr sz="1600" b="1">
-                <a:solidFill>
-                  <a:srgbClr val="222D3E"/>
-                </a:solidFill>
-                <a:latin typeface="Noto Sans CJK SC"/>
-              </a:defRPr>
-            </a:pPr>
             <a:r>
               <a:t>方向1</a:t>
             </a:r>
@@ -16257,14 +14745,6 @@
           </a:bodyPr>
           <a:lstStyle/>
           <a:p>
-            <a:pPr algn="l">
-              <a:defRPr sz="1300" b="0">
-                <a:solidFill>
-                  <a:srgbClr val="606C7D"/>
-                </a:solidFill>
-                <a:latin typeface="Noto Sans CJK SC"/>
-              </a:defRPr>
-            </a:pPr>
             <a:r>
               <a:t>大规模脉冲神经网络</a:t>
             </a:r>
@@ -16387,14 +14867,6 @@
           </a:bodyPr>
           <a:lstStyle/>
           <a:p>
-            <a:pPr algn="l">
-              <a:defRPr sz="1600" b="1">
-                <a:solidFill>
-                  <a:srgbClr val="222D3E"/>
-                </a:solidFill>
-                <a:latin typeface="Noto Sans CJK SC"/>
-              </a:defRPr>
-            </a:pPr>
             <a:r>
               <a:t>方向2</a:t>
             </a:r>
@@ -16423,14 +14895,6 @@
           </a:bodyPr>
           <a:lstStyle/>
           <a:p>
-            <a:pPr algn="l">
-              <a:defRPr sz="1300" b="0">
-                <a:solidFill>
-                  <a:srgbClr val="606C7D"/>
-                </a:solidFill>
-                <a:latin typeface="Noto Sans CJK SC"/>
-              </a:defRPr>
-            </a:pPr>
             <a:r>
               <a:t>世界模型赋能</a:t>
             </a:r>
@@ -16553,14 +15017,6 @@
           </a:bodyPr>
           <a:lstStyle/>
           <a:p>
-            <a:pPr algn="l">
-              <a:defRPr sz="1600" b="1">
-                <a:solidFill>
-                  <a:srgbClr val="222D3E"/>
-                </a:solidFill>
-                <a:latin typeface="Noto Sans CJK SC"/>
-              </a:defRPr>
-            </a:pPr>
             <a:r>
               <a:t>方向3</a:t>
             </a:r>
@@ -16589,14 +15045,6 @@
           </a:bodyPr>
           <a:lstStyle/>
           <a:p>
-            <a:pPr algn="l">
-              <a:defRPr sz="1300" b="0">
-                <a:solidFill>
-                  <a:srgbClr val="606C7D"/>
-                </a:solidFill>
-                <a:latin typeface="Noto Sans CJK SC"/>
-              </a:defRPr>
-            </a:pPr>
             <a:r>
               <a:t>可信约束下大规模SNN</a:t>
             </a:r>
@@ -16674,14 +15122,6 @@
           </a:bodyPr>
           <a:lstStyle/>
           <a:p>
-            <a:pPr algn="l">
-              <a:defRPr sz="1600" b="1">
-                <a:solidFill>
-                  <a:srgbClr val="222D3E"/>
-                </a:solidFill>
-                <a:latin typeface="Noto Sans CJK SC"/>
-              </a:defRPr>
-            </a:pPr>
             <a:r>
               <a:t>衔接优势</a:t>
             </a:r>
@@ -16710,14 +15150,6 @@
           </a:bodyPr>
           <a:lstStyle/>
           <a:p>
-            <a:pPr algn="l">
-              <a:defRPr sz="1500" b="0">
-                <a:solidFill>
-                  <a:srgbClr val="222D3E"/>
-                </a:solidFill>
-                <a:latin typeface="Noto Sans CJK SC"/>
-              </a:defRPr>
-            </a:pPr>
             <a:r>
               <a:t>以上方向全部基于科研助理阶段工作积累，可无缝衔接、避免重复投入、快速形成博士阶段成果。</a:t>
             </a:r>
@@ -16746,14 +15178,6 @@
           </a:bodyPr>
           <a:lstStyle/>
           <a:p>
-            <a:pPr algn="l">
-              <a:defRPr sz="1600" b="1">
-                <a:solidFill>
-                  <a:srgbClr val="222D3E"/>
-                </a:solidFill>
-                <a:latin typeface="Noto Sans CJK SC"/>
-              </a:defRPr>
-            </a:pPr>
             <a:r>
               <a:t>预期价值</a:t>
             </a:r>
@@ -16782,14 +15206,6 @@
           </a:bodyPr>
           <a:lstStyle/>
           <a:p>
-            <a:pPr algn="l">
-              <a:defRPr sz="1500" b="0">
-                <a:solidFill>
-                  <a:srgbClr val="222D3E"/>
-                </a:solidFill>
-                <a:latin typeface="Noto Sans CJK SC"/>
-              </a:defRPr>
-            </a:pPr>
             <a:r>
               <a:t>博士阶段研究将反向拓展课题组研究边界，与课题组形成长期协同。</a:t>
             </a:r>
@@ -16908,14 +15324,6 @@
           </a:bodyPr>
           <a:lstStyle/>
           <a:p>
-            <a:pPr algn="ctr">
-              <a:defRPr sz="1000" b="1">
-                <a:solidFill>
-                  <a:srgbClr val="FFFFFF"/>
-                </a:solidFill>
-                <a:latin typeface="Noto Sans CJK SC"/>
-              </a:defRPr>
-            </a:pPr>
             <a:r>
               <a:t>Key Takeaway</a:t>
             </a:r>
@@ -16944,14 +15352,6 @@
           </a:bodyPr>
           <a:lstStyle/>
           <a:p>
-            <a:pPr algn="l">
-              <a:defRPr sz="1400" b="0">
-                <a:solidFill>
-                  <a:srgbClr val="FFFFFF"/>
-                </a:solidFill>
-                <a:latin typeface="Noto Sans CJK SC"/>
-              </a:defRPr>
-            </a:pPr>
             <a:r>
               <a:t>博士规划完全对齐课题组三大主线，科研助理阶段投入可直接转化为长期共同产出。</a:t>
             </a:r>
@@ -17133,14 +15533,6 @@
           </a:bodyPr>
           <a:lstStyle/>
           <a:p>
-            <a:pPr algn="l">
-              <a:defRPr sz="2400" b="1">
-                <a:solidFill>
-                  <a:srgbClr val="FFFFFF"/>
-                </a:solidFill>
-                <a:latin typeface="Noto Serif CJK SC"/>
-              </a:defRPr>
-            </a:pPr>
             <a:r>
               <a:t>2. 个人核心定位与跨学科优势</a:t>
             </a:r>
@@ -17169,16 +15561,8 @@
           </a:bodyPr>
           <a:lstStyle/>
           <a:p>
-            <a:pPr algn="r">
-              <a:defRPr sz="1100" b="0">
-                <a:solidFill>
-                  <a:srgbClr val="E2E7ED"/>
-                </a:solidFill>
-                <a:latin typeface="Noto Sans CJK SC"/>
-              </a:defRPr>
-            </a:pPr>
-            <a:r>
-              <a:t>Cross-disciplinary value</a:t>
+            <a:r>
+              <a:t>跨学科能力定位</a:t>
             </a:r>
           </a:p>
         </p:txBody>
@@ -17250,14 +15634,6 @@
           </a:bodyPr>
           <a:lstStyle/>
           <a:p>
-            <a:pPr algn="l">
-              <a:defRPr sz="1000" b="0">
-                <a:solidFill>
-                  <a:srgbClr val="606C7D"/>
-                </a:solidFill>
-                <a:latin typeface="Noto Sans CJK SC"/>
-              </a:defRPr>
-            </a:pPr>
             <a:r>
               <a:t>詹绍基 | 面试汇报</a:t>
             </a:r>
@@ -17286,14 +15662,6 @@
           </a:bodyPr>
           <a:lstStyle/>
           <a:p>
-            <a:pPr algn="r">
-              <a:defRPr sz="1100" b="1">
-                <a:solidFill>
-                  <a:srgbClr val="15253F"/>
-                </a:solidFill>
-                <a:latin typeface="Noto Sans CJK SC"/>
-              </a:defRPr>
-            </a:pPr>
             <a:r>
               <a:t>02</a:t>
             </a:r>
@@ -17367,14 +15735,6 @@
           </a:bodyPr>
           <a:lstStyle/>
           <a:p>
-            <a:pPr algn="ctr">
-              <a:defRPr sz="900" b="1">
-                <a:solidFill>
-                  <a:srgbClr val="FFFFFF"/>
-                </a:solidFill>
-                <a:latin typeface="Noto Sans CJK SC"/>
-              </a:defRPr>
-            </a:pPr>
             <a:r>
               <a:t>开场定位</a:t>
             </a:r>
@@ -17448,14 +15808,6 @@
           </a:bodyPr>
           <a:lstStyle/>
           <a:p>
-            <a:pPr algn="ctr">
-              <a:defRPr sz="900" b="0">
-                <a:solidFill>
-                  <a:srgbClr val="606C7D"/>
-                </a:solidFill>
-                <a:latin typeface="Noto Sans CJK SC"/>
-              </a:defRPr>
-            </a:pPr>
             <a:r>
               <a:t>能力证明</a:t>
             </a:r>
@@ -17529,14 +15881,6 @@
           </a:bodyPr>
           <a:lstStyle/>
           <a:p>
-            <a:pPr algn="ctr">
-              <a:defRPr sz="900" b="0">
-                <a:solidFill>
-                  <a:srgbClr val="606C7D"/>
-                </a:solidFill>
-                <a:latin typeface="Noto Sans CJK SC"/>
-              </a:defRPr>
-            </a:pPr>
             <a:r>
               <a:t>对接规划</a:t>
             </a:r>
@@ -17610,14 +15954,6 @@
           </a:bodyPr>
           <a:lstStyle/>
           <a:p>
-            <a:pPr algn="ctr">
-              <a:defRPr sz="900" b="0">
-                <a:solidFill>
-                  <a:srgbClr val="606C7D"/>
-                </a:solidFill>
-                <a:latin typeface="Noto Sans CJK SC"/>
-              </a:defRPr>
-            </a:pPr>
             <a:r>
               <a:t>总结备用</a:t>
             </a:r>
@@ -17691,14 +16027,6 @@
           </a:bodyPr>
           <a:lstStyle/>
           <a:p>
-            <a:pPr algn="ctr">
-              <a:defRPr sz="1600" b="0">
-                <a:solidFill>
-                  <a:srgbClr val="222D3E"/>
-                </a:solidFill>
-                <a:latin typeface="Noto Sans CJK SC"/>
-              </a:defRPr>
-            </a:pPr>
             <a:r>
               <a:t>苏州大学 医学影像学（辅修计算机） 2019.09-2024.06   |   北京师范大学 法学（二学位） 2024.09-2026.07</a:t>
             </a:r>
@@ -17727,14 +16055,6 @@
           </a:bodyPr>
           <a:lstStyle/>
           <a:p>
-            <a:pPr algn="ctr">
-              <a:defRPr sz="1100" b="0">
-                <a:solidFill>
-                  <a:srgbClr val="606C7D"/>
-                </a:solidFill>
-                <a:latin typeface="Noto Sans CJK SC"/>
-              </a:defRPr>
-            </a:pPr>
             <a:r>
               <a:t>术语说明：脉冲神经网络（Spiking Neural Network, SNN）</a:t>
             </a:r>
@@ -17853,14 +16173,6 @@
           </a:bodyPr>
           <a:lstStyle/>
           <a:p>
-            <a:pPr algn="l">
-              <a:defRPr sz="1600" b="1">
-                <a:solidFill>
-                  <a:srgbClr val="222D3E"/>
-                </a:solidFill>
-                <a:latin typeface="Noto Sans CJK SC"/>
-              </a:defRPr>
-            </a:pPr>
             <a:r>
               <a:t>计算机算法能力（核心）</a:t>
             </a:r>
@@ -17889,14 +16201,6 @@
           </a:bodyPr>
           <a:lstStyle/>
           <a:p>
-            <a:pPr algn="l">
-              <a:defRPr sz="1300" b="0">
-                <a:solidFill>
-                  <a:srgbClr val="606C7D"/>
-                </a:solidFill>
-                <a:latin typeface="Noto Sans CJK SC"/>
-              </a:defRPr>
-            </a:pPr>
             <a:r>
               <a:t>精通Python，熟练掌握SpikingJelly（主力）/SNNtorch/PyTorch</a:t>
             </a:r>
@@ -18023,14 +16327,6 @@
           </a:bodyPr>
           <a:lstStyle/>
           <a:p>
-            <a:pPr algn="l">
-              <a:defRPr sz="1600" b="1">
-                <a:solidFill>
-                  <a:srgbClr val="222D3E"/>
-                </a:solidFill>
-                <a:latin typeface="Noto Sans CJK SC"/>
-              </a:defRPr>
-            </a:pPr>
             <a:r>
               <a:t>医学临床思维（辅助）</a:t>
             </a:r>
@@ -18059,14 +16355,6 @@
           </a:bodyPr>
           <a:lstStyle/>
           <a:p>
-            <a:pPr algn="l">
-              <a:defRPr sz="1300" b="0">
-                <a:solidFill>
-                  <a:srgbClr val="606C7D"/>
-                </a:solidFill>
-                <a:latin typeface="Noto Sans CJK SC"/>
-              </a:defRPr>
-            </a:pPr>
             <a:r>
               <a:t>锚定真实场景硬约束</a:t>
             </a:r>
@@ -18193,14 +16481,6 @@
           </a:bodyPr>
           <a:lstStyle/>
           <a:p>
-            <a:pPr algn="l">
-              <a:defRPr sz="1600" b="1">
-                <a:solidFill>
-                  <a:srgbClr val="222D3E"/>
-                </a:solidFill>
-                <a:latin typeface="Noto Sans CJK SC"/>
-              </a:defRPr>
-            </a:pPr>
             <a:r>
               <a:t>法学合规视角（辅助）</a:t>
             </a:r>
@@ -18229,14 +16509,6 @@
           </a:bodyPr>
           <a:lstStyle/>
           <a:p>
-            <a:pPr algn="l">
-              <a:defRPr sz="1300" b="0">
-                <a:solidFill>
-                  <a:srgbClr val="606C7D"/>
-                </a:solidFill>
-                <a:latin typeface="Noto Sans CJK SC"/>
-              </a:defRPr>
-            </a:pPr>
             <a:r>
               <a:t>把隐私与问责前置设计</a:t>
             </a:r>
@@ -18273,14 +16545,6 @@
           </a:bodyPr>
           <a:lstStyle/>
           <a:p>
-            <a:pPr algn="ctr">
-              <a:defRPr sz="1400" b="0">
-                <a:solidFill>
-                  <a:srgbClr val="606C7D"/>
-                </a:solidFill>
-                <a:latin typeface="Noto Sans CJK SC"/>
-              </a:defRPr>
-            </a:pPr>
             <a:r>
               <a:t>CET-6 初考595分，可无障碍阅读顶刊顶会文献并参与英文写作，支撑团队论文产出与博士阶段学术输出。</a:t>
             </a:r>
@@ -18399,14 +16663,6 @@
           </a:bodyPr>
           <a:lstStyle/>
           <a:p>
-            <a:pPr algn="ctr">
-              <a:defRPr sz="1000" b="1">
-                <a:solidFill>
-                  <a:srgbClr val="FFFFFF"/>
-                </a:solidFill>
-                <a:latin typeface="Noto Sans CJK SC"/>
-              </a:defRPr>
-            </a:pPr>
             <a:r>
               <a:t>Key Takeaway</a:t>
             </a:r>
@@ -18435,14 +16691,6 @@
           </a:bodyPr>
           <a:lstStyle/>
           <a:p>
-            <a:pPr algn="l">
-              <a:defRPr sz="1400" b="0">
-                <a:solidFill>
-                  <a:srgbClr val="FFFFFF"/>
-                </a:solidFill>
-                <a:latin typeface="Noto Sans CJK SC"/>
-              </a:defRPr>
-            </a:pPr>
             <a:r>
               <a:t>以计算机与SNN硬实力为主轴，医学与法学为辅助优势，能直接匹配课题组大规模SNN任务需求。</a:t>
             </a:r>
@@ -18624,14 +16872,6 @@
           </a:bodyPr>
           <a:lstStyle/>
           <a:p>
-            <a:pPr algn="l">
-              <a:defRPr sz="2400" b="1">
-                <a:solidFill>
-                  <a:srgbClr val="FFFFFF"/>
-                </a:solidFill>
-                <a:latin typeface="Noto Serif CJK SC"/>
-              </a:defRPr>
-            </a:pPr>
             <a:r>
               <a:t>3. 核心研究主线与项目闭环</a:t>
             </a:r>
@@ -18660,16 +16900,8 @@
           </a:bodyPr>
           <a:lstStyle/>
           <a:p>
-            <a:pPr algn="r">
-              <a:defRPr sz="1100" b="0">
-                <a:solidFill>
-                  <a:srgbClr val="E2E7ED"/>
-                </a:solidFill>
-                <a:latin typeface="Noto Sans CJK SC"/>
-              </a:defRPr>
-            </a:pPr>
-            <a:r>
-              <a:t>Large-scale SNN: mechanism -&gt; architecture -&gt; deployment -&gt; benchmark</a:t>
+            <a:r>
+              <a:t>研究主线：机制-架构-落地-评测</a:t>
             </a:r>
           </a:p>
         </p:txBody>
@@ -18741,14 +16973,6 @@
           </a:bodyPr>
           <a:lstStyle/>
           <a:p>
-            <a:pPr algn="l">
-              <a:defRPr sz="1000" b="0">
-                <a:solidFill>
-                  <a:srgbClr val="606C7D"/>
-                </a:solidFill>
-                <a:latin typeface="Noto Sans CJK SC"/>
-              </a:defRPr>
-            </a:pPr>
             <a:r>
               <a:t>詹绍基 | 面试汇报</a:t>
             </a:r>
@@ -18777,14 +17001,6 @@
           </a:bodyPr>
           <a:lstStyle/>
           <a:p>
-            <a:pPr algn="r">
-              <a:defRPr sz="1100" b="1">
-                <a:solidFill>
-                  <a:srgbClr val="15253F"/>
-                </a:solidFill>
-                <a:latin typeface="Noto Sans CJK SC"/>
-              </a:defRPr>
-            </a:pPr>
             <a:r>
               <a:t>03</a:t>
             </a:r>
@@ -18858,14 +17074,6 @@
           </a:bodyPr>
           <a:lstStyle/>
           <a:p>
-            <a:pPr algn="ctr">
-              <a:defRPr sz="900" b="0">
-                <a:solidFill>
-                  <a:srgbClr val="606C7D"/>
-                </a:solidFill>
-                <a:latin typeface="Noto Sans CJK SC"/>
-              </a:defRPr>
-            </a:pPr>
             <a:r>
               <a:t>开场定位</a:t>
             </a:r>
@@ -18939,14 +17147,6 @@
           </a:bodyPr>
           <a:lstStyle/>
           <a:p>
-            <a:pPr algn="ctr">
-              <a:defRPr sz="900" b="1">
-                <a:solidFill>
-                  <a:srgbClr val="FFFFFF"/>
-                </a:solidFill>
-                <a:latin typeface="Noto Sans CJK SC"/>
-              </a:defRPr>
-            </a:pPr>
             <a:r>
               <a:t>能力证明</a:t>
             </a:r>
@@ -19020,14 +17220,6 @@
           </a:bodyPr>
           <a:lstStyle/>
           <a:p>
-            <a:pPr algn="ctr">
-              <a:defRPr sz="900" b="0">
-                <a:solidFill>
-                  <a:srgbClr val="606C7D"/>
-                </a:solidFill>
-                <a:latin typeface="Noto Sans CJK SC"/>
-              </a:defRPr>
-            </a:pPr>
             <a:r>
               <a:t>对接规划</a:t>
             </a:r>
@@ -19101,14 +17293,6 @@
           </a:bodyPr>
           <a:lstStyle/>
           <a:p>
-            <a:pPr algn="ctr">
-              <a:defRPr sz="900" b="0">
-                <a:solidFill>
-                  <a:srgbClr val="606C7D"/>
-                </a:solidFill>
-                <a:latin typeface="Noto Sans CJK SC"/>
-              </a:defRPr>
-            </a:pPr>
             <a:r>
               <a:t>总结备用</a:t>
             </a:r>
@@ -19182,14 +17366,6 @@
           </a:bodyPr>
           <a:lstStyle/>
           <a:p>
-            <a:pPr algn="l">
-              <a:defRPr sz="1600" b="0">
-                <a:solidFill>
-                  <a:srgbClr val="222D3E"/>
-                </a:solidFill>
-                <a:latin typeface="Noto Sans CJK SC"/>
-              </a:defRPr>
-            </a:pPr>
             <a:r>
               <a:t>领域痛点：当前SNN研究多聚焦小体量模型，缺乏面向大规模SNN的训练优化、能效-性能协同与可解释分析框架，同时忽略隐私与真实落地约束。</a:t>
             </a:r>
@@ -19308,14 +17484,6 @@
           </a:bodyPr>
           <a:lstStyle/>
           <a:p>
-            <a:pPr algn="l">
-              <a:defRPr sz="1600" b="1">
-                <a:solidFill>
-                  <a:srgbClr val="222D3E"/>
-                </a:solidFill>
-                <a:latin typeface="Noto Sans CJK SC"/>
-              </a:defRPr>
-            </a:pPr>
             <a:r>
               <a:t>机制验证</a:t>
             </a:r>
@@ -19344,14 +17512,6 @@
           </a:bodyPr>
           <a:lstStyle/>
           <a:p>
-            <a:pPr algn="l">
-              <a:defRPr sz="1300" b="0">
-                <a:solidFill>
-                  <a:srgbClr val="606C7D"/>
-                </a:solidFill>
-                <a:latin typeface="Noto Sans CJK SC"/>
-              </a:defRPr>
-            </a:pPr>
             <a:r>
               <a:t>EmbodiedSNN</a:t>
             </a:r>
@@ -19474,14 +17634,6 @@
           </a:bodyPr>
           <a:lstStyle/>
           <a:p>
-            <a:pPr algn="l">
-              <a:defRPr sz="1600" b="1">
-                <a:solidFill>
-                  <a:srgbClr val="222D3E"/>
-                </a:solidFill>
-                <a:latin typeface="Noto Sans CJK SC"/>
-              </a:defRPr>
-            </a:pPr>
             <a:r>
               <a:t>架构创新</a:t>
             </a:r>
@@ -19510,14 +17662,6 @@
           </a:bodyPr>
           <a:lstStyle/>
           <a:p>
-            <a:pPr algn="l">
-              <a:defRPr sz="1300" b="0">
-                <a:solidFill>
-                  <a:srgbClr val="606C7D"/>
-                </a:solidFill>
-                <a:latin typeface="Noto Sans CJK SC"/>
-              </a:defRPr>
-            </a:pPr>
             <a:r>
               <a:t>Neuro-Symbiosis</a:t>
             </a:r>
@@ -19640,14 +17784,6 @@
           </a:bodyPr>
           <a:lstStyle/>
           <a:p>
-            <a:pPr algn="l">
-              <a:defRPr sz="1600" b="1">
-                <a:solidFill>
-                  <a:srgbClr val="222D3E"/>
-                </a:solidFill>
-                <a:latin typeface="Noto Sans CJK SC"/>
-              </a:defRPr>
-            </a:pPr>
             <a:r>
               <a:t>场景落地</a:t>
             </a:r>
@@ -19676,14 +17812,6 @@
           </a:bodyPr>
           <a:lstStyle/>
           <a:p>
-            <a:pPr algn="l">
-              <a:defRPr sz="1300" b="0">
-                <a:solidFill>
-                  <a:srgbClr val="606C7D"/>
-                </a:solidFill>
-                <a:latin typeface="Noto Sans CJK SC"/>
-              </a:defRPr>
-            </a:pPr>
             <a:r>
               <a:t>MedSparseSNN</a:t>
             </a:r>
@@ -19806,14 +17934,6 @@
           </a:bodyPr>
           <a:lstStyle/>
           <a:p>
-            <a:pPr algn="l">
-              <a:defRPr sz="1600" b="1">
-                <a:solidFill>
-                  <a:srgbClr val="222D3E"/>
-                </a:solidFill>
-                <a:latin typeface="Noto Sans CJK SC"/>
-              </a:defRPr>
-            </a:pPr>
             <a:r>
               <a:t>基础设施</a:t>
             </a:r>
@@ -19842,14 +17962,6 @@
           </a:bodyPr>
           <a:lstStyle/>
           <a:p>
-            <a:pPr algn="l">
-              <a:defRPr sz="1300" b="0">
-                <a:solidFill>
-                  <a:srgbClr val="606C7D"/>
-                </a:solidFill>
-                <a:latin typeface="Noto Sans CJK SC"/>
-              </a:defRPr>
-            </a:pPr>
             <a:r>
               <a:t>PrivEnergyBench</a:t>
             </a:r>
@@ -19972,14 +18084,6 @@
           </a:bodyPr>
           <a:lstStyle/>
           <a:p>
-            <a:pPr algn="ctr">
-              <a:defRPr sz="1000" b="1">
-                <a:solidFill>
-                  <a:srgbClr val="FFFFFF"/>
-                </a:solidFill>
-                <a:latin typeface="Noto Sans CJK SC"/>
-              </a:defRPr>
-            </a:pPr>
             <a:r>
               <a:t>Key Takeaway</a:t>
             </a:r>
@@ -20008,14 +18112,6 @@
           </a:bodyPr>
           <a:lstStyle/>
           <a:p>
-            <a:pPr algn="l">
-              <a:defRPr sz="1400" b="0">
-                <a:solidFill>
-                  <a:srgbClr val="FFFFFF"/>
-                </a:solidFill>
-                <a:latin typeface="Noto Sans CJK SC"/>
-              </a:defRPr>
-            </a:pPr>
             <a:r>
               <a:t>四项工作形成大规模SNN可扩展闭环，可直接扩展并对接课题组在训推优化与可信评测上的研究链。</a:t>
             </a:r>
@@ -20197,14 +18293,6 @@
           </a:bodyPr>
           <a:lstStyle/>
           <a:p>
-            <a:pPr algn="l">
-              <a:defRPr sz="2400" b="1">
-                <a:solidFill>
-                  <a:srgbClr val="FFFFFF"/>
-                </a:solidFill>
-                <a:latin typeface="Noto Serif CJK SC"/>
-              </a:defRPr>
-            </a:pPr>
             <a:r>
               <a:t>4. 成果1：具身SNN可塑性机制验证</a:t>
             </a:r>
@@ -20233,14 +18321,6 @@
           </a:bodyPr>
           <a:lstStyle/>
           <a:p>
-            <a:pPr algn="r">
-              <a:defRPr sz="1100" b="0">
-                <a:solidFill>
-                  <a:srgbClr val="E2E7ED"/>
-                </a:solidFill>
-                <a:latin typeface="Noto Sans CJK SC"/>
-              </a:defRPr>
-            </a:pPr>
             <a:r>
               <a:t>EmbodiedSNN</a:t>
             </a:r>
@@ -20314,14 +18394,6 @@
           </a:bodyPr>
           <a:lstStyle/>
           <a:p>
-            <a:pPr algn="l">
-              <a:defRPr sz="1000" b="0">
-                <a:solidFill>
-                  <a:srgbClr val="606C7D"/>
-                </a:solidFill>
-                <a:latin typeface="Noto Sans CJK SC"/>
-              </a:defRPr>
-            </a:pPr>
             <a:r>
               <a:t>詹绍基 | 面试汇报</a:t>
             </a:r>
@@ -20350,14 +18422,6 @@
           </a:bodyPr>
           <a:lstStyle/>
           <a:p>
-            <a:pPr algn="r">
-              <a:defRPr sz="1100" b="1">
-                <a:solidFill>
-                  <a:srgbClr val="15253F"/>
-                </a:solidFill>
-                <a:latin typeface="Noto Sans CJK SC"/>
-              </a:defRPr>
-            </a:pPr>
             <a:r>
               <a:t>04</a:t>
             </a:r>
@@ -20431,14 +18495,6 @@
           </a:bodyPr>
           <a:lstStyle/>
           <a:p>
-            <a:pPr algn="ctr">
-              <a:defRPr sz="900" b="0">
-                <a:solidFill>
-                  <a:srgbClr val="606C7D"/>
-                </a:solidFill>
-                <a:latin typeface="Noto Sans CJK SC"/>
-              </a:defRPr>
-            </a:pPr>
             <a:r>
               <a:t>开场定位</a:t>
             </a:r>
@@ -20512,14 +18568,6 @@
           </a:bodyPr>
           <a:lstStyle/>
           <a:p>
-            <a:pPr algn="ctr">
-              <a:defRPr sz="900" b="1">
-                <a:solidFill>
-                  <a:srgbClr val="FFFFFF"/>
-                </a:solidFill>
-                <a:latin typeface="Noto Sans CJK SC"/>
-              </a:defRPr>
-            </a:pPr>
             <a:r>
               <a:t>能力证明</a:t>
             </a:r>
@@ -20593,14 +18641,6 @@
           </a:bodyPr>
           <a:lstStyle/>
           <a:p>
-            <a:pPr algn="ctr">
-              <a:defRPr sz="900" b="0">
-                <a:solidFill>
-                  <a:srgbClr val="606C7D"/>
-                </a:solidFill>
-                <a:latin typeface="Noto Sans CJK SC"/>
-              </a:defRPr>
-            </a:pPr>
             <a:r>
               <a:t>对接规划</a:t>
             </a:r>
@@ -20674,14 +18714,6 @@
           </a:bodyPr>
           <a:lstStyle/>
           <a:p>
-            <a:pPr algn="ctr">
-              <a:defRPr sz="900" b="0">
-                <a:solidFill>
-                  <a:srgbClr val="606C7D"/>
-                </a:solidFill>
-                <a:latin typeface="Noto Sans CJK SC"/>
-              </a:defRPr>
-            </a:pPr>
             <a:r>
               <a:t>总结备用</a:t>
             </a:r>
@@ -20755,14 +18787,6 @@
           </a:bodyPr>
           <a:lstStyle/>
           <a:p>
-            <a:pPr algn="l">
-              <a:defRPr sz="1600" b="1">
-                <a:solidFill>
-                  <a:srgbClr val="222D3E"/>
-                </a:solidFill>
-                <a:latin typeface="Noto Sans CJK SC"/>
-              </a:defRPr>
-            </a:pPr>
             <a:r>
               <a:t>痛点</a:t>
             </a:r>
@@ -20791,14 +18815,6 @@
           </a:bodyPr>
           <a:lstStyle/>
           <a:p>
-            <a:pPr algn="l">
-              <a:defRPr sz="1500" b="0">
-                <a:solidFill>
-                  <a:srgbClr val="222D3E"/>
-                </a:solidFill>
-                <a:latin typeface="Noto Sans CJK SC"/>
-              </a:defRPr>
-            </a:pPr>
             <a:r>
               <a:t>固定权值难以在线适应，</a:t>
             </a:r>
@@ -20831,14 +18847,6 @@
           </a:bodyPr>
           <a:lstStyle/>
           <a:p>
-            <a:pPr algn="l">
-              <a:defRPr sz="1600" b="1">
-                <a:solidFill>
-                  <a:srgbClr val="222D3E"/>
-                </a:solidFill>
-                <a:latin typeface="Noto Sans CJK SC"/>
-              </a:defRPr>
-            </a:pPr>
             <a:r>
               <a:t>创新</a:t>
             </a:r>
@@ -20867,14 +18875,6 @@
           </a:bodyPr>
           <a:lstStyle/>
           <a:p>
-            <a:pPr algn="l">
-              <a:defRPr sz="1500" b="0">
-                <a:solidFill>
-                  <a:srgbClr val="222D3E"/>
-                </a:solidFill>
-                <a:latin typeface="Noto Sans CJK SC"/>
-              </a:defRPr>
-            </a:pPr>
             <a:r>
               <a:t>引入奖励调制可塑性</a:t>
             </a:r>
@@ -20907,14 +18907,6 @@
           </a:bodyPr>
           <a:lstStyle/>
           <a:p>
-            <a:pPr algn="l">
-              <a:defRPr sz="1600" b="1">
-                <a:solidFill>
-                  <a:srgbClr val="222D3E"/>
-                </a:solidFill>
-                <a:latin typeface="Noto Sans CJK SC"/>
-              </a:defRPr>
-            </a:pPr>
             <a:r>
               <a:t>证据</a:t>
             </a:r>
@@ -20943,14 +18935,6 @@
           </a:bodyPr>
           <a:lstStyle/>
           <a:p>
-            <a:pPr algn="l">
-              <a:defRPr sz="1300" b="0">
-                <a:solidFill>
-                  <a:srgbClr val="222D3E"/>
-                </a:solidFill>
-                <a:latin typeface="Noto Sans CJK SC"/>
-              </a:defRPr>
-            </a:pPr>
             <a:r>
               <a:t>plastic_readout objective_mean</a:t>
             </a:r>
@@ -21056,14 +19040,6 @@
           </a:bodyPr>
           <a:lstStyle/>
           <a:p>
-            <a:pPr algn="ctr">
-              <a:defRPr sz="1000" b="0">
-                <a:solidFill>
-                  <a:srgbClr val="606C7D"/>
-                </a:solidFill>
-                <a:latin typeface="Noto Sans CJK SC"/>
-              </a:defRPr>
-            </a:pPr>
             <a:r>
               <a:t>Fixed vs Plastic Readout Objective Comparison</a:t>
             </a:r>
@@ -21161,14 +19137,6 @@
           </a:bodyPr>
           <a:lstStyle/>
           <a:p>
-            <a:pPr algn="ctr">
-              <a:defRPr sz="1000" b="0">
-                <a:solidFill>
-                  <a:srgbClr val="606C7D"/>
-                </a:solidFill>
-                <a:latin typeface="Noto Sans CJK SC"/>
-              </a:defRPr>
-            </a:pPr>
             <a:r>
               <a:t>Reward-Energy Trade-off</a:t>
             </a:r>
@@ -21197,14 +19165,6 @@
           </a:bodyPr>
           <a:lstStyle/>
           <a:p>
-            <a:pPr algn="l">
-              <a:defRPr sz="800" b="0">
-                <a:solidFill>
-                  <a:srgbClr val="606C7D"/>
-                </a:solidFill>
-                <a:latin typeface="Noto Sans CJK SC"/>
-              </a:defRPr>
-            </a:pPr>
             <a:r>
               <a:t>Source: 本人独立完成的EmbodiedSNNPrototype项目全流程实验输出</a:t>
             </a:r>
@@ -21323,14 +19283,6 @@
           </a:bodyPr>
           <a:lstStyle/>
           <a:p>
-            <a:pPr algn="ctr">
-              <a:defRPr sz="1000" b="1">
-                <a:solidFill>
-                  <a:srgbClr val="FFFFFF"/>
-                </a:solidFill>
-                <a:latin typeface="Noto Sans CJK SC"/>
-              </a:defRPr>
-            </a:pPr>
             <a:r>
               <a:t>Key Takeaway</a:t>
             </a:r>
@@ -21359,14 +19311,6 @@
           </a:bodyPr>
           <a:lstStyle/>
           <a:p>
-            <a:pPr algn="l">
-              <a:defRPr sz="1400" b="0">
-                <a:solidFill>
-                  <a:srgbClr val="FFFFFF"/>
-                </a:solidFill>
-                <a:latin typeface="Noto Sans CJK SC"/>
-              </a:defRPr>
-            </a:pPr>
             <a:r>
               <a:t>可塑性显著提升具身智能的在线自适应能力，量化了收益 - 能耗的可优化边界，具备完整的具身 SNN 全流程实践经验，可直接支撑课题组具身 SNN 与大规模模型优化研究。</a:t>
             </a:r>
@@ -21548,14 +19492,6 @@
           </a:bodyPr>
           <a:lstStyle/>
           <a:p>
-            <a:pPr algn="l">
-              <a:defRPr sz="2400" b="1">
-                <a:solidFill>
-                  <a:srgbClr val="FFFFFF"/>
-                </a:solidFill>
-                <a:latin typeface="Noto Serif CJK SC"/>
-              </a:defRPr>
-            </a:pPr>
             <a:r>
               <a:t>5. 成果2：SNN-Transformer混合架构</a:t>
             </a:r>
@@ -21584,14 +19520,6 @@
           </a:bodyPr>
           <a:lstStyle/>
           <a:p>
-            <a:pPr algn="r">
-              <a:defRPr sz="1100" b="0">
-                <a:solidFill>
-                  <a:srgbClr val="E2E7ED"/>
-                </a:solidFill>
-                <a:latin typeface="Noto Sans CJK SC"/>
-              </a:defRPr>
-            </a:pPr>
             <a:r>
               <a:t>Neuro-Symbiosis</a:t>
             </a:r>
@@ -21665,14 +19593,6 @@
           </a:bodyPr>
           <a:lstStyle/>
           <a:p>
-            <a:pPr algn="l">
-              <a:defRPr sz="1000" b="0">
-                <a:solidFill>
-                  <a:srgbClr val="606C7D"/>
-                </a:solidFill>
-                <a:latin typeface="Noto Sans CJK SC"/>
-              </a:defRPr>
-            </a:pPr>
             <a:r>
               <a:t>詹绍基 | 面试汇报</a:t>
             </a:r>
@@ -21701,14 +19621,6 @@
           </a:bodyPr>
           <a:lstStyle/>
           <a:p>
-            <a:pPr algn="r">
-              <a:defRPr sz="1100" b="1">
-                <a:solidFill>
-                  <a:srgbClr val="15253F"/>
-                </a:solidFill>
-                <a:latin typeface="Noto Sans CJK SC"/>
-              </a:defRPr>
-            </a:pPr>
             <a:r>
               <a:t>05</a:t>
             </a:r>
@@ -21782,14 +19694,6 @@
           </a:bodyPr>
           <a:lstStyle/>
           <a:p>
-            <a:pPr algn="ctr">
-              <a:defRPr sz="900" b="0">
-                <a:solidFill>
-                  <a:srgbClr val="606C7D"/>
-                </a:solidFill>
-                <a:latin typeface="Noto Sans CJK SC"/>
-              </a:defRPr>
-            </a:pPr>
             <a:r>
               <a:t>开场定位</a:t>
             </a:r>
@@ -21863,14 +19767,6 @@
           </a:bodyPr>
           <a:lstStyle/>
           <a:p>
-            <a:pPr algn="ctr">
-              <a:defRPr sz="900" b="1">
-                <a:solidFill>
-                  <a:srgbClr val="FFFFFF"/>
-                </a:solidFill>
-                <a:latin typeface="Noto Sans CJK SC"/>
-              </a:defRPr>
-            </a:pPr>
             <a:r>
               <a:t>能力证明</a:t>
             </a:r>
@@ -21944,14 +19840,6 @@
           </a:bodyPr>
           <a:lstStyle/>
           <a:p>
-            <a:pPr algn="ctr">
-              <a:defRPr sz="900" b="0">
-                <a:solidFill>
-                  <a:srgbClr val="606C7D"/>
-                </a:solidFill>
-                <a:latin typeface="Noto Sans CJK SC"/>
-              </a:defRPr>
-            </a:pPr>
             <a:r>
               <a:t>对接规划</a:t>
             </a:r>
@@ -22025,14 +19913,6 @@
           </a:bodyPr>
           <a:lstStyle/>
           <a:p>
-            <a:pPr algn="ctr">
-              <a:defRPr sz="900" b="0">
-                <a:solidFill>
-                  <a:srgbClr val="606C7D"/>
-                </a:solidFill>
-                <a:latin typeface="Noto Sans CJK SC"/>
-              </a:defRPr>
-            </a:pPr>
             <a:r>
               <a:t>总结备用</a:t>
             </a:r>
@@ -22106,14 +19986,6 @@
           </a:bodyPr>
           <a:lstStyle/>
           <a:p>
-            <a:pPr algn="l">
-              <a:defRPr sz="1600" b="1">
-                <a:solidFill>
-                  <a:srgbClr val="222D3E"/>
-                </a:solidFill>
-                <a:latin typeface="Noto Sans CJK SC"/>
-              </a:defRPr>
-            </a:pPr>
             <a:r>
               <a:t>痛点</a:t>
             </a:r>
@@ -22142,14 +20014,6 @@
           </a:bodyPr>
           <a:lstStyle/>
           <a:p>
-            <a:pPr algn="l">
-              <a:defRPr sz="1500" b="0">
-                <a:solidFill>
-                  <a:srgbClr val="222D3E"/>
-                </a:solidFill>
-                <a:latin typeface="Noto Sans CJK SC"/>
-              </a:defRPr>
-            </a:pPr>
             <a:r>
               <a:t>单一架构难兼顾</a:t>
             </a:r>
@@ -22182,14 +20046,6 @@
           </a:bodyPr>
           <a:lstStyle/>
           <a:p>
-            <a:pPr algn="l">
-              <a:defRPr sz="1600" b="1">
-                <a:solidFill>
-                  <a:srgbClr val="222D3E"/>
-                </a:solidFill>
-                <a:latin typeface="Noto Sans CJK SC"/>
-              </a:defRPr>
-            </a:pPr>
             <a:r>
               <a:t>创新</a:t>
             </a:r>
@@ -22218,14 +20074,6 @@
           </a:bodyPr>
           <a:lstStyle/>
           <a:p>
-            <a:pPr algn="l">
-              <a:defRPr sz="1500" b="0">
-                <a:solidFill>
-                  <a:srgbClr val="222D3E"/>
-                </a:solidFill>
-                <a:latin typeface="Noto Sans CJK SC"/>
-              </a:defRPr>
-            </a:pPr>
             <a:r>
               <a:t>提出混合架构，</a:t>
             </a:r>
@@ -22258,14 +20106,6 @@
           </a:bodyPr>
           <a:lstStyle/>
           <a:p>
-            <a:pPr algn="l">
-              <a:defRPr sz="1600" b="1">
-                <a:solidFill>
-                  <a:srgbClr val="222D3E"/>
-                </a:solidFill>
-                <a:latin typeface="Noto Sans CJK SC"/>
-              </a:defRPr>
-            </a:pPr>
             <a:r>
               <a:t>证据</a:t>
             </a:r>
@@ -22294,14 +20134,6 @@
           </a:bodyPr>
           <a:lstStyle/>
           <a:p>
-            <a:pPr algn="l">
-              <a:defRPr sz="1300" b="0">
-                <a:solidFill>
-                  <a:srgbClr val="222D3E"/>
-                </a:solidFill>
-                <a:latin typeface="Noto Sans CJK SC"/>
-              </a:defRPr>
-            </a:pPr>
             <a:r>
               <a:t>hybrid: val_acc=0.9612,</a:t>
             </a:r>
@@ -22403,14 +20235,6 @@
           </a:bodyPr>
           <a:lstStyle/>
           <a:p>
-            <a:pPr algn="ctr">
-              <a:defRPr sz="1000" b="0">
-                <a:solidFill>
-                  <a:srgbClr val="606C7D"/>
-                </a:solidFill>
-                <a:latin typeface="Noto Sans CJK SC"/>
-              </a:defRPr>
-            </a:pPr>
             <a:r>
               <a:t>SNN-Transformer Pareto Comparison</a:t>
             </a:r>
@@ -22508,14 +20332,6 @@
           </a:bodyPr>
           <a:lstStyle/>
           <a:p>
-            <a:pPr algn="ctr">
-              <a:defRPr sz="1000" b="0">
-                <a:solidFill>
-                  <a:srgbClr val="606C7D"/>
-                </a:solidFill>
-                <a:latin typeface="Noto Sans CJK SC"/>
-              </a:defRPr>
-            </a:pPr>
             <a:r>
               <a:t>Coupling Landscape</a:t>
             </a:r>
@@ -22544,14 +20360,6 @@
           </a:bodyPr>
           <a:lstStyle/>
           <a:p>
-            <a:pPr algn="l">
-              <a:defRPr sz="800" b="0">
-                <a:solidFill>
-                  <a:srgbClr val="606C7D"/>
-                </a:solidFill>
-                <a:latin typeface="Noto Sans CJK SC"/>
-              </a:defRPr>
-            </a:pPr>
             <a:r>
               <a:t>Source: 本人独立完成的Neuro-Symbiosis项目全流程实验输出</a:t>
             </a:r>
@@ -22670,14 +20478,6 @@
           </a:bodyPr>
           <a:lstStyle/>
           <a:p>
-            <a:pPr algn="ctr">
-              <a:defRPr sz="1000" b="1">
-                <a:solidFill>
-                  <a:srgbClr val="FFFFFF"/>
-                </a:solidFill>
-                <a:latin typeface="Noto Sans CJK SC"/>
-              </a:defRPr>
-            </a:pPr>
             <a:r>
               <a:t>Key Takeaway</a:t>
             </a:r>
@@ -22706,14 +20506,6 @@
           </a:bodyPr>
           <a:lstStyle/>
           <a:p>
-            <a:pPr algn="l">
-              <a:defRPr sz="1400" b="0">
-                <a:solidFill>
-                  <a:srgbClr val="FFFFFF"/>
-                </a:solidFill>
-                <a:latin typeface="Noto Sans CJK SC"/>
-              </a:defRPr>
-            </a:pPr>
             <a:r>
               <a:t>混合架构可实现更优折中，耦合强度是可被搜索优化变量，可支撑课题组大规模SNN训练效率与能效提升。</a:t>
             </a:r>
@@ -22895,14 +20687,6 @@
           </a:bodyPr>
           <a:lstStyle/>
           <a:p>
-            <a:pPr algn="l">
-              <a:defRPr sz="2400" b="1">
-                <a:solidFill>
-                  <a:srgbClr val="FFFFFF"/>
-                </a:solidFill>
-                <a:latin typeface="Noto Serif CJK SC"/>
-              </a:defRPr>
-            </a:pPr>
             <a:r>
               <a:t>6. 成果3：场景验证与评测支撑</a:t>
             </a:r>
@@ -22931,14 +20715,6 @@
           </a:bodyPr>
           <a:lstStyle/>
           <a:p>
-            <a:pPr algn="r">
-              <a:defRPr sz="1100" b="0">
-                <a:solidFill>
-                  <a:srgbClr val="E2E7ED"/>
-                </a:solidFill>
-                <a:latin typeface="Noto Sans CJK SC"/>
-              </a:defRPr>
-            </a:pPr>
             <a:r>
               <a:t>MedSparseSNN + benchmark view</a:t>
             </a:r>
@@ -23012,14 +20788,6 @@
           </a:bodyPr>
           <a:lstStyle/>
           <a:p>
-            <a:pPr algn="l">
-              <a:defRPr sz="1000" b="0">
-                <a:solidFill>
-                  <a:srgbClr val="606C7D"/>
-                </a:solidFill>
-                <a:latin typeface="Noto Sans CJK SC"/>
-              </a:defRPr>
-            </a:pPr>
             <a:r>
               <a:t>詹绍基 | 面试汇报</a:t>
             </a:r>
@@ -23048,14 +20816,6 @@
           </a:bodyPr>
           <a:lstStyle/>
           <a:p>
-            <a:pPr algn="r">
-              <a:defRPr sz="1100" b="1">
-                <a:solidFill>
-                  <a:srgbClr val="15253F"/>
-                </a:solidFill>
-                <a:latin typeface="Noto Sans CJK SC"/>
-              </a:defRPr>
-            </a:pPr>
             <a:r>
               <a:t>06</a:t>
             </a:r>
@@ -23129,14 +20889,6 @@
           </a:bodyPr>
           <a:lstStyle/>
           <a:p>
-            <a:pPr algn="ctr">
-              <a:defRPr sz="900" b="0">
-                <a:solidFill>
-                  <a:srgbClr val="606C7D"/>
-                </a:solidFill>
-                <a:latin typeface="Noto Sans CJK SC"/>
-              </a:defRPr>
-            </a:pPr>
             <a:r>
               <a:t>开场定位</a:t>
             </a:r>
@@ -23210,14 +20962,6 @@
           </a:bodyPr>
           <a:lstStyle/>
           <a:p>
-            <a:pPr algn="ctr">
-              <a:defRPr sz="900" b="1">
-                <a:solidFill>
-                  <a:srgbClr val="FFFFFF"/>
-                </a:solidFill>
-                <a:latin typeface="Noto Sans CJK SC"/>
-              </a:defRPr>
-            </a:pPr>
             <a:r>
               <a:t>能力证明</a:t>
             </a:r>
@@ -23291,14 +21035,6 @@
           </a:bodyPr>
           <a:lstStyle/>
           <a:p>
-            <a:pPr algn="ctr">
-              <a:defRPr sz="900" b="0">
-                <a:solidFill>
-                  <a:srgbClr val="606C7D"/>
-                </a:solidFill>
-                <a:latin typeface="Noto Sans CJK SC"/>
-              </a:defRPr>
-            </a:pPr>
             <a:r>
               <a:t>对接规划</a:t>
             </a:r>
@@ -23372,14 +21108,6 @@
           </a:bodyPr>
           <a:lstStyle/>
           <a:p>
-            <a:pPr algn="ctr">
-              <a:defRPr sz="900" b="0">
-                <a:solidFill>
-                  <a:srgbClr val="606C7D"/>
-                </a:solidFill>
-                <a:latin typeface="Noto Sans CJK SC"/>
-              </a:defRPr>
-            </a:pPr>
             <a:r>
               <a:t>总结备用</a:t>
             </a:r>
@@ -23453,14 +21181,6 @@
           </a:bodyPr>
           <a:lstStyle/>
           <a:p>
-            <a:pPr algn="l">
-              <a:defRPr sz="1600" b="1">
-                <a:solidFill>
-                  <a:srgbClr val="222D3E"/>
-                </a:solidFill>
-                <a:latin typeface="Noto Sans CJK SC"/>
-              </a:defRPr>
-            </a:pPr>
             <a:r>
               <a:t>痛点</a:t>
             </a:r>
@@ -23489,14 +21209,6 @@
           </a:bodyPr>
           <a:lstStyle/>
           <a:p>
-            <a:pPr algn="l">
-              <a:defRPr sz="1500" b="0">
-                <a:solidFill>
-                  <a:srgbClr val="222D3E"/>
-                </a:solidFill>
-                <a:latin typeface="Noto Sans CJK SC"/>
-              </a:defRPr>
-            </a:pPr>
             <a:r>
               <a:t>医疗AI需同时满足</a:t>
             </a:r>
@@ -23529,14 +21241,6 @@
           </a:bodyPr>
           <a:lstStyle/>
           <a:p>
-            <a:pPr algn="l">
-              <a:defRPr sz="1600" b="1">
-                <a:solidFill>
-                  <a:srgbClr val="222D3E"/>
-                </a:solidFill>
-                <a:latin typeface="Noto Sans CJK SC"/>
-              </a:defRPr>
-            </a:pPr>
             <a:r>
               <a:t>创新</a:t>
             </a:r>
@@ -23565,14 +21269,6 @@
           </a:bodyPr>
           <a:lstStyle/>
           <a:p>
-            <a:pPr algn="l">
-              <a:defRPr sz="1500" b="0">
-                <a:solidFill>
-                  <a:srgbClr val="222D3E"/>
-                </a:solidFill>
-                <a:latin typeface="Noto Sans CJK SC"/>
-              </a:defRPr>
-            </a:pPr>
             <a:r>
               <a:t>首次在同一框架下</a:t>
             </a:r>
@@ -23605,14 +21301,6 @@
           </a:bodyPr>
           <a:lstStyle/>
           <a:p>
-            <a:pPr algn="l">
-              <a:defRPr sz="1600" b="1">
-                <a:solidFill>
-                  <a:srgbClr val="222D3E"/>
-                </a:solidFill>
-                <a:latin typeface="Noto Sans CJK SC"/>
-              </a:defRPr>
-            </a:pPr>
             <a:r>
               <a:t>结论</a:t>
             </a:r>
@@ -23641,14 +21329,6 @@
           </a:bodyPr>
           <a:lstStyle/>
           <a:p>
-            <a:pPr algn="l">
-              <a:defRPr sz="1300" b="0">
-                <a:solidFill>
-                  <a:srgbClr val="222D3E"/>
-                </a:solidFill>
-                <a:latin typeface="Noto Sans CJK SC"/>
-              </a:defRPr>
-            </a:pPr>
             <a:r>
               <a:t>SNN精度略低但能效显著，</a:t>
             </a:r>
@@ -23754,14 +21434,6 @@
           </a:bodyPr>
           <a:lstStyle/>
           <a:p>
-            <a:pPr algn="ctr">
-              <a:defRPr sz="1000" b="0">
-                <a:solidFill>
-                  <a:srgbClr val="606C7D"/>
-                </a:solidFill>
-                <a:latin typeface="Noto Sans CJK SC"/>
-              </a:defRPr>
-            </a:pPr>
             <a:r>
               <a:t>Model Accuracy Comparison</a:t>
             </a:r>
@@ -23859,14 +21531,6 @@
           </a:bodyPr>
           <a:lstStyle/>
           <a:p>
-            <a:pPr algn="ctr">
-              <a:defRPr sz="1000" b="0">
-                <a:solidFill>
-                  <a:srgbClr val="606C7D"/>
-                </a:solidFill>
-                <a:latin typeface="Noto Sans CJK SC"/>
-              </a:defRPr>
-            </a:pPr>
             <a:r>
               <a:t>MIA AUC Comparison</a:t>
             </a:r>
@@ -23964,14 +21628,6 @@
           </a:bodyPr>
           <a:lstStyle/>
           <a:p>
-            <a:pPr algn="ctr">
-              <a:defRPr sz="1000" b="0">
-                <a:solidFill>
-                  <a:srgbClr val="606C7D"/>
-                </a:solidFill>
-                <a:latin typeface="Noto Sans CJK SC"/>
-              </a:defRPr>
-            </a:pPr>
             <a:r>
               <a:t>Latency-Energy Trade-off</a:t>
             </a:r>
@@ -24000,14 +21656,6 @@
           </a:bodyPr>
           <a:lstStyle/>
           <a:p>
-            <a:pPr algn="l">
-              <a:defRPr sz="800" b="0">
-                <a:solidFill>
-                  <a:srgbClr val="606C7D"/>
-                </a:solidFill>
-                <a:latin typeface="Noto Sans CJK SC"/>
-              </a:defRPr>
-            </a:pPr>
             <a:r>
               <a:t>Source: 本人独立完成的MedSparseSNN项目全流程实验输出</a:t>
             </a:r>
@@ -24126,14 +21774,6 @@
           </a:bodyPr>
           <a:lstStyle/>
           <a:p>
-            <a:pPr algn="ctr">
-              <a:defRPr sz="1000" b="1">
-                <a:solidFill>
-                  <a:srgbClr val="FFFFFF"/>
-                </a:solidFill>
-                <a:latin typeface="Noto Sans CJK SC"/>
-              </a:defRPr>
-            </a:pPr>
             <a:r>
               <a:t>Key Takeaway</a:t>
             </a:r>
@@ -24162,14 +21802,6 @@
           </a:bodyPr>
           <a:lstStyle/>
           <a:p>
-            <a:pPr algn="l">
-              <a:defRPr sz="1400" b="0">
-                <a:solidFill>
-                  <a:srgbClr val="FFFFFF"/>
-                </a:solidFill>
-                <a:latin typeface="Noto Sans CJK SC"/>
-              </a:defRPr>
-            </a:pPr>
             <a:r>
               <a:t>验证了 SNN 在真实场景的可部署性，为大规模 SNN 在边缘端、行业场景的落地提供了完整的多目标评估范式，可直接服务课题组大规模 SNN 的可信落地研究。</a:t>
             </a:r>
@@ -24351,14 +21983,6 @@
           </a:bodyPr>
           <a:lstStyle/>
           <a:p>
-            <a:pPr algn="l">
-              <a:defRPr sz="2400" b="1">
-                <a:solidFill>
-                  <a:srgbClr val="FFFFFF"/>
-                </a:solidFill>
-                <a:latin typeface="Noto Serif CJK SC"/>
-              </a:defRPr>
-            </a:pPr>
             <a:r>
               <a:t>7. 成果4：统一多目标评测基准</a:t>
             </a:r>
@@ -24387,14 +22011,6 @@
           </a:bodyPr>
           <a:lstStyle/>
           <a:p>
-            <a:pPr algn="r">
-              <a:defRPr sz="1100" b="0">
-                <a:solidFill>
-                  <a:srgbClr val="E2E7ED"/>
-                </a:solidFill>
-                <a:latin typeface="Noto Sans CJK SC"/>
-              </a:defRPr>
-            </a:pPr>
             <a:r>
               <a:t>PrivEnergyBench for large-scale SNN</a:t>
             </a:r>
@@ -24468,14 +22084,6 @@
           </a:bodyPr>
           <a:lstStyle/>
           <a:p>
-            <a:pPr algn="l">
-              <a:defRPr sz="1000" b="0">
-                <a:solidFill>
-                  <a:srgbClr val="606C7D"/>
-                </a:solidFill>
-                <a:latin typeface="Noto Sans CJK SC"/>
-              </a:defRPr>
-            </a:pPr>
             <a:r>
               <a:t>詹绍基 | 面试汇报</a:t>
             </a:r>
@@ -24504,14 +22112,6 @@
           </a:bodyPr>
           <a:lstStyle/>
           <a:p>
-            <a:pPr algn="r">
-              <a:defRPr sz="1100" b="1">
-                <a:solidFill>
-                  <a:srgbClr val="15253F"/>
-                </a:solidFill>
-                <a:latin typeface="Noto Sans CJK SC"/>
-              </a:defRPr>
-            </a:pPr>
             <a:r>
               <a:t>07</a:t>
             </a:r>
@@ -24585,14 +22185,6 @@
           </a:bodyPr>
           <a:lstStyle/>
           <a:p>
-            <a:pPr algn="ctr">
-              <a:defRPr sz="900" b="0">
-                <a:solidFill>
-                  <a:srgbClr val="606C7D"/>
-                </a:solidFill>
-                <a:latin typeface="Noto Sans CJK SC"/>
-              </a:defRPr>
-            </a:pPr>
             <a:r>
               <a:t>开场定位</a:t>
             </a:r>
@@ -24666,14 +22258,6 @@
           </a:bodyPr>
           <a:lstStyle/>
           <a:p>
-            <a:pPr algn="ctr">
-              <a:defRPr sz="900" b="1">
-                <a:solidFill>
-                  <a:srgbClr val="FFFFFF"/>
-                </a:solidFill>
-                <a:latin typeface="Noto Sans CJK SC"/>
-              </a:defRPr>
-            </a:pPr>
             <a:r>
               <a:t>能力证明</a:t>
             </a:r>
@@ -24747,14 +22331,6 @@
           </a:bodyPr>
           <a:lstStyle/>
           <a:p>
-            <a:pPr algn="ctr">
-              <a:defRPr sz="900" b="0">
-                <a:solidFill>
-                  <a:srgbClr val="606C7D"/>
-                </a:solidFill>
-                <a:latin typeface="Noto Sans CJK SC"/>
-              </a:defRPr>
-            </a:pPr>
             <a:r>
               <a:t>对接规划</a:t>
             </a:r>
@@ -24828,14 +22404,6 @@
           </a:bodyPr>
           <a:lstStyle/>
           <a:p>
-            <a:pPr algn="ctr">
-              <a:defRPr sz="900" b="0">
-                <a:solidFill>
-                  <a:srgbClr val="606C7D"/>
-                </a:solidFill>
-                <a:latin typeface="Noto Sans CJK SC"/>
-              </a:defRPr>
-            </a:pPr>
             <a:r>
               <a:t>总结备用</a:t>
             </a:r>
@@ -24909,14 +22477,6 @@
           </a:bodyPr>
           <a:lstStyle/>
           <a:p>
-            <a:pPr algn="l">
-              <a:defRPr sz="1600" b="1">
-                <a:solidFill>
-                  <a:srgbClr val="222D3E"/>
-                </a:solidFill>
-                <a:latin typeface="Noto Sans CJK SC"/>
-              </a:defRPr>
-            </a:pPr>
             <a:r>
               <a:t>核心价值</a:t>
             </a:r>
@@ -24945,107 +22505,27 @@
           </a:bodyPr>
           <a:lstStyle/>
           <a:p>
-            <a:pPr>
-              <a:spcAft>
-                <a:spcPts val="700"/>
-              </a:spcAft>
-              <a:defRPr sz="1400">
-                <a:solidFill>
-                  <a:srgbClr val="222D3E"/>
-                </a:solidFill>
-                <a:latin typeface="Noto Sans CJK SC"/>
-              </a:defRPr>
-            </a:pPr>
-            <a:r>
-              <a:rPr>
-                <a:solidFill>
-                  <a:srgbClr val="222D3E"/>
-                </a:solidFill>
-              </a:rPr>
+            <a:r>
               <a:t>统一性能-隐私-能效指标体系。</a:t>
             </a:r>
           </a:p>
           <a:p>
-            <a:pPr>
-              <a:spcAft>
-                <a:spcPts val="700"/>
-              </a:spcAft>
-              <a:defRPr sz="1400">
-                <a:solidFill>
-                  <a:srgbClr val="222D3E"/>
-                </a:solidFill>
-                <a:latin typeface="Noto Sans CJK SC"/>
-              </a:defRPr>
-            </a:pPr>
-            <a:r>
-              <a:rPr>
-                <a:solidFill>
-                  <a:srgbClr val="222D3E"/>
-                </a:solidFill>
-              </a:rPr>
+            <a:r>
               <a:t>多模型同坐标横向比较。</a:t>
             </a:r>
           </a:p>
           <a:p>
-            <a:pPr>
-              <a:spcAft>
-                <a:spcPts val="700"/>
-              </a:spcAft>
-              <a:defRPr sz="1400">
-                <a:solidFill>
-                  <a:srgbClr val="222D3E"/>
-                </a:solidFill>
-                <a:latin typeface="Noto Sans CJK SC"/>
-              </a:defRPr>
-            </a:pPr>
-            <a:r>
-              <a:rPr>
-                <a:solidFill>
-                  <a:srgbClr val="222D3E"/>
-                </a:solidFill>
-              </a:rPr>
+            <a:r>
               <a:t>自动统计与Pareto可视化。</a:t>
             </a:r>
           </a:p>
           <a:p>
-            <a:pPr>
-              <a:spcAft>
-                <a:spcPts val="700"/>
-              </a:spcAft>
-              <a:defRPr sz="1400">
-                <a:solidFill>
-                  <a:srgbClr val="222D3E"/>
-                </a:solidFill>
-                <a:latin typeface="Noto Sans CJK SC"/>
-              </a:defRPr>
-            </a:pPr>
-            <a:r>
-              <a:rPr>
-                <a:solidFill>
-                  <a:srgbClr val="222D3E"/>
-                </a:solidFill>
-              </a:rPr>
+            <a:r>
               <a:t>可直接支撑大规模SNN架构搜索与多目标优化。</a:t>
             </a:r>
           </a:p>
           <a:p>
-            <a:pPr>
-              <a:spcAft>
-                <a:spcPts val="700"/>
-              </a:spcAft>
-              <a:defRPr sz="1400">
-                <a:solidFill>
-                  <a:srgbClr val="222D3E"/>
-                </a:solidFill>
-                <a:latin typeface="Noto Sans CJK SC"/>
-              </a:defRPr>
-            </a:pPr>
-            <a:r>
-              <a:rPr>
-                <a:solidFill>
-                  <a:srgbClr val="222D3E"/>
-                </a:solidFill>
-              </a:rPr>
+            <a:r>
               <a:t>全流程可复现实验报告。</a:t>
             </a:r>
           </a:p>
@@ -25073,14 +22553,6 @@
           </a:bodyPr>
           <a:lstStyle/>
           <a:p>
-            <a:pPr algn="l">
-              <a:defRPr sz="1600" b="1">
-                <a:solidFill>
-                  <a:srgbClr val="222D3E"/>
-                </a:solidFill>
-                <a:latin typeface="Noto Sans CJK SC"/>
-              </a:defRPr>
-            </a:pPr>
             <a:r>
               <a:t>示例</a:t>
             </a:r>
@@ -25109,14 +22581,6 @@
           </a:bodyPr>
           <a:lstStyle/>
           <a:p>
-            <a:pPr algn="l">
-              <a:defRPr sz="1400" b="0">
-                <a:solidFill>
-                  <a:srgbClr val="222D3E"/>
-                </a:solidFill>
-                <a:latin typeface="Noto Sans CJK SC"/>
-              </a:defRPr>
-            </a:pPr>
             <a:r>
               <a:t>MLP val_acc=0.9208；</a:t>
             </a:r>
@@ -25218,14 +22682,6 @@
           </a:bodyPr>
           <a:lstStyle/>
           <a:p>
-            <a:pPr algn="ctr">
-              <a:defRPr sz="1000" b="0">
-                <a:solidFill>
-                  <a:srgbClr val="606C7D"/>
-                </a:solidFill>
-                <a:latin typeface="Noto Sans CJK SC"/>
-              </a:defRPr>
-            </a:pPr>
             <a:r>
               <a:t>Unified Pareto View</a:t>
             </a:r>
@@ -25254,14 +22710,6 @@
           </a:bodyPr>
           <a:lstStyle/>
           <a:p>
-            <a:pPr algn="l">
-              <a:defRPr sz="800" b="0">
-                <a:solidFill>
-                  <a:srgbClr val="606C7D"/>
-                </a:solidFill>
-                <a:latin typeface="Noto Sans CJK SC"/>
-              </a:defRPr>
-            </a:pPr>
             <a:r>
               <a:t>Source: 本人独立完成的PrivEnergyBench项目全流程实验输出</a:t>
             </a:r>
@@ -25380,14 +22828,6 @@
           </a:bodyPr>
           <a:lstStyle/>
           <a:p>
-            <a:pPr algn="ctr">
-              <a:defRPr sz="1000" b="1">
-                <a:solidFill>
-                  <a:srgbClr val="FFFFFF"/>
-                </a:solidFill>
-                <a:latin typeface="Noto Sans CJK SC"/>
-              </a:defRPr>
-            </a:pPr>
             <a:r>
               <a:t>Key Takeaway</a:t>
             </a:r>
@@ -25416,14 +22856,6 @@
           </a:bodyPr>
           <a:lstStyle/>
           <a:p>
-            <a:pPr algn="l">
-              <a:defRPr sz="1400" b="0">
-                <a:solidFill>
-                  <a:srgbClr val="FFFFFF"/>
-                </a:solidFill>
-                <a:latin typeface="Noto Sans CJK SC"/>
-              </a:defRPr>
-            </a:pPr>
             <a:r>
               <a:t>我已搭建好面向大规模 SNN 的可复用多目标评测底座，可直接承接课题组大规模 SNN 架构搜索、多目标优化与可信 AI 课题，无需从零搭建评测体系。</a:t>
             </a:r>
@@ -25605,14 +23037,6 @@
           </a:bodyPr>
           <a:lstStyle/>
           <a:p>
-            <a:pPr algn="l">
-              <a:defRPr sz="2400" b="1">
-                <a:solidFill>
-                  <a:srgbClr val="FFFFFF"/>
-                </a:solidFill>
-                <a:latin typeface="Noto Serif CJK SC"/>
-              </a:defRPr>
-            </a:pPr>
             <a:r>
               <a:t>8. 项目小结：全闭环科研能力</a:t>
             </a:r>
@@ -25641,16 +23065,8 @@
           </a:bodyPr>
           <a:lstStyle/>
           <a:p>
-            <a:pPr algn="r">
-              <a:defRPr sz="1100" b="0">
-                <a:solidFill>
-                  <a:srgbClr val="E2E7ED"/>
-                </a:solidFill>
-                <a:latin typeface="Noto Sans CJK SC"/>
-              </a:defRPr>
-            </a:pPr>
-            <a:r>
-              <a:t>Capability proof</a:t>
+            <a:r>
+              <a:t>能力总结</a:t>
             </a:r>
           </a:p>
         </p:txBody>
@@ -25722,14 +23138,6 @@
           </a:bodyPr>
           <a:lstStyle/>
           <a:p>
-            <a:pPr algn="l">
-              <a:defRPr sz="1000" b="0">
-                <a:solidFill>
-                  <a:srgbClr val="606C7D"/>
-                </a:solidFill>
-                <a:latin typeface="Noto Sans CJK SC"/>
-              </a:defRPr>
-            </a:pPr>
             <a:r>
               <a:t>詹绍基 | 面试汇报</a:t>
             </a:r>
@@ -25758,14 +23166,6 @@
           </a:bodyPr>
           <a:lstStyle/>
           <a:p>
-            <a:pPr algn="r">
-              <a:defRPr sz="1100" b="1">
-                <a:solidFill>
-                  <a:srgbClr val="15253F"/>
-                </a:solidFill>
-                <a:latin typeface="Noto Sans CJK SC"/>
-              </a:defRPr>
-            </a:pPr>
             <a:r>
               <a:t>08</a:t>
             </a:r>
@@ -25839,14 +23239,6 @@
           </a:bodyPr>
           <a:lstStyle/>
           <a:p>
-            <a:pPr algn="ctr">
-              <a:defRPr sz="900" b="0">
-                <a:solidFill>
-                  <a:srgbClr val="606C7D"/>
-                </a:solidFill>
-                <a:latin typeface="Noto Sans CJK SC"/>
-              </a:defRPr>
-            </a:pPr>
             <a:r>
               <a:t>开场定位</a:t>
             </a:r>
@@ -25920,14 +23312,6 @@
           </a:bodyPr>
           <a:lstStyle/>
           <a:p>
-            <a:pPr algn="ctr">
-              <a:defRPr sz="900" b="1">
-                <a:solidFill>
-                  <a:srgbClr val="FFFFFF"/>
-                </a:solidFill>
-                <a:latin typeface="Noto Sans CJK SC"/>
-              </a:defRPr>
-            </a:pPr>
             <a:r>
               <a:t>能力证明</a:t>
             </a:r>
@@ -26001,14 +23385,6 @@
           </a:bodyPr>
           <a:lstStyle/>
           <a:p>
-            <a:pPr algn="ctr">
-              <a:defRPr sz="900" b="0">
-                <a:solidFill>
-                  <a:srgbClr val="606C7D"/>
-                </a:solidFill>
-                <a:latin typeface="Noto Sans CJK SC"/>
-              </a:defRPr>
-            </a:pPr>
             <a:r>
               <a:t>对接规划</a:t>
             </a:r>
@@ -26082,14 +23458,6 @@
           </a:bodyPr>
           <a:lstStyle/>
           <a:p>
-            <a:pPr algn="ctr">
-              <a:defRPr sz="900" b="0">
-                <a:solidFill>
-                  <a:srgbClr val="606C7D"/>
-                </a:solidFill>
-                <a:latin typeface="Noto Sans CJK SC"/>
-              </a:defRPr>
-            </a:pPr>
             <a:r>
               <a:t>总结备用</a:t>
             </a:r>
@@ -26208,14 +23576,6 @@
           </a:bodyPr>
           <a:lstStyle/>
           <a:p>
-            <a:pPr algn="l">
-              <a:defRPr sz="1600" b="1">
-                <a:solidFill>
-                  <a:srgbClr val="222D3E"/>
-                </a:solidFill>
-                <a:latin typeface="Noto Sans CJK SC"/>
-              </a:defRPr>
-            </a:pPr>
             <a:r>
               <a:t>问题定义能力</a:t>
             </a:r>
@@ -26244,14 +23604,6 @@
           </a:bodyPr>
           <a:lstStyle/>
           <a:p>
-            <a:pPr algn="l">
-              <a:defRPr sz="1300" b="0">
-                <a:solidFill>
-                  <a:srgbClr val="606C7D"/>
-                </a:solidFill>
-                <a:latin typeface="Noto Sans CJK SC"/>
-              </a:defRPr>
-            </a:pPr>
             <a:r>
               <a:t>从真实约束出发而非追逐热点</a:t>
             </a:r>
@@ -26378,14 +23730,6 @@
           </a:bodyPr>
           <a:lstStyle/>
           <a:p>
-            <a:pPr algn="l">
-              <a:defRPr sz="1600" b="1">
-                <a:solidFill>
-                  <a:srgbClr val="222D3E"/>
-                </a:solidFill>
-                <a:latin typeface="Noto Sans CJK SC"/>
-              </a:defRPr>
-            </a:pPr>
             <a:r>
               <a:t>全链路执行能力</a:t>
             </a:r>
@@ -26414,14 +23758,6 @@
           </a:bodyPr>
           <a:lstStyle/>
           <a:p>
-            <a:pPr algn="l">
-              <a:defRPr sz="1300" b="0">
-                <a:solidFill>
-                  <a:srgbClr val="606C7D"/>
-                </a:solidFill>
-                <a:latin typeface="Noto Sans CJK SC"/>
-              </a:defRPr>
-            </a:pPr>
             <a:r>
               <a:t>脚本开发-训练-统计-可视化全流程</a:t>
             </a:r>
@@ -26552,14 +23888,6 @@
           </a:bodyPr>
           <a:lstStyle/>
           <a:p>
-            <a:pPr algn="l">
-              <a:defRPr sz="1600" b="1">
-                <a:solidFill>
-                  <a:srgbClr val="222D3E"/>
-                </a:solidFill>
-                <a:latin typeface="Noto Sans CJK SC"/>
-              </a:defRPr>
-            </a:pPr>
             <a:r>
               <a:t>多目标评估能力</a:t>
             </a:r>
@@ -26588,14 +23916,6 @@
           </a:bodyPr>
           <a:lstStyle/>
           <a:p>
-            <a:pPr algn="l">
-              <a:defRPr sz="1300" b="0">
-                <a:solidFill>
-                  <a:srgbClr val="606C7D"/>
-                </a:solidFill>
-                <a:latin typeface="Noto Sans CJK SC"/>
-              </a:defRPr>
-            </a:pPr>
             <a:r>
               <a:t>性能-隐私-能效统一分析</a:t>
             </a:r>
@@ -26722,14 +24042,6 @@
           </a:bodyPr>
           <a:lstStyle/>
           <a:p>
-            <a:pPr algn="l">
-              <a:defRPr sz="1600" b="1">
-                <a:solidFill>
-                  <a:srgbClr val="222D3E"/>
-                </a:solidFill>
-                <a:latin typeface="Noto Sans CJK SC"/>
-              </a:defRPr>
-            </a:pPr>
             <a:r>
               <a:t>研究延展能力</a:t>
             </a:r>
@@ -26758,14 +24070,6 @@
           </a:bodyPr>
           <a:lstStyle/>
           <a:p>
-            <a:pPr algn="l">
-              <a:defRPr sz="1300" b="0">
-                <a:solidFill>
-                  <a:srgbClr val="606C7D"/>
-                </a:solidFill>
-                <a:latin typeface="Noto Sans CJK SC"/>
-              </a:defRPr>
-            </a:pPr>
             <a:r>
               <a:t>从机制验证到基础设施形成路线</a:t>
             </a:r>
@@ -26802,16 +24106,8 @@
           </a:bodyPr>
           <a:lstStyle/>
           <a:p>
-            <a:pPr algn="ctr">
-              <a:defRPr sz="1400" b="1">
-                <a:solidFill>
-                  <a:srgbClr val="15253F"/>
-                </a:solidFill>
-                <a:latin typeface="Noto Sans CJK SC"/>
-              </a:defRPr>
-            </a:pPr>
-            <a:r>
-              <a:t>具备具身智能场景 SNN 从环境搭建到评测的完整实践经验（岗位优先录用项）</a:t>
+            <a:r>
+              <a:t>具备具身智能场景下 SNN 从环境搭建到评测的完整实践经验</a:t>
             </a:r>
           </a:p>
         </p:txBody>
@@ -26928,14 +24224,6 @@
           </a:bodyPr>
           <a:lstStyle/>
           <a:p>
-            <a:pPr algn="ctr">
-              <a:defRPr sz="1000" b="1">
-                <a:solidFill>
-                  <a:srgbClr val="FFFFFF"/>
-                </a:solidFill>
-                <a:latin typeface="Noto Sans CJK SC"/>
-              </a:defRPr>
-            </a:pPr>
             <a:r>
               <a:t>Key Takeaway</a:t>
             </a:r>
@@ -26964,14 +24252,6 @@
           </a:bodyPr>
           <a:lstStyle/>
           <a:p>
-            <a:pPr algn="l">
-              <a:defRPr sz="1400" b="0">
-                <a:solidFill>
-                  <a:srgbClr val="FFFFFF"/>
-                </a:solidFill>
-                <a:latin typeface="Noto Sans CJK SC"/>
-              </a:defRPr>
-            </a:pPr>
             <a:r>
               <a:t>我具备高水平研究全流程基础，并已完成4份实验报告与10+组图表，可直接协助团队论文撰写与投稿。</a:t>
             </a:r>
@@ -27153,14 +24433,6 @@
           </a:bodyPr>
           <a:lstStyle/>
           <a:p>
-            <a:pPr algn="l">
-              <a:defRPr sz="2400" b="1">
-                <a:solidFill>
-                  <a:srgbClr val="FFFFFF"/>
-                </a:solidFill>
-                <a:latin typeface="Noto Serif CJK SC"/>
-              </a:defRPr>
-            </a:pPr>
             <a:r>
               <a:t>9. 核心契合：方法论与实验室同频</a:t>
             </a:r>
@@ -27189,16 +24461,8 @@
           </a:bodyPr>
           <a:lstStyle/>
           <a:p>
-            <a:pPr algn="r">
-              <a:defRPr sz="1100" b="0">
-                <a:solidFill>
-                  <a:srgbClr val="E2E7ED"/>
-                </a:solidFill>
-                <a:latin typeface="Noto Sans CJK SC"/>
-              </a:defRPr>
-            </a:pPr>
-            <a:r>
-              <a:t>LeCun + Sutton + Lab directions</a:t>
+            <a:r>
+              <a:t>方法论与课题方向对齐</a:t>
             </a:r>
           </a:p>
         </p:txBody>
@@ -27270,14 +24534,6 @@
           </a:bodyPr>
           <a:lstStyle/>
           <a:p>
-            <a:pPr algn="l">
-              <a:defRPr sz="1000" b="0">
-                <a:solidFill>
-                  <a:srgbClr val="606C7D"/>
-                </a:solidFill>
-                <a:latin typeface="Noto Sans CJK SC"/>
-              </a:defRPr>
-            </a:pPr>
             <a:r>
               <a:t>詹绍基 | 面试汇报</a:t>
             </a:r>
@@ -27306,14 +24562,6 @@
           </a:bodyPr>
           <a:lstStyle/>
           <a:p>
-            <a:pPr algn="r">
-              <a:defRPr sz="1100" b="1">
-                <a:solidFill>
-                  <a:srgbClr val="15253F"/>
-                </a:solidFill>
-                <a:latin typeface="Noto Sans CJK SC"/>
-              </a:defRPr>
-            </a:pPr>
             <a:r>
               <a:t>09</a:t>
             </a:r>
@@ -27387,14 +24635,6 @@
           </a:bodyPr>
           <a:lstStyle/>
           <a:p>
-            <a:pPr algn="ctr">
-              <a:defRPr sz="900" b="0">
-                <a:solidFill>
-                  <a:srgbClr val="606C7D"/>
-                </a:solidFill>
-                <a:latin typeface="Noto Sans CJK SC"/>
-              </a:defRPr>
-            </a:pPr>
             <a:r>
               <a:t>开场定位</a:t>
             </a:r>
@@ -27468,14 +24708,6 @@
           </a:bodyPr>
           <a:lstStyle/>
           <a:p>
-            <a:pPr algn="ctr">
-              <a:defRPr sz="900" b="0">
-                <a:solidFill>
-                  <a:srgbClr val="606C7D"/>
-                </a:solidFill>
-                <a:latin typeface="Noto Sans CJK SC"/>
-              </a:defRPr>
-            </a:pPr>
             <a:r>
               <a:t>能力证明</a:t>
             </a:r>
@@ -27549,14 +24781,6 @@
           </a:bodyPr>
           <a:lstStyle/>
           <a:p>
-            <a:pPr algn="ctr">
-              <a:defRPr sz="900" b="1">
-                <a:solidFill>
-                  <a:srgbClr val="FFFFFF"/>
-                </a:solidFill>
-                <a:latin typeface="Noto Sans CJK SC"/>
-              </a:defRPr>
-            </a:pPr>
             <a:r>
               <a:t>对接规划</a:t>
             </a:r>
@@ -27630,14 +24854,6 @@
           </a:bodyPr>
           <a:lstStyle/>
           <a:p>
-            <a:pPr algn="ctr">
-              <a:defRPr sz="900" b="0">
-                <a:solidFill>
-                  <a:srgbClr val="606C7D"/>
-                </a:solidFill>
-                <a:latin typeface="Noto Sans CJK SC"/>
-              </a:defRPr>
-            </a:pPr>
             <a:r>
               <a:t>总结备用</a:t>
             </a:r>
@@ -27756,14 +24972,6 @@
           </a:bodyPr>
           <a:lstStyle/>
           <a:p>
-            <a:pPr algn="l">
-              <a:defRPr sz="1600" b="1">
-                <a:solidFill>
-                  <a:srgbClr val="222D3E"/>
-                </a:solidFill>
-                <a:latin typeface="Noto Sans CJK SC"/>
-              </a:defRPr>
-            </a:pPr>
             <a:r>
               <a:t>对齐 LeCun</a:t>
             </a:r>
@@ -27792,14 +25000,6 @@
           </a:bodyPr>
           <a:lstStyle/>
           <a:p>
-            <a:pPr algn="l">
-              <a:defRPr sz="1300" b="0">
-                <a:solidFill>
-                  <a:srgbClr val="606C7D"/>
-                </a:solidFill>
-                <a:latin typeface="Noto Sans CJK SC"/>
-              </a:defRPr>
-            </a:pPr>
             <a:r>
               <a:t>世界模型、自监督表征、长时规划</a:t>
             </a:r>
@@ -27922,14 +25122,6 @@
           </a:bodyPr>
           <a:lstStyle/>
           <a:p>
-            <a:pPr algn="l">
-              <a:defRPr sz="1600" b="1">
-                <a:solidFill>
-                  <a:srgbClr val="222D3E"/>
-                </a:solidFill>
-                <a:latin typeface="Noto Sans CJK SC"/>
-              </a:defRPr>
-            </a:pPr>
             <a:r>
               <a:t>对齐 Sutton</a:t>
             </a:r>
@@ -27958,14 +25150,6 @@
           </a:bodyPr>
           <a:lstStyle/>
           <a:p>
-            <a:pPr algn="l">
-              <a:defRPr sz="1300" b="0">
-                <a:solidFill>
-                  <a:srgbClr val="606C7D"/>
-                </a:solidFill>
-                <a:latin typeface="Noto Sans CJK SC"/>
-              </a:defRPr>
-            </a:pPr>
             <a:r>
               <a:t>通用方法、搜索与学习、可扩展架构</a:t>
             </a:r>
@@ -28088,14 +25272,6 @@
           </a:bodyPr>
           <a:lstStyle/>
           <a:p>
-            <a:pPr algn="l">
-              <a:defRPr sz="1600" b="1">
-                <a:solidFill>
-                  <a:srgbClr val="222D3E"/>
-                </a:solidFill>
-                <a:latin typeface="Noto Sans CJK SC"/>
-              </a:defRPr>
-            </a:pPr>
             <a:r>
               <a:t>类脑智能方向</a:t>
             </a:r>
@@ -28124,14 +25300,6 @@
           </a:bodyPr>
           <a:lstStyle/>
           <a:p>
-            <a:pPr algn="l">
-              <a:defRPr sz="1300" b="0">
-                <a:solidFill>
-                  <a:srgbClr val="606C7D"/>
-                </a:solidFill>
-                <a:latin typeface="Noto Sans CJK SC"/>
-              </a:defRPr>
-            </a:pPr>
             <a:r>
               <a:t>对接 SpiLiFormer (ICCV 2025)</a:t>
             </a:r>
@@ -28258,14 +25426,6 @@
           </a:bodyPr>
           <a:lstStyle/>
           <a:p>
-            <a:pPr algn="l">
-              <a:defRPr sz="1600" b="1">
-                <a:solidFill>
-                  <a:srgbClr val="222D3E"/>
-                </a:solidFill>
-                <a:latin typeface="Noto Sans CJK SC"/>
-              </a:defRPr>
-            </a:pPr>
             <a:r>
               <a:t>可信AI与优化</a:t>
             </a:r>
@@ -28294,14 +25454,6 @@
           </a:bodyPr>
           <a:lstStyle/>
           <a:p>
-            <a:pPr algn="l">
-              <a:defRPr sz="1300" b="0">
-                <a:solidFill>
-                  <a:srgbClr val="606C7D"/>
-                </a:solidFill>
-                <a:latin typeface="Noto Sans CJK SC"/>
-              </a:defRPr>
-            </a:pPr>
             <a:r>
               <a:t>对接 TEVC 2024 联邦多目标优化</a:t>
             </a:r>
@@ -28428,14 +25580,6 @@
           </a:bodyPr>
           <a:lstStyle/>
           <a:p>
-            <a:pPr algn="l">
-              <a:defRPr sz="1600" b="1">
-                <a:solidFill>
-                  <a:srgbClr val="222D3E"/>
-                </a:solidFill>
-                <a:latin typeface="Noto Sans CJK SC"/>
-              </a:defRPr>
-            </a:pPr>
             <a:r>
               <a:t>具身智能</a:t>
             </a:r>
@@ -28464,14 +25608,6 @@
           </a:bodyPr>
           <a:lstStyle/>
           <a:p>
-            <a:pPr algn="l">
-              <a:defRPr sz="1300" b="0">
-                <a:solidFill>
-                  <a:srgbClr val="606C7D"/>
-                </a:solidFill>
-                <a:latin typeface="Noto Sans CJK SC"/>
-              </a:defRPr>
-            </a:pPr>
             <a:r>
               <a:t>对接 TEVC 2025 形态进化</a:t>
             </a:r>
@@ -28598,14 +25734,6 @@
           </a:bodyPr>
           <a:lstStyle/>
           <a:p>
-            <a:pPr algn="ctr">
-              <a:defRPr sz="1000" b="1">
-                <a:solidFill>
-                  <a:srgbClr val="FFFFFF"/>
-                </a:solidFill>
-                <a:latin typeface="Noto Sans CJK SC"/>
-              </a:defRPr>
-            </a:pPr>
             <a:r>
               <a:t>Key Takeaway</a:t>
             </a:r>
@@ -28634,16 +25762,8 @@
           </a:bodyPr>
           <a:lstStyle/>
           <a:p>
-            <a:pPr algn="l">
-              <a:defRPr sz="1400" b="0">
-                <a:solidFill>
-                  <a:srgbClr val="FFFFFF"/>
-                </a:solidFill>
-                <a:latin typeface="Noto Sans CJK SC"/>
-              </a:defRPr>
-            </a:pPr>
-            <a:r>
-              <a:t>不是泛泛对接，而是给出可执行的三条落地动作，可直接进入课题组现有研究流程。</a:t>
+            <a:r>
+              <a:t>我已给出可执行的落地动作，可与现有研究流程快速衔接。</a:t>
             </a:r>
           </a:p>
         </p:txBody>
